--- a/agent-harness/docs/harness-engineering.pptx
+++ b/agent-harness/docs/harness-engineering.pptx
@@ -12,6 +12,8 @@
     <p:sldId id="260" r:id="rId11"/>
     <p:sldId id="261" r:id="rId12"/>
     <p:sldId id="262" r:id="rId13"/>
+    <p:sldId id="263" r:id="rId14"/>
+    <p:sldId id="264" r:id="rId15"/>
   </p:sldIdLst>
   <p:sldSz cx="12191695" cy="6858000" type="screen4x3"/>
   <p:notesSz cx="6858000" cy="9144000"/>
@@ -3680,7 +3682,7 @@
                 </a:solidFill>
                 <a:latin typeface="Meiryo"/>
               </a:rPr>
-              <a:t>なぜ「ハーネス」なのか</a:t>
+              <a:t>AIエージェントとは？</a:t>
             </a:r>
           </a:p>
           <a:p>
@@ -3699,7 +3701,7 @@
                 </a:solidFill>
                 <a:latin typeface="Meiryo"/>
               </a:rPr>
-              <a:t>3つの問いの違い</a:t>
+              <a:t>McKinsey「What is an AI agent?」より</a:t>
             </a:r>
           </a:p>
         </p:txBody>
@@ -3712,8 +3714,131 @@
         </p:nvSpPr>
         <p:spPr>
           <a:xfrm>
-            <a:off x="548640" y="1554480"/>
-            <a:ext cx="3611880" cy="2377440"/>
+            <a:off x="548640" y="1417320"/>
+            <a:ext cx="11064240" cy="1325880"/>
+          </a:xfrm>
+          <a:prstGeom prst="rect">
+            <a:avLst/>
+          </a:prstGeom>
+          <a:solidFill>
+            <a:srgbClr val="4C3AE3"/>
+          </a:solidFill>
+          <a:ln>
+            <a:noFill/>
+          </a:ln>
+          <a:effectLst/>
+        </p:spPr>
+        <p:style>
+          <a:lnRef idx="1">
+            <a:schemeClr val="accent1"/>
+          </a:lnRef>
+          <a:fillRef idx="3">
+            <a:schemeClr val="accent1"/>
+          </a:fillRef>
+          <a:effectRef idx="2">
+            <a:schemeClr val="accent1"/>
+          </a:effectRef>
+          <a:fontRef idx="minor">
+            <a:schemeClr val="lt1"/>
+          </a:fontRef>
+        </p:style>
+        <p:txBody>
+          <a:bodyPr rtlCol="0" anchor="ctr"/>
+          <a:lstStyle/>
+          <a:p>
+            <a:pPr algn="ctr"/>
+          </a:p>
+        </p:txBody>
+      </p:sp>
+      <p:sp>
+        <p:nvSpPr>
+          <p:cNvPr id="8" name="TextBox 7"/>
+          <p:cNvSpPr txBox="1"/>
+          <p:nvPr/>
+        </p:nvSpPr>
+        <p:spPr>
+          <a:xfrm>
+            <a:off x="822960" y="1508760"/>
+            <a:ext cx="10515600" cy="1143000"/>
+          </a:xfrm>
+          <a:prstGeom prst="rect">
+            <a:avLst/>
+          </a:prstGeom>
+          <a:noFill/>
+        </p:spPr>
+        <p:txBody>
+          <a:bodyPr wrap="square" anchor="ctr">
+            <a:spAutoFit/>
+          </a:bodyPr>
+          <a:lstStyle/>
+          <a:p>
+            <a:pPr algn="l">
+              <a:lnSpc>
+                <a:spcPct val="120000"/>
+              </a:lnSpc>
+              <a:spcAft>
+                <a:spcPts val="600"/>
+              </a:spcAft>
+            </a:pPr>
+            <a:r>
+              <a:rPr sz="2000" b="0">
+                <a:solidFill>
+                  <a:srgbClr val="FFFFFF"/>
+                </a:solidFill>
+                <a:latin typeface="Meiryo"/>
+              </a:rPr>
+              <a:t>目標に向けて </a:t>
+            </a:r>
+            <a:r>
+              <a:rPr sz="2000" b="1">
+                <a:solidFill>
+                  <a:srgbClr val="FFFFFF"/>
+                </a:solidFill>
+                <a:latin typeface="Meiryo"/>
+              </a:rPr>
+              <a:t>知覚 → 推論・計画 → ツールで行動</a:t>
+            </a:r>
+            <a:r>
+              <a:rPr sz="2000" b="0">
+                <a:solidFill>
+                  <a:srgbClr val="FFFFFF"/>
+                </a:solidFill>
+                <a:latin typeface="Meiryo"/>
+              </a:rPr>
+              <a:t> を、</a:t>
+            </a:r>
+          </a:p>
+          <a:p>
+            <a:pPr algn="l">
+              <a:lnSpc>
+                <a:spcPct val="120000"/>
+              </a:lnSpc>
+              <a:spcAft>
+                <a:spcPts val="600"/>
+              </a:spcAft>
+            </a:pPr>
+            <a:r>
+              <a:rPr sz="2000" b="1">
+                <a:solidFill>
+                  <a:srgbClr val="FFFFFF"/>
+                </a:solidFill>
+                <a:latin typeface="Meiryo"/>
+              </a:rPr>
+              <a:t>人手を最小限に自律的に繰り返すシステム。</a:t>
+            </a:r>
+          </a:p>
+        </p:txBody>
+      </p:sp>
+      <p:sp>
+        <p:nvSpPr>
+          <p:cNvPr id="9" name="Rectangle 8"/>
+          <p:cNvSpPr/>
+          <p:nvPr/>
+        </p:nvSpPr>
+        <p:spPr>
+          <a:xfrm>
+            <a:off x="548640" y="3063240"/>
+            <a:ext cx="2697480" cy="1600200"/>
           </a:xfrm>
           <a:prstGeom prst="rect">
             <a:avLst/>
@@ -3750,20 +3875,20 @@
       </p:sp>
       <p:sp>
         <p:nvSpPr>
-          <p:cNvPr id="8" name="Rectangle 7"/>
+          <p:cNvPr id="10" name="Rectangle 9"/>
           <p:cNvSpPr/>
           <p:nvPr/>
         </p:nvSpPr>
         <p:spPr>
           <a:xfrm>
-            <a:off x="548640" y="1554480"/>
-            <a:ext cx="3611880" cy="128016"/>
+            <a:off x="548640" y="3063240"/>
+            <a:ext cx="2697480" cy="109728"/>
           </a:xfrm>
           <a:prstGeom prst="rect">
             <a:avLst/>
           </a:prstGeom>
           <a:solidFill>
-            <a:srgbClr val="B9C0D4"/>
+            <a:srgbClr val="4C3AE3"/>
           </a:solidFill>
           <a:ln>
             <a:noFill/>
@@ -3794,14 +3919,14 @@
       </p:sp>
       <p:sp>
         <p:nvSpPr>
-          <p:cNvPr id="9" name="TextBox 8"/>
+          <p:cNvPr id="11" name="TextBox 10"/>
           <p:cNvSpPr txBox="1"/>
           <p:nvPr/>
         </p:nvSpPr>
         <p:spPr>
           <a:xfrm>
-            <a:off x="822960" y="1965960"/>
-            <a:ext cx="3063240" cy="1828800"/>
+            <a:off x="777240" y="3364992"/>
+            <a:ext cx="2286000" cy="1234440"/>
           </a:xfrm>
           <a:prstGeom prst="rect">
             <a:avLst/>
@@ -3825,11 +3950,11 @@
             <a:r>
               <a:rPr sz="1700" b="1">
                 <a:solidFill>
-                  <a:srgbClr val="1F2430"/>
-                </a:solidFill>
-                <a:latin typeface="Meiryo"/>
-              </a:rPr>
-              <a:t>プロンプト・エンジニアリング</a:t>
+                  <a:srgbClr val="4C3AE3"/>
+                </a:solidFill>
+                <a:latin typeface="Meiryo"/>
+              </a:rPr>
+              <a:t>知覚</a:t>
             </a:r>
           </a:p>
           <a:p>
@@ -3842,9 +3967,9 @@
               </a:spcAft>
             </a:pPr>
             <a:r>
-              <a:rPr sz="600" b="0">
-                <a:solidFill>
-                  <a:srgbClr val="1F2430"/>
+              <a:rPr sz="500" b="0">
+                <a:solidFill>
+                  <a:srgbClr val="4C3AE3"/>
                 </a:solidFill>
                 <a:latin typeface="Meiryo"/>
               </a:rPr>
@@ -3861,27 +3986,27 @@
               </a:spcAft>
             </a:pPr>
             <a:r>
-              <a:rPr sz="1500" b="0">
-                <a:solidFill>
-                  <a:srgbClr val="5B6372"/>
-                </a:solidFill>
-                <a:latin typeface="Meiryo"/>
-              </a:rPr>
-              <a:t>モデルに何を伝えるか</a:t>
-            </a:r>
-          </a:p>
-        </p:txBody>
-      </p:sp>
-      <p:sp>
-        <p:nvSpPr>
-          <p:cNvPr id="10" name="Rectangle 9"/>
+              <a:rPr sz="1300" b="0">
+                <a:solidFill>
+                  <a:srgbClr val="1F2430"/>
+                </a:solidFill>
+                <a:latin typeface="Meiryo"/>
+              </a:rPr>
+              <a:t>入力・環境を把握する</a:t>
+            </a:r>
+          </a:p>
+        </p:txBody>
+      </p:sp>
+      <p:sp>
+        <p:nvSpPr>
+          <p:cNvPr id="12" name="Rectangle 11"/>
           <p:cNvSpPr/>
           <p:nvPr/>
         </p:nvSpPr>
         <p:spPr>
           <a:xfrm>
-            <a:off x="4416552" y="1554480"/>
-            <a:ext cx="3611880" cy="2377440"/>
+            <a:off x="3364992" y="3063240"/>
+            <a:ext cx="2697480" cy="1600200"/>
           </a:xfrm>
           <a:prstGeom prst="rect">
             <a:avLst/>
@@ -3918,20 +4043,20 @@
       </p:sp>
       <p:sp>
         <p:nvSpPr>
-          <p:cNvPr id="11" name="Rectangle 10"/>
+          <p:cNvPr id="13" name="Rectangle 12"/>
           <p:cNvSpPr/>
           <p:nvPr/>
         </p:nvSpPr>
         <p:spPr>
           <a:xfrm>
-            <a:off x="4416552" y="1554480"/>
-            <a:ext cx="3611880" cy="128016"/>
+            <a:off x="3364992" y="3063240"/>
+            <a:ext cx="2697480" cy="109728"/>
           </a:xfrm>
           <a:prstGeom prst="rect">
             <a:avLst/>
           </a:prstGeom>
           <a:solidFill>
-            <a:srgbClr val="B9C0D4"/>
+            <a:srgbClr val="4C3AE3"/>
           </a:solidFill>
           <a:ln>
             <a:noFill/>
@@ -3962,14 +4087,14 @@
       </p:sp>
       <p:sp>
         <p:nvSpPr>
-          <p:cNvPr id="12" name="TextBox 11"/>
+          <p:cNvPr id="14" name="TextBox 13"/>
           <p:cNvSpPr txBox="1"/>
           <p:nvPr/>
         </p:nvSpPr>
         <p:spPr>
           <a:xfrm>
-            <a:off x="4690872" y="1965960"/>
-            <a:ext cx="3063240" cy="1828800"/>
+            <a:off x="3593592" y="3364992"/>
+            <a:ext cx="2286000" cy="1234440"/>
           </a:xfrm>
           <a:prstGeom prst="rect">
             <a:avLst/>
@@ -3993,11 +4118,11 @@
             <a:r>
               <a:rPr sz="1700" b="1">
                 <a:solidFill>
-                  <a:srgbClr val="1F2430"/>
-                </a:solidFill>
-                <a:latin typeface="Meiryo"/>
-              </a:rPr>
-              <a:t>コンテキスト・エンジニアリング</a:t>
+                  <a:srgbClr val="4C3AE3"/>
+                </a:solidFill>
+                <a:latin typeface="Meiryo"/>
+              </a:rPr>
+              <a:t>推論・計画</a:t>
             </a:r>
           </a:p>
           <a:p>
@@ -4010,9 +4135,9 @@
               </a:spcAft>
             </a:pPr>
             <a:r>
-              <a:rPr sz="600" b="0">
-                <a:solidFill>
-                  <a:srgbClr val="1F2430"/>
+              <a:rPr sz="500" b="0">
+                <a:solidFill>
+                  <a:srgbClr val="4C3AE3"/>
                 </a:solidFill>
                 <a:latin typeface="Meiryo"/>
               </a:rPr>
@@ -4029,27 +4154,71 @@
               </a:spcAft>
             </a:pPr>
             <a:r>
-              <a:rPr sz="1500" b="0">
-                <a:solidFill>
-                  <a:srgbClr val="5B6372"/>
-                </a:solidFill>
-                <a:latin typeface="Meiryo"/>
-              </a:rPr>
-              <a:t>いまモデルが何を知っているか</a:t>
-            </a:r>
-          </a:p>
-        </p:txBody>
-      </p:sp>
-      <p:sp>
-        <p:nvSpPr>
-          <p:cNvPr id="13" name="Rectangle 12"/>
+              <a:rPr sz="1300" b="0">
+                <a:solidFill>
+                  <a:srgbClr val="1F2430"/>
+                </a:solidFill>
+                <a:latin typeface="Meiryo"/>
+              </a:rPr>
+              <a:t>目標を分解し手順を決める</a:t>
+            </a:r>
+          </a:p>
+        </p:txBody>
+      </p:sp>
+      <p:sp>
+        <p:nvSpPr>
+          <p:cNvPr id="15" name="Rectangle 14"/>
           <p:cNvSpPr/>
           <p:nvPr/>
         </p:nvSpPr>
         <p:spPr>
           <a:xfrm>
-            <a:off x="8284464" y="1554480"/>
-            <a:ext cx="3611880" cy="2377440"/>
+            <a:off x="6181344" y="3063240"/>
+            <a:ext cx="2697480" cy="1600200"/>
+          </a:xfrm>
+          <a:prstGeom prst="rect">
+            <a:avLst/>
+          </a:prstGeom>
+          <a:solidFill>
+            <a:srgbClr val="F3F4FB"/>
+          </a:solidFill>
+          <a:ln>
+            <a:noFill/>
+          </a:ln>
+          <a:effectLst/>
+        </p:spPr>
+        <p:style>
+          <a:lnRef idx="1">
+            <a:schemeClr val="accent1"/>
+          </a:lnRef>
+          <a:fillRef idx="3">
+            <a:schemeClr val="accent1"/>
+          </a:fillRef>
+          <a:effectRef idx="2">
+            <a:schemeClr val="accent1"/>
+          </a:effectRef>
+          <a:fontRef idx="minor">
+            <a:schemeClr val="lt1"/>
+          </a:fontRef>
+        </p:style>
+        <p:txBody>
+          <a:bodyPr rtlCol="0" anchor="ctr"/>
+          <a:lstStyle/>
+          <a:p>
+            <a:pPr algn="ctr"/>
+          </a:p>
+        </p:txBody>
+      </p:sp>
+      <p:sp>
+        <p:nvSpPr>
+          <p:cNvPr id="16" name="Rectangle 15"/>
+          <p:cNvSpPr/>
+          <p:nvPr/>
+        </p:nvSpPr>
+        <p:spPr>
+          <a:xfrm>
+            <a:off x="6181344" y="3063240"/>
+            <a:ext cx="2697480" cy="109728"/>
           </a:xfrm>
           <a:prstGeom prst="rect">
             <a:avLst/>
@@ -4086,58 +4255,14 @@
       </p:sp>
       <p:sp>
         <p:nvSpPr>
-          <p:cNvPr id="14" name="Rectangle 13"/>
-          <p:cNvSpPr/>
-          <p:nvPr/>
-        </p:nvSpPr>
-        <p:spPr>
-          <a:xfrm>
-            <a:off x="8284464" y="1554480"/>
-            <a:ext cx="3611880" cy="128016"/>
-          </a:xfrm>
-          <a:prstGeom prst="rect">
-            <a:avLst/>
-          </a:prstGeom>
-          <a:solidFill>
-            <a:srgbClr val="4C3AE3"/>
-          </a:solidFill>
-          <a:ln>
-            <a:noFill/>
-          </a:ln>
-          <a:effectLst/>
-        </p:spPr>
-        <p:style>
-          <a:lnRef idx="1">
-            <a:schemeClr val="accent1"/>
-          </a:lnRef>
-          <a:fillRef idx="3">
-            <a:schemeClr val="accent1"/>
-          </a:fillRef>
-          <a:effectRef idx="2">
-            <a:schemeClr val="accent1"/>
-          </a:effectRef>
-          <a:fontRef idx="minor">
-            <a:schemeClr val="lt1"/>
-          </a:fontRef>
-        </p:style>
-        <p:txBody>
-          <a:bodyPr rtlCol="0" anchor="ctr"/>
-          <a:lstStyle/>
-          <a:p>
-            <a:pPr algn="ctr"/>
-          </a:p>
-        </p:txBody>
-      </p:sp>
-      <p:sp>
-        <p:nvSpPr>
-          <p:cNvPr id="15" name="TextBox 14"/>
+          <p:cNvPr id="17" name="TextBox 16"/>
           <p:cNvSpPr txBox="1"/>
           <p:nvPr/>
         </p:nvSpPr>
         <p:spPr>
           <a:xfrm>
-            <a:off x="8558784" y="1965960"/>
-            <a:ext cx="3063240" cy="1828800"/>
+            <a:off x="6409944" y="3364992"/>
+            <a:ext cx="2286000" cy="1234440"/>
           </a:xfrm>
           <a:prstGeom prst="rect">
             <a:avLst/>
@@ -4161,11 +4286,11 @@
             <a:r>
               <a:rPr sz="1700" b="1">
                 <a:solidFill>
-                  <a:srgbClr val="FFFFFF"/>
-                </a:solidFill>
-                <a:latin typeface="Meiryo"/>
-              </a:rPr>
-              <a:t>ハーネス・エンジニアリング</a:t>
+                  <a:srgbClr val="4C3AE3"/>
+                </a:solidFill>
+                <a:latin typeface="Meiryo"/>
+              </a:rPr>
+              <a:t>行動</a:t>
             </a:r>
           </a:p>
           <a:p>
@@ -4178,9 +4303,9 @@
               </a:spcAft>
             </a:pPr>
             <a:r>
-              <a:rPr sz="600" b="0">
-                <a:solidFill>
-                  <a:srgbClr val="FFFFFF"/>
+              <a:rPr sz="500" b="0">
+                <a:solidFill>
+                  <a:srgbClr val="4C3AE3"/>
                 </a:solidFill>
                 <a:latin typeface="Meiryo"/>
               </a:rPr>
@@ -4197,28 +4322,195 @@
               </a:spcAft>
             </a:pPr>
             <a:r>
-              <a:rPr sz="1500" b="0">
-                <a:solidFill>
-                  <a:srgbClr val="E7E3FF"/>
-                </a:solidFill>
-                <a:latin typeface="Meiryo"/>
-              </a:rPr>
-              <a:t>モデルが行動し・証明し・回復し
-安全に改善できる仕組みとは何か</a:t>
-            </a:r>
-          </a:p>
-        </p:txBody>
-      </p:sp>
-      <p:sp>
-        <p:nvSpPr>
-          <p:cNvPr id="16" name="TextBox 15"/>
+              <a:rPr sz="1300" b="0">
+                <a:solidFill>
+                  <a:srgbClr val="1F2430"/>
+                </a:solidFill>
+                <a:latin typeface="Meiryo"/>
+              </a:rPr>
+              <a:t>ツールを使って外界へ働きかける</a:t>
+            </a:r>
+          </a:p>
+        </p:txBody>
+      </p:sp>
+      <p:sp>
+        <p:nvSpPr>
+          <p:cNvPr id="18" name="Rectangle 17"/>
+          <p:cNvSpPr/>
+          <p:nvPr/>
+        </p:nvSpPr>
+        <p:spPr>
+          <a:xfrm>
+            <a:off x="8997696" y="3063240"/>
+            <a:ext cx="2697480" cy="1600200"/>
+          </a:xfrm>
+          <a:prstGeom prst="rect">
+            <a:avLst/>
+          </a:prstGeom>
+          <a:solidFill>
+            <a:srgbClr val="F3F4FB"/>
+          </a:solidFill>
+          <a:ln>
+            <a:noFill/>
+          </a:ln>
+          <a:effectLst/>
+        </p:spPr>
+        <p:style>
+          <a:lnRef idx="1">
+            <a:schemeClr val="accent1"/>
+          </a:lnRef>
+          <a:fillRef idx="3">
+            <a:schemeClr val="accent1"/>
+          </a:fillRef>
+          <a:effectRef idx="2">
+            <a:schemeClr val="accent1"/>
+          </a:effectRef>
+          <a:fontRef idx="minor">
+            <a:schemeClr val="lt1"/>
+          </a:fontRef>
+        </p:style>
+        <p:txBody>
+          <a:bodyPr rtlCol="0" anchor="ctr"/>
+          <a:lstStyle/>
+          <a:p>
+            <a:pPr algn="ctr"/>
+          </a:p>
+        </p:txBody>
+      </p:sp>
+      <p:sp>
+        <p:nvSpPr>
+          <p:cNvPr id="19" name="Rectangle 18"/>
+          <p:cNvSpPr/>
+          <p:nvPr/>
+        </p:nvSpPr>
+        <p:spPr>
+          <a:xfrm>
+            <a:off x="8997696" y="3063240"/>
+            <a:ext cx="2697480" cy="109728"/>
+          </a:xfrm>
+          <a:prstGeom prst="rect">
+            <a:avLst/>
+          </a:prstGeom>
+          <a:solidFill>
+            <a:srgbClr val="4C3AE3"/>
+          </a:solidFill>
+          <a:ln>
+            <a:noFill/>
+          </a:ln>
+          <a:effectLst/>
+        </p:spPr>
+        <p:style>
+          <a:lnRef idx="1">
+            <a:schemeClr val="accent1"/>
+          </a:lnRef>
+          <a:fillRef idx="3">
+            <a:schemeClr val="accent1"/>
+          </a:fillRef>
+          <a:effectRef idx="2">
+            <a:schemeClr val="accent1"/>
+          </a:effectRef>
+          <a:fontRef idx="minor">
+            <a:schemeClr val="lt1"/>
+          </a:fontRef>
+        </p:style>
+        <p:txBody>
+          <a:bodyPr rtlCol="0" anchor="ctr"/>
+          <a:lstStyle/>
+          <a:p>
+            <a:pPr algn="ctr"/>
+          </a:p>
+        </p:txBody>
+      </p:sp>
+      <p:sp>
+        <p:nvSpPr>
+          <p:cNvPr id="20" name="TextBox 19"/>
           <p:cNvSpPr txBox="1"/>
           <p:nvPr/>
         </p:nvSpPr>
         <p:spPr>
           <a:xfrm>
-            <a:off x="548640" y="4343400"/>
-            <a:ext cx="11064240" cy="2194560"/>
+            <a:off x="9226296" y="3364992"/>
+            <a:ext cx="2286000" cy="1234440"/>
+          </a:xfrm>
+          <a:prstGeom prst="rect">
+            <a:avLst/>
+          </a:prstGeom>
+          <a:noFill/>
+        </p:spPr>
+        <p:txBody>
+          <a:bodyPr wrap="square" anchor="t">
+            <a:spAutoFit/>
+          </a:bodyPr>
+          <a:lstStyle/>
+          <a:p>
+            <a:pPr algn="l">
+              <a:lnSpc>
+                <a:spcPct val="115000"/>
+              </a:lnSpc>
+              <a:spcAft>
+                <a:spcPts val="600"/>
+              </a:spcAft>
+            </a:pPr>
+            <a:r>
+              <a:rPr sz="1700" b="1">
+                <a:solidFill>
+                  <a:srgbClr val="4C3AE3"/>
+                </a:solidFill>
+                <a:latin typeface="Meiryo"/>
+              </a:rPr>
+              <a:t>自律</a:t>
+            </a:r>
+          </a:p>
+          <a:p>
+            <a:pPr algn="l">
+              <a:lnSpc>
+                <a:spcPct val="115000"/>
+              </a:lnSpc>
+              <a:spcAft>
+                <a:spcPts val="600"/>
+              </a:spcAft>
+            </a:pPr>
+            <a:r>
+              <a:rPr sz="500" b="0">
+                <a:solidFill>
+                  <a:srgbClr val="4C3AE3"/>
+                </a:solidFill>
+                <a:latin typeface="Meiryo"/>
+              </a:rPr>
+              <a:t/>
+            </a:r>
+          </a:p>
+          <a:p>
+            <a:pPr algn="l">
+              <a:lnSpc>
+                <a:spcPct val="115000"/>
+              </a:lnSpc>
+              <a:spcAft>
+                <a:spcPts val="600"/>
+              </a:spcAft>
+            </a:pPr>
+            <a:r>
+              <a:rPr sz="1300" b="0">
+                <a:solidFill>
+                  <a:srgbClr val="1F2430"/>
+                </a:solidFill>
+                <a:latin typeface="Meiryo"/>
+              </a:rPr>
+              <a:t>人間の監督のもとで繰り返す</a:t>
+            </a:r>
+          </a:p>
+        </p:txBody>
+      </p:sp>
+      <p:sp>
+        <p:nvSpPr>
+          <p:cNvPr id="21" name="TextBox 20"/>
+          <p:cNvSpPr txBox="1"/>
+          <p:nvPr/>
+        </p:nvSpPr>
+        <p:spPr>
+          <a:xfrm>
+            <a:off x="548640" y="4937760"/>
+            <a:ext cx="11064240" cy="1463040"/>
           </a:xfrm>
           <a:prstGeom prst="rect">
             <a:avLst/>
@@ -4236,17 +4528,17 @@
                 <a:spcPct val="125000"/>
               </a:lnSpc>
               <a:spcAft>
-                <a:spcPts val="800"/>
+                <a:spcPts val="600"/>
               </a:spcAft>
             </a:pPr>
             <a:r>
-              <a:rPr sz="1600" b="1">
+              <a:rPr sz="1500" b="1">
                 <a:solidFill>
                   <a:srgbClr val="4C3AE3"/>
                 </a:solidFill>
                 <a:latin typeface="Meiryo"/>
               </a:rPr>
-              <a:t>要点</a:t>
+              <a:t>生成AIチャットボットとの違い</a:t>
             </a:r>
           </a:p>
           <a:p>
@@ -4255,17 +4547,17 @@
                 <a:spcPct val="125000"/>
               </a:lnSpc>
               <a:spcAft>
-                <a:spcPts val="800"/>
+                <a:spcPts val="600"/>
               </a:spcAft>
             </a:pPr>
             <a:r>
-              <a:rPr sz="1700" b="0">
+              <a:rPr sz="1500" b="0">
                 <a:solidFill>
                   <a:srgbClr val="1F2430"/>
                 </a:solidFill>
                 <a:latin typeface="Meiryo"/>
               </a:rPr>
-              <a:t>・「良さそう」は停止条件ではない。「チェックが全部通った」が停止条件。</a:t>
+              <a:t>・「答える」だけでなく「行動する」。複数ステップの業務を自分で進める。</a:t>
             </a:r>
           </a:p>
           <a:p>
@@ -4274,36 +4566,17 @@
                 <a:spcPct val="125000"/>
               </a:lnSpc>
               <a:spcAft>
-                <a:spcPts val="800"/>
+                <a:spcPts val="600"/>
               </a:spcAft>
             </a:pPr>
             <a:r>
-              <a:rPr sz="1700" b="0">
-                <a:solidFill>
-                  <a:srgbClr val="1F2430"/>
-                </a:solidFill>
-                <a:latin typeface="Meiryo"/>
-              </a:rPr>
-              <a:t>・失敗したら、プロンプトを強い口調にするのではなく『欠けている能力は何か』を問う。</a:t>
-            </a:r>
-          </a:p>
-          <a:p>
-            <a:pPr algn="l">
-              <a:lnSpc>
-                <a:spcPct val="125000"/>
-              </a:lnSpc>
-              <a:spcAft>
-                <a:spcPts val="800"/>
-              </a:spcAft>
-            </a:pPr>
-            <a:r>
-              <a:rPr sz="1700" b="0">
-                <a:solidFill>
-                  <a:srgbClr val="1F2430"/>
-                </a:solidFill>
-                <a:latin typeface="Meiryo"/>
-              </a:rPr>
-              <a:t>・自律性は、証拠の質が上がった分だけ広げてよい。</a:t>
+              <a:rPr sz="1200" b="0">
+                <a:solidFill>
+                  <a:srgbClr val="5B6372"/>
+                </a:solidFill>
+                <a:latin typeface="Meiryo"/>
+              </a:rPr>
+              <a:t>〔要:PDF確認〕McKinsey の正確な定義文・自律レベル・数値は原文PDFから差し込む。</a:t>
             </a:r>
           </a:p>
         </p:txBody>
@@ -4537,7 +4810,7 @@
                 </a:solidFill>
                 <a:latin typeface="Meiryo"/>
               </a:rPr>
-              <a:t>6層の全体像</a:t>
+              <a:t>なぜ「ハーネス」なのか</a:t>
             </a:r>
           </a:p>
           <a:p>
@@ -4556,7 +4829,7 @@
                 </a:solidFill>
                 <a:latin typeface="Meiryo"/>
               </a:rPr>
-              <a:t>各層が1ファイルに対応している</a:t>
+              <a:t>3つの問いの違い</a:t>
             </a:r>
           </a:p>
         </p:txBody>
@@ -4569,8 +4842,344 @@
         </p:nvSpPr>
         <p:spPr>
           <a:xfrm>
-            <a:off x="548640" y="1417320"/>
-            <a:ext cx="2103120" cy="713232"/>
+            <a:off x="548640" y="1554480"/>
+            <a:ext cx="3611880" cy="2377440"/>
+          </a:xfrm>
+          <a:prstGeom prst="rect">
+            <a:avLst/>
+          </a:prstGeom>
+          <a:solidFill>
+            <a:srgbClr val="F3F4FB"/>
+          </a:solidFill>
+          <a:ln>
+            <a:noFill/>
+          </a:ln>
+          <a:effectLst/>
+        </p:spPr>
+        <p:style>
+          <a:lnRef idx="1">
+            <a:schemeClr val="accent1"/>
+          </a:lnRef>
+          <a:fillRef idx="3">
+            <a:schemeClr val="accent1"/>
+          </a:fillRef>
+          <a:effectRef idx="2">
+            <a:schemeClr val="accent1"/>
+          </a:effectRef>
+          <a:fontRef idx="minor">
+            <a:schemeClr val="lt1"/>
+          </a:fontRef>
+        </p:style>
+        <p:txBody>
+          <a:bodyPr rtlCol="0" anchor="ctr"/>
+          <a:lstStyle/>
+          <a:p>
+            <a:pPr algn="ctr"/>
+          </a:p>
+        </p:txBody>
+      </p:sp>
+      <p:sp>
+        <p:nvSpPr>
+          <p:cNvPr id="8" name="Rectangle 7"/>
+          <p:cNvSpPr/>
+          <p:nvPr/>
+        </p:nvSpPr>
+        <p:spPr>
+          <a:xfrm>
+            <a:off x="548640" y="1554480"/>
+            <a:ext cx="3611880" cy="128016"/>
+          </a:xfrm>
+          <a:prstGeom prst="rect">
+            <a:avLst/>
+          </a:prstGeom>
+          <a:solidFill>
+            <a:srgbClr val="B9C0D4"/>
+          </a:solidFill>
+          <a:ln>
+            <a:noFill/>
+          </a:ln>
+          <a:effectLst/>
+        </p:spPr>
+        <p:style>
+          <a:lnRef idx="1">
+            <a:schemeClr val="accent1"/>
+          </a:lnRef>
+          <a:fillRef idx="3">
+            <a:schemeClr val="accent1"/>
+          </a:fillRef>
+          <a:effectRef idx="2">
+            <a:schemeClr val="accent1"/>
+          </a:effectRef>
+          <a:fontRef idx="minor">
+            <a:schemeClr val="lt1"/>
+          </a:fontRef>
+        </p:style>
+        <p:txBody>
+          <a:bodyPr rtlCol="0" anchor="ctr"/>
+          <a:lstStyle/>
+          <a:p>
+            <a:pPr algn="ctr"/>
+          </a:p>
+        </p:txBody>
+      </p:sp>
+      <p:sp>
+        <p:nvSpPr>
+          <p:cNvPr id="9" name="TextBox 8"/>
+          <p:cNvSpPr txBox="1"/>
+          <p:nvPr/>
+        </p:nvSpPr>
+        <p:spPr>
+          <a:xfrm>
+            <a:off x="822960" y="1965960"/>
+            <a:ext cx="3063240" cy="1828800"/>
+          </a:xfrm>
+          <a:prstGeom prst="rect">
+            <a:avLst/>
+          </a:prstGeom>
+          <a:noFill/>
+        </p:spPr>
+        <p:txBody>
+          <a:bodyPr wrap="square" anchor="t">
+            <a:spAutoFit/>
+          </a:bodyPr>
+          <a:lstStyle/>
+          <a:p>
+            <a:pPr algn="l">
+              <a:lnSpc>
+                <a:spcPct val="115000"/>
+              </a:lnSpc>
+              <a:spcAft>
+                <a:spcPts val="600"/>
+              </a:spcAft>
+            </a:pPr>
+            <a:r>
+              <a:rPr sz="1700" b="1">
+                <a:solidFill>
+                  <a:srgbClr val="1F2430"/>
+                </a:solidFill>
+                <a:latin typeface="Meiryo"/>
+              </a:rPr>
+              <a:t>プロンプト・エンジニアリング</a:t>
+            </a:r>
+          </a:p>
+          <a:p>
+            <a:pPr algn="l">
+              <a:lnSpc>
+                <a:spcPct val="115000"/>
+              </a:lnSpc>
+              <a:spcAft>
+                <a:spcPts val="600"/>
+              </a:spcAft>
+            </a:pPr>
+            <a:r>
+              <a:rPr sz="600" b="0">
+                <a:solidFill>
+                  <a:srgbClr val="1F2430"/>
+                </a:solidFill>
+                <a:latin typeface="Meiryo"/>
+              </a:rPr>
+              <a:t/>
+            </a:r>
+          </a:p>
+          <a:p>
+            <a:pPr algn="l">
+              <a:lnSpc>
+                <a:spcPct val="115000"/>
+              </a:lnSpc>
+              <a:spcAft>
+                <a:spcPts val="600"/>
+              </a:spcAft>
+            </a:pPr>
+            <a:r>
+              <a:rPr sz="1500" b="0">
+                <a:solidFill>
+                  <a:srgbClr val="5B6372"/>
+                </a:solidFill>
+                <a:latin typeface="Meiryo"/>
+              </a:rPr>
+              <a:t>モデルに何を伝えるか</a:t>
+            </a:r>
+          </a:p>
+        </p:txBody>
+      </p:sp>
+      <p:sp>
+        <p:nvSpPr>
+          <p:cNvPr id="10" name="Rectangle 9"/>
+          <p:cNvSpPr/>
+          <p:nvPr/>
+        </p:nvSpPr>
+        <p:spPr>
+          <a:xfrm>
+            <a:off x="4416552" y="1554480"/>
+            <a:ext cx="3611880" cy="2377440"/>
+          </a:xfrm>
+          <a:prstGeom prst="rect">
+            <a:avLst/>
+          </a:prstGeom>
+          <a:solidFill>
+            <a:srgbClr val="F3F4FB"/>
+          </a:solidFill>
+          <a:ln>
+            <a:noFill/>
+          </a:ln>
+          <a:effectLst/>
+        </p:spPr>
+        <p:style>
+          <a:lnRef idx="1">
+            <a:schemeClr val="accent1"/>
+          </a:lnRef>
+          <a:fillRef idx="3">
+            <a:schemeClr val="accent1"/>
+          </a:fillRef>
+          <a:effectRef idx="2">
+            <a:schemeClr val="accent1"/>
+          </a:effectRef>
+          <a:fontRef idx="minor">
+            <a:schemeClr val="lt1"/>
+          </a:fontRef>
+        </p:style>
+        <p:txBody>
+          <a:bodyPr rtlCol="0" anchor="ctr"/>
+          <a:lstStyle/>
+          <a:p>
+            <a:pPr algn="ctr"/>
+          </a:p>
+        </p:txBody>
+      </p:sp>
+      <p:sp>
+        <p:nvSpPr>
+          <p:cNvPr id="11" name="Rectangle 10"/>
+          <p:cNvSpPr/>
+          <p:nvPr/>
+        </p:nvSpPr>
+        <p:spPr>
+          <a:xfrm>
+            <a:off x="4416552" y="1554480"/>
+            <a:ext cx="3611880" cy="128016"/>
+          </a:xfrm>
+          <a:prstGeom prst="rect">
+            <a:avLst/>
+          </a:prstGeom>
+          <a:solidFill>
+            <a:srgbClr val="B9C0D4"/>
+          </a:solidFill>
+          <a:ln>
+            <a:noFill/>
+          </a:ln>
+          <a:effectLst/>
+        </p:spPr>
+        <p:style>
+          <a:lnRef idx="1">
+            <a:schemeClr val="accent1"/>
+          </a:lnRef>
+          <a:fillRef idx="3">
+            <a:schemeClr val="accent1"/>
+          </a:fillRef>
+          <a:effectRef idx="2">
+            <a:schemeClr val="accent1"/>
+          </a:effectRef>
+          <a:fontRef idx="minor">
+            <a:schemeClr val="lt1"/>
+          </a:fontRef>
+        </p:style>
+        <p:txBody>
+          <a:bodyPr rtlCol="0" anchor="ctr"/>
+          <a:lstStyle/>
+          <a:p>
+            <a:pPr algn="ctr"/>
+          </a:p>
+        </p:txBody>
+      </p:sp>
+      <p:sp>
+        <p:nvSpPr>
+          <p:cNvPr id="12" name="TextBox 11"/>
+          <p:cNvSpPr txBox="1"/>
+          <p:nvPr/>
+        </p:nvSpPr>
+        <p:spPr>
+          <a:xfrm>
+            <a:off x="4690872" y="1965960"/>
+            <a:ext cx="3063240" cy="1828800"/>
+          </a:xfrm>
+          <a:prstGeom prst="rect">
+            <a:avLst/>
+          </a:prstGeom>
+          <a:noFill/>
+        </p:spPr>
+        <p:txBody>
+          <a:bodyPr wrap="square" anchor="t">
+            <a:spAutoFit/>
+          </a:bodyPr>
+          <a:lstStyle/>
+          <a:p>
+            <a:pPr algn="l">
+              <a:lnSpc>
+                <a:spcPct val="115000"/>
+              </a:lnSpc>
+              <a:spcAft>
+                <a:spcPts val="600"/>
+              </a:spcAft>
+            </a:pPr>
+            <a:r>
+              <a:rPr sz="1700" b="1">
+                <a:solidFill>
+                  <a:srgbClr val="1F2430"/>
+                </a:solidFill>
+                <a:latin typeface="Meiryo"/>
+              </a:rPr>
+              <a:t>コンテキスト・エンジニアリング</a:t>
+            </a:r>
+          </a:p>
+          <a:p>
+            <a:pPr algn="l">
+              <a:lnSpc>
+                <a:spcPct val="115000"/>
+              </a:lnSpc>
+              <a:spcAft>
+                <a:spcPts val="600"/>
+              </a:spcAft>
+            </a:pPr>
+            <a:r>
+              <a:rPr sz="600" b="0">
+                <a:solidFill>
+                  <a:srgbClr val="1F2430"/>
+                </a:solidFill>
+                <a:latin typeface="Meiryo"/>
+              </a:rPr>
+              <a:t/>
+            </a:r>
+          </a:p>
+          <a:p>
+            <a:pPr algn="l">
+              <a:lnSpc>
+                <a:spcPct val="115000"/>
+              </a:lnSpc>
+              <a:spcAft>
+                <a:spcPts val="600"/>
+              </a:spcAft>
+            </a:pPr>
+            <a:r>
+              <a:rPr sz="1500" b="0">
+                <a:solidFill>
+                  <a:srgbClr val="5B6372"/>
+                </a:solidFill>
+                <a:latin typeface="Meiryo"/>
+              </a:rPr>
+              <a:t>いまモデルが何を知っているか</a:t>
+            </a:r>
+          </a:p>
+        </p:txBody>
+      </p:sp>
+      <p:sp>
+        <p:nvSpPr>
+          <p:cNvPr id="13" name="Rectangle 12"/>
+          <p:cNvSpPr/>
+          <p:nvPr/>
+        </p:nvSpPr>
+        <p:spPr>
+          <a:xfrm>
+            <a:off x="8284464" y="1554480"/>
+            <a:ext cx="3611880" cy="2377440"/>
           </a:xfrm>
           <a:prstGeom prst="rect">
             <a:avLst/>
@@ -4607,56 +5216,14 @@
       </p:sp>
       <p:sp>
         <p:nvSpPr>
-          <p:cNvPr id="8" name="TextBox 7"/>
-          <p:cNvSpPr txBox="1"/>
-          <p:nvPr/>
-        </p:nvSpPr>
-        <p:spPr>
-          <a:xfrm>
-            <a:off x="658368" y="1417320"/>
-            <a:ext cx="1883664" cy="713232"/>
-          </a:xfrm>
-          <a:prstGeom prst="rect">
-            <a:avLst/>
-          </a:prstGeom>
-          <a:noFill/>
-        </p:spPr>
-        <p:txBody>
-          <a:bodyPr wrap="square" anchor="ctr">
-            <a:spAutoFit/>
-          </a:bodyPr>
-          <a:lstStyle/>
-          <a:p>
-            <a:pPr algn="l">
-              <a:lnSpc>
-                <a:spcPct val="108000"/>
-              </a:lnSpc>
-              <a:spcAft>
-                <a:spcPts val="600"/>
-              </a:spcAft>
-            </a:pPr>
-            <a:r>
-              <a:rPr sz="1600" b="1">
-                <a:solidFill>
-                  <a:srgbClr val="FFFFFF"/>
-                </a:solidFill>
-                <a:latin typeface="Meiryo"/>
-              </a:rPr>
-              <a:t>層</a:t>
-            </a:r>
-          </a:p>
-        </p:txBody>
-      </p:sp>
-      <p:sp>
-        <p:nvSpPr>
-          <p:cNvPr id="9" name="Rectangle 8"/>
+          <p:cNvPr id="14" name="Rectangle 13"/>
           <p:cNvSpPr/>
           <p:nvPr/>
         </p:nvSpPr>
         <p:spPr>
           <a:xfrm>
-            <a:off x="2651760" y="1417320"/>
-            <a:ext cx="5120640" cy="713232"/>
+            <a:off x="8284464" y="1554480"/>
+            <a:ext cx="3611880" cy="128016"/>
           </a:xfrm>
           <a:prstGeom prst="rect">
             <a:avLst/>
@@ -4693,14 +5260,14 @@
       </p:sp>
       <p:sp>
         <p:nvSpPr>
-          <p:cNvPr id="10" name="TextBox 9"/>
+          <p:cNvPr id="15" name="TextBox 14"/>
           <p:cNvSpPr txBox="1"/>
           <p:nvPr/>
         </p:nvSpPr>
         <p:spPr>
           <a:xfrm>
-            <a:off x="2761488" y="1417320"/>
-            <a:ext cx="4901184" cy="713232"/>
+            <a:off x="8558784" y="1965960"/>
+            <a:ext cx="3063240" cy="1828800"/>
           </a:xfrm>
           <a:prstGeom prst="rect">
             <a:avLst/>
@@ -4708,173 +5275,80 @@
           <a:noFill/>
         </p:spPr>
         <p:txBody>
-          <a:bodyPr wrap="square" anchor="ctr">
+          <a:bodyPr wrap="square" anchor="t">
             <a:spAutoFit/>
           </a:bodyPr>
           <a:lstStyle/>
           <a:p>
             <a:pPr algn="l">
               <a:lnSpc>
-                <a:spcPct val="108000"/>
+                <a:spcPct val="115000"/>
               </a:lnSpc>
               <a:spcAft>
                 <a:spcPts val="600"/>
               </a:spcAft>
             </a:pPr>
             <a:r>
-              <a:rPr sz="1600" b="1">
+              <a:rPr sz="1700" b="1">
                 <a:solidFill>
                   <a:srgbClr val="FFFFFF"/>
                 </a:solidFill>
                 <a:latin typeface="Meiryo"/>
               </a:rPr>
-              <a:t>役割</a:t>
-            </a:r>
-          </a:p>
-        </p:txBody>
-      </p:sp>
-      <p:sp>
-        <p:nvSpPr>
-          <p:cNvPr id="11" name="Rectangle 10"/>
-          <p:cNvSpPr/>
-          <p:nvPr/>
-        </p:nvSpPr>
-        <p:spPr>
-          <a:xfrm>
-            <a:off x="7772400" y="1417320"/>
-            <a:ext cx="3840480" cy="713232"/>
-          </a:xfrm>
-          <a:prstGeom prst="rect">
-            <a:avLst/>
-          </a:prstGeom>
-          <a:solidFill>
-            <a:srgbClr val="4C3AE3"/>
-          </a:solidFill>
-          <a:ln>
-            <a:noFill/>
-          </a:ln>
-          <a:effectLst/>
-        </p:spPr>
-        <p:style>
-          <a:lnRef idx="1">
-            <a:schemeClr val="accent1"/>
-          </a:lnRef>
-          <a:fillRef idx="3">
-            <a:schemeClr val="accent1"/>
-          </a:fillRef>
-          <a:effectRef idx="2">
-            <a:schemeClr val="accent1"/>
-          </a:effectRef>
-          <a:fontRef idx="minor">
-            <a:schemeClr val="lt1"/>
-          </a:fontRef>
-        </p:style>
-        <p:txBody>
-          <a:bodyPr rtlCol="0" anchor="ctr"/>
-          <a:lstStyle/>
-          <a:p>
-            <a:pPr algn="ctr"/>
-          </a:p>
-        </p:txBody>
-      </p:sp>
-      <p:sp>
-        <p:nvSpPr>
-          <p:cNvPr id="12" name="TextBox 11"/>
-          <p:cNvSpPr txBox="1"/>
-          <p:nvPr/>
-        </p:nvSpPr>
-        <p:spPr>
-          <a:xfrm>
-            <a:off x="7882128" y="1417320"/>
-            <a:ext cx="3621024" cy="713232"/>
-          </a:xfrm>
-          <a:prstGeom prst="rect">
-            <a:avLst/>
-          </a:prstGeom>
-          <a:noFill/>
-        </p:spPr>
-        <p:txBody>
-          <a:bodyPr wrap="square" anchor="ctr">
-            <a:spAutoFit/>
-          </a:bodyPr>
-          <a:lstStyle/>
+              <a:t>ハーネス・エンジニアリング</a:t>
+            </a:r>
+          </a:p>
           <a:p>
             <a:pPr algn="l">
               <a:lnSpc>
-                <a:spcPct val="108000"/>
+                <a:spcPct val="115000"/>
               </a:lnSpc>
               <a:spcAft>
                 <a:spcPts val="600"/>
               </a:spcAft>
             </a:pPr>
             <a:r>
-              <a:rPr sz="1600" b="1">
+              <a:rPr sz="600" b="0">
                 <a:solidFill>
                   <a:srgbClr val="FFFFFF"/>
                 </a:solidFill>
                 <a:latin typeface="Meiryo"/>
               </a:rPr>
-              <a:t>対応ファイル</a:t>
-            </a:r>
-          </a:p>
-        </p:txBody>
-      </p:sp>
-      <p:sp>
-        <p:nvSpPr>
-          <p:cNvPr id="13" name="Rectangle 12"/>
-          <p:cNvSpPr/>
-          <p:nvPr/>
-        </p:nvSpPr>
-        <p:spPr>
-          <a:xfrm>
-            <a:off x="548640" y="2130552"/>
-            <a:ext cx="2103120" cy="713232"/>
-          </a:xfrm>
-          <a:prstGeom prst="rect">
-            <a:avLst/>
-          </a:prstGeom>
-          <a:solidFill>
-            <a:srgbClr val="F3F4FB"/>
-          </a:solidFill>
-          <a:ln w="12700">
-            <a:solidFill>
-              <a:srgbClr val="E3E5F0"/>
-            </a:solidFill>
-          </a:ln>
-          <a:effectLst/>
-        </p:spPr>
-        <p:style>
-          <a:lnRef idx="1">
-            <a:schemeClr val="accent1"/>
-          </a:lnRef>
-          <a:fillRef idx="3">
-            <a:schemeClr val="accent1"/>
-          </a:fillRef>
-          <a:effectRef idx="2">
-            <a:schemeClr val="accent1"/>
-          </a:effectRef>
-          <a:fontRef idx="minor">
-            <a:schemeClr val="lt1"/>
-          </a:fontRef>
-        </p:style>
-        <p:txBody>
-          <a:bodyPr rtlCol="0" anchor="ctr"/>
-          <a:lstStyle/>
-          <a:p>
-            <a:pPr algn="ctr"/>
-          </a:p>
-        </p:txBody>
-      </p:sp>
-      <p:sp>
-        <p:nvSpPr>
-          <p:cNvPr id="14" name="TextBox 13"/>
+              <a:t/>
+            </a:r>
+          </a:p>
+          <a:p>
+            <a:pPr algn="l">
+              <a:lnSpc>
+                <a:spcPct val="115000"/>
+              </a:lnSpc>
+              <a:spcAft>
+                <a:spcPts val="600"/>
+              </a:spcAft>
+            </a:pPr>
+            <a:r>
+              <a:rPr sz="1500" b="0">
+                <a:solidFill>
+                  <a:srgbClr val="E7E3FF"/>
+                </a:solidFill>
+                <a:latin typeface="Meiryo"/>
+              </a:rPr>
+              <a:t>モデルが行動し・証明し・回復し
+安全に改善できる仕組みとは何か</a:t>
+            </a:r>
+          </a:p>
+        </p:txBody>
+      </p:sp>
+      <p:sp>
+        <p:nvSpPr>
+          <p:cNvPr id="16" name="TextBox 15"/>
           <p:cNvSpPr txBox="1"/>
           <p:nvPr/>
         </p:nvSpPr>
         <p:spPr>
           <a:xfrm>
-            <a:off x="658368" y="2130552"/>
-            <a:ext cx="1883664" cy="713232"/>
+            <a:off x="548640" y="4343400"/>
+            <a:ext cx="11064240" cy="2194560"/>
           </a:xfrm>
           <a:prstGeom prst="rect">
             <a:avLst/>
@@ -4882,1523 +5356,84 @@
           <a:noFill/>
         </p:spPr>
         <p:txBody>
-          <a:bodyPr wrap="square" anchor="ctr">
+          <a:bodyPr wrap="square" anchor="t">
             <a:spAutoFit/>
           </a:bodyPr>
           <a:lstStyle/>
           <a:p>
             <a:pPr algn="l">
               <a:lnSpc>
-                <a:spcPct val="108000"/>
+                <a:spcPct val="125000"/>
               </a:lnSpc>
               <a:spcAft>
-                <a:spcPts val="0"/>
+                <a:spcPts val="800"/>
               </a:spcAft>
             </a:pPr>
             <a:r>
-              <a:rPr sz="1500" b="1">
+              <a:rPr sz="1600" b="1">
                 <a:solidFill>
                   <a:srgbClr val="4C3AE3"/>
                 </a:solidFill>
                 <a:latin typeface="Meiryo"/>
               </a:rPr>
-              <a:t>1 契約</a:t>
-            </a:r>
-          </a:p>
-        </p:txBody>
-      </p:sp>
-      <p:sp>
-        <p:nvSpPr>
-          <p:cNvPr id="15" name="Rectangle 14"/>
-          <p:cNvSpPr/>
-          <p:nvPr/>
-        </p:nvSpPr>
-        <p:spPr>
-          <a:xfrm>
-            <a:off x="2651760" y="2130552"/>
-            <a:ext cx="5120640" cy="713232"/>
-          </a:xfrm>
-          <a:prstGeom prst="rect">
-            <a:avLst/>
-          </a:prstGeom>
-          <a:solidFill>
-            <a:srgbClr val="F3F4FB"/>
-          </a:solidFill>
-          <a:ln w="12700">
-            <a:solidFill>
-              <a:srgbClr val="E3E5F0"/>
-            </a:solidFill>
-          </a:ln>
-          <a:effectLst/>
-        </p:spPr>
-        <p:style>
-          <a:lnRef idx="1">
-            <a:schemeClr val="accent1"/>
-          </a:lnRef>
-          <a:fillRef idx="3">
-            <a:schemeClr val="accent1"/>
-          </a:fillRef>
-          <a:effectRef idx="2">
-            <a:schemeClr val="accent1"/>
-          </a:effectRef>
-          <a:fontRef idx="minor">
-            <a:schemeClr val="lt1"/>
-          </a:fontRef>
-        </p:style>
-        <p:txBody>
-          <a:bodyPr rtlCol="0" anchor="ctr"/>
-          <a:lstStyle/>
-          <a:p>
-            <a:pPr algn="ctr"/>
-          </a:p>
-        </p:txBody>
-      </p:sp>
-      <p:sp>
-        <p:nvSpPr>
-          <p:cNvPr id="16" name="TextBox 15"/>
-          <p:cNvSpPr txBox="1"/>
-          <p:nvPr/>
-        </p:nvSpPr>
-        <p:spPr>
-          <a:xfrm>
-            <a:off x="2761488" y="2130552"/>
-            <a:ext cx="4901184" cy="713232"/>
-          </a:xfrm>
-          <a:prstGeom prst="rect">
-            <a:avLst/>
-          </a:prstGeom>
-          <a:noFill/>
-        </p:spPr>
-        <p:txBody>
-          <a:bodyPr wrap="square" anchor="ctr">
-            <a:spAutoFit/>
-          </a:bodyPr>
-          <a:lstStyle/>
+              <a:t>要点</a:t>
+            </a:r>
+          </a:p>
           <a:p>
             <a:pPr algn="l">
               <a:lnSpc>
-                <a:spcPct val="108000"/>
+                <a:spcPct val="125000"/>
               </a:lnSpc>
               <a:spcAft>
-                <a:spcPts val="0"/>
+                <a:spcPts val="800"/>
               </a:spcAft>
             </a:pPr>
             <a:r>
-              <a:rPr sz="1500" b="0">
+              <a:rPr sz="1700" b="0">
                 <a:solidFill>
                   <a:srgbClr val="1F2430"/>
                 </a:solidFill>
                 <a:latin typeface="Meiryo"/>
               </a:rPr>
-              <a:t>クエストを機械可読な契約に変換</a:t>
-            </a:r>
-          </a:p>
-        </p:txBody>
-      </p:sp>
-      <p:sp>
-        <p:nvSpPr>
-          <p:cNvPr id="17" name="Rectangle 16"/>
-          <p:cNvSpPr/>
-          <p:nvPr/>
-        </p:nvSpPr>
-        <p:spPr>
-          <a:xfrm>
-            <a:off x="7772400" y="2130552"/>
-            <a:ext cx="3840480" cy="713232"/>
-          </a:xfrm>
-          <a:prstGeom prst="rect">
-            <a:avLst/>
-          </a:prstGeom>
-          <a:solidFill>
-            <a:srgbClr val="F3F4FB"/>
-          </a:solidFill>
-          <a:ln w="12700">
-            <a:solidFill>
-              <a:srgbClr val="E3E5F0"/>
-            </a:solidFill>
-          </a:ln>
-          <a:effectLst/>
-        </p:spPr>
-        <p:style>
-          <a:lnRef idx="1">
-            <a:schemeClr val="accent1"/>
-          </a:lnRef>
-          <a:fillRef idx="3">
-            <a:schemeClr val="accent1"/>
-          </a:fillRef>
-          <a:effectRef idx="2">
-            <a:schemeClr val="accent1"/>
-          </a:effectRef>
-          <a:fontRef idx="minor">
-            <a:schemeClr val="lt1"/>
-          </a:fontRef>
-        </p:style>
-        <p:txBody>
-          <a:bodyPr rtlCol="0" anchor="ctr"/>
-          <a:lstStyle/>
-          <a:p>
-            <a:pPr algn="ctr"/>
-          </a:p>
-        </p:txBody>
-      </p:sp>
-      <p:sp>
-        <p:nvSpPr>
-          <p:cNvPr id="18" name="TextBox 17"/>
-          <p:cNvSpPr txBox="1"/>
-          <p:nvPr/>
-        </p:nvSpPr>
-        <p:spPr>
-          <a:xfrm>
-            <a:off x="7882128" y="2130552"/>
-            <a:ext cx="3621024" cy="713232"/>
-          </a:xfrm>
-          <a:prstGeom prst="rect">
-            <a:avLst/>
-          </a:prstGeom>
-          <a:noFill/>
-        </p:spPr>
-        <p:txBody>
-          <a:bodyPr wrap="square" anchor="ctr">
-            <a:spAutoFit/>
-          </a:bodyPr>
-          <a:lstStyle/>
+              <a:t>・「良さそう」は停止条件ではない。「チェックが全部通った」が停止条件。</a:t>
+            </a:r>
+          </a:p>
           <a:p>
             <a:pPr algn="l">
               <a:lnSpc>
-                <a:spcPct val="108000"/>
+                <a:spcPct val="125000"/>
               </a:lnSpc>
               <a:spcAft>
-                <a:spcPts val="0"/>
+                <a:spcPts val="800"/>
               </a:spcAft>
             </a:pPr>
             <a:r>
-              <a:rPr sz="1500" b="0">
-                <a:solidFill>
-                  <a:srgbClr val="5B6372"/>
-                </a:solidFill>
-                <a:latin typeface="Meiryo"/>
-              </a:rPr>
-              <a:t>contracts/feature_042.json</a:t>
-            </a:r>
-          </a:p>
-        </p:txBody>
-      </p:sp>
-      <p:sp>
-        <p:nvSpPr>
-          <p:cNvPr id="19" name="Rectangle 18"/>
-          <p:cNvSpPr/>
-          <p:nvPr/>
-        </p:nvSpPr>
-        <p:spPr>
-          <a:xfrm>
-            <a:off x="548640" y="2843784"/>
-            <a:ext cx="2103120" cy="713232"/>
-          </a:xfrm>
-          <a:prstGeom prst="rect">
-            <a:avLst/>
-          </a:prstGeom>
-          <a:solidFill>
-            <a:srgbClr val="FFFFFF"/>
-          </a:solidFill>
-          <a:ln w="12700">
-            <a:solidFill>
-              <a:srgbClr val="E3E5F0"/>
-            </a:solidFill>
-          </a:ln>
-          <a:effectLst/>
-        </p:spPr>
-        <p:style>
-          <a:lnRef idx="1">
-            <a:schemeClr val="accent1"/>
-          </a:lnRef>
-          <a:fillRef idx="3">
-            <a:schemeClr val="accent1"/>
-          </a:fillRef>
-          <a:effectRef idx="2">
-            <a:schemeClr val="accent1"/>
-          </a:effectRef>
-          <a:fontRef idx="minor">
-            <a:schemeClr val="lt1"/>
-          </a:fontRef>
-        </p:style>
-        <p:txBody>
-          <a:bodyPr rtlCol="0" anchor="ctr"/>
-          <a:lstStyle/>
-          <a:p>
-            <a:pPr algn="ctr"/>
-          </a:p>
-        </p:txBody>
-      </p:sp>
-      <p:sp>
-        <p:nvSpPr>
-          <p:cNvPr id="20" name="TextBox 19"/>
-          <p:cNvSpPr txBox="1"/>
-          <p:nvPr/>
-        </p:nvSpPr>
-        <p:spPr>
-          <a:xfrm>
-            <a:off x="658368" y="2843784"/>
-            <a:ext cx="1883664" cy="713232"/>
-          </a:xfrm>
-          <a:prstGeom prst="rect">
-            <a:avLst/>
-          </a:prstGeom>
-          <a:noFill/>
-        </p:spPr>
-        <p:txBody>
-          <a:bodyPr wrap="square" anchor="ctr">
-            <a:spAutoFit/>
-          </a:bodyPr>
-          <a:lstStyle/>
+              <a:rPr sz="1700" b="0">
+                <a:solidFill>
+                  <a:srgbClr val="1F2430"/>
+                </a:solidFill>
+                <a:latin typeface="Meiryo"/>
+              </a:rPr>
+              <a:t>・失敗したら、プロンプトを強い口調にするのではなく『欠けている能力は何か』を問う。</a:t>
+            </a:r>
+          </a:p>
           <a:p>
             <a:pPr algn="l">
               <a:lnSpc>
-                <a:spcPct val="108000"/>
+                <a:spcPct val="125000"/>
               </a:lnSpc>
               <a:spcAft>
-                <a:spcPts val="0"/>
+                <a:spcPts val="800"/>
               </a:spcAft>
             </a:pPr>
             <a:r>
-              <a:rPr sz="1500" b="1">
-                <a:solidFill>
-                  <a:srgbClr val="4C3AE3"/>
-                </a:solidFill>
-                <a:latin typeface="Meiryo"/>
-              </a:rPr>
-              <a:t>2 コンテキスト</a:t>
-            </a:r>
-          </a:p>
-        </p:txBody>
-      </p:sp>
-      <p:sp>
-        <p:nvSpPr>
-          <p:cNvPr id="21" name="Rectangle 20"/>
-          <p:cNvSpPr/>
-          <p:nvPr/>
-        </p:nvSpPr>
-        <p:spPr>
-          <a:xfrm>
-            <a:off x="2651760" y="2843784"/>
-            <a:ext cx="5120640" cy="713232"/>
-          </a:xfrm>
-          <a:prstGeom prst="rect">
-            <a:avLst/>
-          </a:prstGeom>
-          <a:solidFill>
-            <a:srgbClr val="FFFFFF"/>
-          </a:solidFill>
-          <a:ln w="12700">
-            <a:solidFill>
-              <a:srgbClr val="E3E5F0"/>
-            </a:solidFill>
-          </a:ln>
-          <a:effectLst/>
-        </p:spPr>
-        <p:style>
-          <a:lnRef idx="1">
-            <a:schemeClr val="accent1"/>
-          </a:lnRef>
-          <a:fillRef idx="3">
-            <a:schemeClr val="accent1"/>
-          </a:fillRef>
-          <a:effectRef idx="2">
-            <a:schemeClr val="accent1"/>
-          </a:effectRef>
-          <a:fontRef idx="minor">
-            <a:schemeClr val="lt1"/>
-          </a:fontRef>
-        </p:style>
-        <p:txBody>
-          <a:bodyPr rtlCol="0" anchor="ctr"/>
-          <a:lstStyle/>
-          <a:p>
-            <a:pPr algn="ctr"/>
-          </a:p>
-        </p:txBody>
-      </p:sp>
-      <p:sp>
-        <p:nvSpPr>
-          <p:cNvPr id="22" name="TextBox 21"/>
-          <p:cNvSpPr txBox="1"/>
-          <p:nvPr/>
-        </p:nvSpPr>
-        <p:spPr>
-          <a:xfrm>
-            <a:off x="2761488" y="2843784"/>
-            <a:ext cx="4901184" cy="713232"/>
-          </a:xfrm>
-          <a:prstGeom prst="rect">
-            <a:avLst/>
-          </a:prstGeom>
-          <a:noFill/>
-        </p:spPr>
-        <p:txBody>
-          <a:bodyPr wrap="square" anchor="ctr">
-            <a:spAutoFit/>
-          </a:bodyPr>
-          <a:lstStyle/>
-          <a:p>
-            <a:pPr algn="l">
-              <a:lnSpc>
-                <a:spcPct val="108000"/>
-              </a:lnSpc>
-              <a:spcAft>
-                <a:spcPts val="0"/>
-              </a:spcAft>
-            </a:pPr>
-            <a:r>
-              <a:rPr sz="1500" b="0">
+              <a:rPr sz="1700" b="0">
                 <a:solidFill>
                   <a:srgbClr val="1F2430"/>
                 </a:solidFill>
                 <a:latin typeface="Meiryo"/>
               </a:rPr>
-              <a:t>高信号な情報だけを組み立てる</a:t>
-            </a:r>
-          </a:p>
-        </p:txBody>
-      </p:sp>
-      <p:sp>
-        <p:nvSpPr>
-          <p:cNvPr id="23" name="Rectangle 22"/>
-          <p:cNvSpPr/>
-          <p:nvPr/>
-        </p:nvSpPr>
-        <p:spPr>
-          <a:xfrm>
-            <a:off x="7772400" y="2843784"/>
-            <a:ext cx="3840480" cy="713232"/>
-          </a:xfrm>
-          <a:prstGeom prst="rect">
-            <a:avLst/>
-          </a:prstGeom>
-          <a:solidFill>
-            <a:srgbClr val="FFFFFF"/>
-          </a:solidFill>
-          <a:ln w="12700">
-            <a:solidFill>
-              <a:srgbClr val="E3E5F0"/>
-            </a:solidFill>
-          </a:ln>
-          <a:effectLst/>
-        </p:spPr>
-        <p:style>
-          <a:lnRef idx="1">
-            <a:schemeClr val="accent1"/>
-          </a:lnRef>
-          <a:fillRef idx="3">
-            <a:schemeClr val="accent1"/>
-          </a:fillRef>
-          <a:effectRef idx="2">
-            <a:schemeClr val="accent1"/>
-          </a:effectRef>
-          <a:fontRef idx="minor">
-            <a:schemeClr val="lt1"/>
-          </a:fontRef>
-        </p:style>
-        <p:txBody>
-          <a:bodyPr rtlCol="0" anchor="ctr"/>
-          <a:lstStyle/>
-          <a:p>
-            <a:pPr algn="ctr"/>
-          </a:p>
-        </p:txBody>
-      </p:sp>
-      <p:sp>
-        <p:nvSpPr>
-          <p:cNvPr id="24" name="TextBox 23"/>
-          <p:cNvSpPr txBox="1"/>
-          <p:nvPr/>
-        </p:nvSpPr>
-        <p:spPr>
-          <a:xfrm>
-            <a:off x="7882128" y="2843784"/>
-            <a:ext cx="3621024" cy="713232"/>
-          </a:xfrm>
-          <a:prstGeom prst="rect">
-            <a:avLst/>
-          </a:prstGeom>
-          <a:noFill/>
-        </p:spPr>
-        <p:txBody>
-          <a:bodyPr wrap="square" anchor="ctr">
-            <a:spAutoFit/>
-          </a:bodyPr>
-          <a:lstStyle/>
-          <a:p>
-            <a:pPr algn="l">
-              <a:lnSpc>
-                <a:spcPct val="108000"/>
-              </a:lnSpc>
-              <a:spcAft>
-                <a:spcPts val="0"/>
-              </a:spcAft>
-            </a:pPr>
-            <a:r>
-              <a:rPr sz="1500" b="0">
-                <a:solidFill>
-                  <a:srgbClr val="5B6372"/>
-                </a:solidFill>
-                <a:latin typeface="Meiryo"/>
-              </a:rPr>
-              <a:t>src/context.mjs</a:t>
-            </a:r>
-          </a:p>
-        </p:txBody>
-      </p:sp>
-      <p:sp>
-        <p:nvSpPr>
-          <p:cNvPr id="25" name="Rectangle 24"/>
-          <p:cNvSpPr/>
-          <p:nvPr/>
-        </p:nvSpPr>
-        <p:spPr>
-          <a:xfrm>
-            <a:off x="548640" y="3557016"/>
-            <a:ext cx="2103120" cy="713232"/>
-          </a:xfrm>
-          <a:prstGeom prst="rect">
-            <a:avLst/>
-          </a:prstGeom>
-          <a:solidFill>
-            <a:srgbClr val="F3F4FB"/>
-          </a:solidFill>
-          <a:ln w="12700">
-            <a:solidFill>
-              <a:srgbClr val="E3E5F0"/>
-            </a:solidFill>
-          </a:ln>
-          <a:effectLst/>
-        </p:spPr>
-        <p:style>
-          <a:lnRef idx="1">
-            <a:schemeClr val="accent1"/>
-          </a:lnRef>
-          <a:fillRef idx="3">
-            <a:schemeClr val="accent1"/>
-          </a:fillRef>
-          <a:effectRef idx="2">
-            <a:schemeClr val="accent1"/>
-          </a:effectRef>
-          <a:fontRef idx="minor">
-            <a:schemeClr val="lt1"/>
-          </a:fontRef>
-        </p:style>
-        <p:txBody>
-          <a:bodyPr rtlCol="0" anchor="ctr"/>
-          <a:lstStyle/>
-          <a:p>
-            <a:pPr algn="ctr"/>
-          </a:p>
-        </p:txBody>
-      </p:sp>
-      <p:sp>
-        <p:nvSpPr>
-          <p:cNvPr id="26" name="TextBox 25"/>
-          <p:cNvSpPr txBox="1"/>
-          <p:nvPr/>
-        </p:nvSpPr>
-        <p:spPr>
-          <a:xfrm>
-            <a:off x="658368" y="3557016"/>
-            <a:ext cx="1883664" cy="713232"/>
-          </a:xfrm>
-          <a:prstGeom prst="rect">
-            <a:avLst/>
-          </a:prstGeom>
-          <a:noFill/>
-        </p:spPr>
-        <p:txBody>
-          <a:bodyPr wrap="square" anchor="ctr">
-            <a:spAutoFit/>
-          </a:bodyPr>
-          <a:lstStyle/>
-          <a:p>
-            <a:pPr algn="l">
-              <a:lnSpc>
-                <a:spcPct val="108000"/>
-              </a:lnSpc>
-              <a:spcAft>
-                <a:spcPts val="0"/>
-              </a:spcAft>
-            </a:pPr>
-            <a:r>
-              <a:rPr sz="1500" b="1">
-                <a:solidFill>
-                  <a:srgbClr val="4C3AE3"/>
-                </a:solidFill>
-                <a:latin typeface="Meiryo"/>
-              </a:rPr>
-              <a:t>3 ゲートウェイ</a:t>
-            </a:r>
-          </a:p>
-        </p:txBody>
-      </p:sp>
-      <p:sp>
-        <p:nvSpPr>
-          <p:cNvPr id="27" name="Rectangle 26"/>
-          <p:cNvSpPr/>
-          <p:nvPr/>
-        </p:nvSpPr>
-        <p:spPr>
-          <a:xfrm>
-            <a:off x="2651760" y="3557016"/>
-            <a:ext cx="5120640" cy="713232"/>
-          </a:xfrm>
-          <a:prstGeom prst="rect">
-            <a:avLst/>
-          </a:prstGeom>
-          <a:solidFill>
-            <a:srgbClr val="F3F4FB"/>
-          </a:solidFill>
-          <a:ln w="12700">
-            <a:solidFill>
-              <a:srgbClr val="E3E5F0"/>
-            </a:solidFill>
-          </a:ln>
-          <a:effectLst/>
-        </p:spPr>
-        <p:style>
-          <a:lnRef idx="1">
-            <a:schemeClr val="accent1"/>
-          </a:lnRef>
-          <a:fillRef idx="3">
-            <a:schemeClr val="accent1"/>
-          </a:fillRef>
-          <a:effectRef idx="2">
-            <a:schemeClr val="accent1"/>
-          </a:effectRef>
-          <a:fontRef idx="minor">
-            <a:schemeClr val="lt1"/>
-          </a:fontRef>
-        </p:style>
-        <p:txBody>
-          <a:bodyPr rtlCol="0" anchor="ctr"/>
-          <a:lstStyle/>
-          <a:p>
-            <a:pPr algn="ctr"/>
-          </a:p>
-        </p:txBody>
-      </p:sp>
-      <p:sp>
-        <p:nvSpPr>
-          <p:cNvPr id="28" name="TextBox 27"/>
-          <p:cNvSpPr txBox="1"/>
-          <p:nvPr/>
-        </p:nvSpPr>
-        <p:spPr>
-          <a:xfrm>
-            <a:off x="2761488" y="3557016"/>
-            <a:ext cx="4901184" cy="713232"/>
-          </a:xfrm>
-          <a:prstGeom prst="rect">
-            <a:avLst/>
-          </a:prstGeom>
-          <a:noFill/>
-        </p:spPr>
-        <p:txBody>
-          <a:bodyPr wrap="square" anchor="ctr">
-            <a:spAutoFit/>
-          </a:bodyPr>
-          <a:lstStyle/>
-          <a:p>
-            <a:pPr algn="l">
-              <a:lnSpc>
-                <a:spcPct val="108000"/>
-              </a:lnSpc>
-              <a:spcAft>
-                <a:spcPts val="0"/>
-              </a:spcAft>
-            </a:pPr>
-            <a:r>
-              <a:rPr sz="1500" b="0">
-                <a:solidFill>
-                  <a:srgbClr val="1F2430"/>
-                </a:solidFill>
-                <a:latin typeface="Meiryo"/>
-              </a:rPr>
-              <a:t>提案・許可・実行を分離する</a:t>
-            </a:r>
-          </a:p>
-        </p:txBody>
-      </p:sp>
-      <p:sp>
-        <p:nvSpPr>
-          <p:cNvPr id="29" name="Rectangle 28"/>
-          <p:cNvSpPr/>
-          <p:nvPr/>
-        </p:nvSpPr>
-        <p:spPr>
-          <a:xfrm>
-            <a:off x="7772400" y="3557016"/>
-            <a:ext cx="3840480" cy="713232"/>
-          </a:xfrm>
-          <a:prstGeom prst="rect">
-            <a:avLst/>
-          </a:prstGeom>
-          <a:solidFill>
-            <a:srgbClr val="F3F4FB"/>
-          </a:solidFill>
-          <a:ln w="12700">
-            <a:solidFill>
-              <a:srgbClr val="E3E5F0"/>
-            </a:solidFill>
-          </a:ln>
-          <a:effectLst/>
-        </p:spPr>
-        <p:style>
-          <a:lnRef idx="1">
-            <a:schemeClr val="accent1"/>
-          </a:lnRef>
-          <a:fillRef idx="3">
-            <a:schemeClr val="accent1"/>
-          </a:fillRef>
-          <a:effectRef idx="2">
-            <a:schemeClr val="accent1"/>
-          </a:effectRef>
-          <a:fontRef idx="minor">
-            <a:schemeClr val="lt1"/>
-          </a:fontRef>
-        </p:style>
-        <p:txBody>
-          <a:bodyPr rtlCol="0" anchor="ctr"/>
-          <a:lstStyle/>
-          <a:p>
-            <a:pPr algn="ctr"/>
-          </a:p>
-        </p:txBody>
-      </p:sp>
-      <p:sp>
-        <p:nvSpPr>
-          <p:cNvPr id="30" name="TextBox 29"/>
-          <p:cNvSpPr txBox="1"/>
-          <p:nvPr/>
-        </p:nvSpPr>
-        <p:spPr>
-          <a:xfrm>
-            <a:off x="7882128" y="3557016"/>
-            <a:ext cx="3621024" cy="713232"/>
-          </a:xfrm>
-          <a:prstGeom prst="rect">
-            <a:avLst/>
-          </a:prstGeom>
-          <a:noFill/>
-        </p:spPr>
-        <p:txBody>
-          <a:bodyPr wrap="square" anchor="ctr">
-            <a:spAutoFit/>
-          </a:bodyPr>
-          <a:lstStyle/>
-          <a:p>
-            <a:pPr algn="l">
-              <a:lnSpc>
-                <a:spcPct val="108000"/>
-              </a:lnSpc>
-              <a:spcAft>
-                <a:spcPts val="0"/>
-              </a:spcAft>
-            </a:pPr>
-            <a:r>
-              <a:rPr sz="1500" b="0">
-                <a:solidFill>
-                  <a:srgbClr val="5B6372"/>
-                </a:solidFill>
-                <a:latin typeface="Meiryo"/>
-              </a:rPr>
-              <a:t>src/gateway.mjs / permissions.json</a:t>
-            </a:r>
-          </a:p>
-        </p:txBody>
-      </p:sp>
-      <p:sp>
-        <p:nvSpPr>
-          <p:cNvPr id="31" name="Rectangle 30"/>
-          <p:cNvSpPr/>
-          <p:nvPr/>
-        </p:nvSpPr>
-        <p:spPr>
-          <a:xfrm>
-            <a:off x="548640" y="4270248"/>
-            <a:ext cx="2103120" cy="713232"/>
-          </a:xfrm>
-          <a:prstGeom prst="rect">
-            <a:avLst/>
-          </a:prstGeom>
-          <a:solidFill>
-            <a:srgbClr val="FFFFFF"/>
-          </a:solidFill>
-          <a:ln w="12700">
-            <a:solidFill>
-              <a:srgbClr val="E3E5F0"/>
-            </a:solidFill>
-          </a:ln>
-          <a:effectLst/>
-        </p:spPr>
-        <p:style>
-          <a:lnRef idx="1">
-            <a:schemeClr val="accent1"/>
-          </a:lnRef>
-          <a:fillRef idx="3">
-            <a:schemeClr val="accent1"/>
-          </a:fillRef>
-          <a:effectRef idx="2">
-            <a:schemeClr val="accent1"/>
-          </a:effectRef>
-          <a:fontRef idx="minor">
-            <a:schemeClr val="lt1"/>
-          </a:fontRef>
-        </p:style>
-        <p:txBody>
-          <a:bodyPr rtlCol="0" anchor="ctr"/>
-          <a:lstStyle/>
-          <a:p>
-            <a:pPr algn="ctr"/>
-          </a:p>
-        </p:txBody>
-      </p:sp>
-      <p:sp>
-        <p:nvSpPr>
-          <p:cNvPr id="32" name="TextBox 31"/>
-          <p:cNvSpPr txBox="1"/>
-          <p:nvPr/>
-        </p:nvSpPr>
-        <p:spPr>
-          <a:xfrm>
-            <a:off x="658368" y="4270248"/>
-            <a:ext cx="1883664" cy="713232"/>
-          </a:xfrm>
-          <a:prstGeom prst="rect">
-            <a:avLst/>
-          </a:prstGeom>
-          <a:noFill/>
-        </p:spPr>
-        <p:txBody>
-          <a:bodyPr wrap="square" anchor="ctr">
-            <a:spAutoFit/>
-          </a:bodyPr>
-          <a:lstStyle/>
-          <a:p>
-            <a:pPr algn="l">
-              <a:lnSpc>
-                <a:spcPct val="108000"/>
-              </a:lnSpc>
-              <a:spcAft>
-                <a:spcPts val="0"/>
-              </a:spcAft>
-            </a:pPr>
-            <a:r>
-              <a:rPr sz="1500" b="1">
-                <a:solidFill>
-                  <a:srgbClr val="4C3AE3"/>
-                </a:solidFill>
-                <a:latin typeface="Meiryo"/>
-              </a:rPr>
-              <a:t>4 状態・記憶</a:t>
-            </a:r>
-          </a:p>
-        </p:txBody>
-      </p:sp>
-      <p:sp>
-        <p:nvSpPr>
-          <p:cNvPr id="33" name="Rectangle 32"/>
-          <p:cNvSpPr/>
-          <p:nvPr/>
-        </p:nvSpPr>
-        <p:spPr>
-          <a:xfrm>
-            <a:off x="2651760" y="4270248"/>
-            <a:ext cx="5120640" cy="713232"/>
-          </a:xfrm>
-          <a:prstGeom prst="rect">
-            <a:avLst/>
-          </a:prstGeom>
-          <a:solidFill>
-            <a:srgbClr val="FFFFFF"/>
-          </a:solidFill>
-          <a:ln w="12700">
-            <a:solidFill>
-              <a:srgbClr val="E3E5F0"/>
-            </a:solidFill>
-          </a:ln>
-          <a:effectLst/>
-        </p:spPr>
-        <p:style>
-          <a:lnRef idx="1">
-            <a:schemeClr val="accent1"/>
-          </a:lnRef>
-          <a:fillRef idx="3">
-            <a:schemeClr val="accent1"/>
-          </a:fillRef>
-          <a:effectRef idx="2">
-            <a:schemeClr val="accent1"/>
-          </a:effectRef>
-          <a:fontRef idx="minor">
-            <a:schemeClr val="lt1"/>
-          </a:fontRef>
-        </p:style>
-        <p:txBody>
-          <a:bodyPr rtlCol="0" anchor="ctr"/>
-          <a:lstStyle/>
-          <a:p>
-            <a:pPr algn="ctr"/>
-          </a:p>
-        </p:txBody>
-      </p:sp>
-      <p:sp>
-        <p:nvSpPr>
-          <p:cNvPr id="34" name="TextBox 33"/>
-          <p:cNvSpPr txBox="1"/>
-          <p:nvPr/>
-        </p:nvSpPr>
-        <p:spPr>
-          <a:xfrm>
-            <a:off x="2761488" y="4270248"/>
-            <a:ext cx="4901184" cy="713232"/>
-          </a:xfrm>
-          <a:prstGeom prst="rect">
-            <a:avLst/>
-          </a:prstGeom>
-          <a:noFill/>
-        </p:spPr>
-        <p:txBody>
-          <a:bodyPr wrap="square" anchor="ctr">
-            <a:spAutoFit/>
-          </a:bodyPr>
-          <a:lstStyle/>
-          <a:p>
-            <a:pPr algn="l">
-              <a:lnSpc>
-                <a:spcPct val="108000"/>
-              </a:lnSpc>
-              <a:spcAft>
-                <a:spcPts val="0"/>
-              </a:spcAft>
-            </a:pPr>
-            <a:r>
-              <a:rPr sz="1500" b="0">
-                <a:solidFill>
-                  <a:srgbClr val="1F2430"/>
-                </a:solidFill>
-                <a:latin typeface="Meiryo"/>
-              </a:rPr>
-              <a:t>継続に必要な最低限だけ残す</a:t>
-            </a:r>
-          </a:p>
-        </p:txBody>
-      </p:sp>
-      <p:sp>
-        <p:nvSpPr>
-          <p:cNvPr id="35" name="Rectangle 34"/>
-          <p:cNvSpPr/>
-          <p:nvPr/>
-        </p:nvSpPr>
-        <p:spPr>
-          <a:xfrm>
-            <a:off x="7772400" y="4270248"/>
-            <a:ext cx="3840480" cy="713232"/>
-          </a:xfrm>
-          <a:prstGeom prst="rect">
-            <a:avLst/>
-          </a:prstGeom>
-          <a:solidFill>
-            <a:srgbClr val="FFFFFF"/>
-          </a:solidFill>
-          <a:ln w="12700">
-            <a:solidFill>
-              <a:srgbClr val="E3E5F0"/>
-            </a:solidFill>
-          </a:ln>
-          <a:effectLst/>
-        </p:spPr>
-        <p:style>
-          <a:lnRef idx="1">
-            <a:schemeClr val="accent1"/>
-          </a:lnRef>
-          <a:fillRef idx="3">
-            <a:schemeClr val="accent1"/>
-          </a:fillRef>
-          <a:effectRef idx="2">
-            <a:schemeClr val="accent1"/>
-          </a:effectRef>
-          <a:fontRef idx="minor">
-            <a:schemeClr val="lt1"/>
-          </a:fontRef>
-        </p:style>
-        <p:txBody>
-          <a:bodyPr rtlCol="0" anchor="ctr"/>
-          <a:lstStyle/>
-          <a:p>
-            <a:pPr algn="ctr"/>
-          </a:p>
-        </p:txBody>
-      </p:sp>
-      <p:sp>
-        <p:nvSpPr>
-          <p:cNvPr id="36" name="TextBox 35"/>
-          <p:cNvSpPr txBox="1"/>
-          <p:nvPr/>
-        </p:nvSpPr>
-        <p:spPr>
-          <a:xfrm>
-            <a:off x="7882128" y="4270248"/>
-            <a:ext cx="3621024" cy="713232"/>
-          </a:xfrm>
-          <a:prstGeom prst="rect">
-            <a:avLst/>
-          </a:prstGeom>
-          <a:noFill/>
-        </p:spPr>
-        <p:txBody>
-          <a:bodyPr wrap="square" anchor="ctr">
-            <a:spAutoFit/>
-          </a:bodyPr>
-          <a:lstStyle/>
-          <a:p>
-            <a:pPr algn="l">
-              <a:lnSpc>
-                <a:spcPct val="108000"/>
-              </a:lnSpc>
-              <a:spcAft>
-                <a:spcPts val="0"/>
-              </a:spcAft>
-            </a:pPr>
-            <a:r>
-              <a:rPr sz="1500" b="0">
-                <a:solidFill>
-                  <a:srgbClr val="5B6372"/>
-                </a:solidFill>
-                <a:latin typeface="Meiryo"/>
-              </a:rPr>
-              <a:t>src/state.mjs</a:t>
-            </a:r>
-          </a:p>
-        </p:txBody>
-      </p:sp>
-      <p:sp>
-        <p:nvSpPr>
-          <p:cNvPr id="37" name="Rectangle 36"/>
-          <p:cNvSpPr/>
-          <p:nvPr/>
-        </p:nvSpPr>
-        <p:spPr>
-          <a:xfrm>
-            <a:off x="548640" y="4983480"/>
-            <a:ext cx="2103120" cy="713232"/>
-          </a:xfrm>
-          <a:prstGeom prst="rect">
-            <a:avLst/>
-          </a:prstGeom>
-          <a:solidFill>
-            <a:srgbClr val="F3F4FB"/>
-          </a:solidFill>
-          <a:ln w="12700">
-            <a:solidFill>
-              <a:srgbClr val="E3E5F0"/>
-            </a:solidFill>
-          </a:ln>
-          <a:effectLst/>
-        </p:spPr>
-        <p:style>
-          <a:lnRef idx="1">
-            <a:schemeClr val="accent1"/>
-          </a:lnRef>
-          <a:fillRef idx="3">
-            <a:schemeClr val="accent1"/>
-          </a:fillRef>
-          <a:effectRef idx="2">
-            <a:schemeClr val="accent1"/>
-          </a:effectRef>
-          <a:fontRef idx="minor">
-            <a:schemeClr val="lt1"/>
-          </a:fontRef>
-        </p:style>
-        <p:txBody>
-          <a:bodyPr rtlCol="0" anchor="ctr"/>
-          <a:lstStyle/>
-          <a:p>
-            <a:pPr algn="ctr"/>
-          </a:p>
-        </p:txBody>
-      </p:sp>
-      <p:sp>
-        <p:nvSpPr>
-          <p:cNvPr id="38" name="TextBox 37"/>
-          <p:cNvSpPr txBox="1"/>
-          <p:nvPr/>
-        </p:nvSpPr>
-        <p:spPr>
-          <a:xfrm>
-            <a:off x="658368" y="4983480"/>
-            <a:ext cx="1883664" cy="713232"/>
-          </a:xfrm>
-          <a:prstGeom prst="rect">
-            <a:avLst/>
-          </a:prstGeom>
-          <a:noFill/>
-        </p:spPr>
-        <p:txBody>
-          <a:bodyPr wrap="square" anchor="ctr">
-            <a:spAutoFit/>
-          </a:bodyPr>
-          <a:lstStyle/>
-          <a:p>
-            <a:pPr algn="l">
-              <a:lnSpc>
-                <a:spcPct val="108000"/>
-              </a:lnSpc>
-              <a:spcAft>
-                <a:spcPts val="0"/>
-              </a:spcAft>
-            </a:pPr>
-            <a:r>
-              <a:rPr sz="1500" b="1">
-                <a:solidFill>
-                  <a:srgbClr val="4C3AE3"/>
-                </a:solidFill>
-                <a:latin typeface="Meiryo"/>
-              </a:rPr>
-              <a:t>5 証拠ゲート</a:t>
-            </a:r>
-          </a:p>
-        </p:txBody>
-      </p:sp>
-      <p:sp>
-        <p:nvSpPr>
-          <p:cNvPr id="39" name="Rectangle 38"/>
-          <p:cNvSpPr/>
-          <p:nvPr/>
-        </p:nvSpPr>
-        <p:spPr>
-          <a:xfrm>
-            <a:off x="2651760" y="4983480"/>
-            <a:ext cx="5120640" cy="713232"/>
-          </a:xfrm>
-          <a:prstGeom prst="rect">
-            <a:avLst/>
-          </a:prstGeom>
-          <a:solidFill>
-            <a:srgbClr val="F3F4FB"/>
-          </a:solidFill>
-          <a:ln w="12700">
-            <a:solidFill>
-              <a:srgbClr val="E3E5F0"/>
-            </a:solidFill>
-          </a:ln>
-          <a:effectLst/>
-        </p:spPr>
-        <p:style>
-          <a:lnRef idx="1">
-            <a:schemeClr val="accent1"/>
-          </a:lnRef>
-          <a:fillRef idx="3">
-            <a:schemeClr val="accent1"/>
-          </a:fillRef>
-          <a:effectRef idx="2">
-            <a:schemeClr val="accent1"/>
-          </a:effectRef>
-          <a:fontRef idx="minor">
-            <a:schemeClr val="lt1"/>
-          </a:fontRef>
-        </p:style>
-        <p:txBody>
-          <a:bodyPr rtlCol="0" anchor="ctr"/>
-          <a:lstStyle/>
-          <a:p>
-            <a:pPr algn="ctr"/>
-          </a:p>
-        </p:txBody>
-      </p:sp>
-      <p:sp>
-        <p:nvSpPr>
-          <p:cNvPr id="40" name="TextBox 39"/>
-          <p:cNvSpPr txBox="1"/>
-          <p:nvPr/>
-        </p:nvSpPr>
-        <p:spPr>
-          <a:xfrm>
-            <a:off x="2761488" y="4983480"/>
-            <a:ext cx="4901184" cy="713232"/>
-          </a:xfrm>
-          <a:prstGeom prst="rect">
-            <a:avLst/>
-          </a:prstGeom>
-          <a:noFill/>
-        </p:spPr>
-        <p:txBody>
-          <a:bodyPr wrap="square" anchor="ctr">
-            <a:spAutoFit/>
-          </a:bodyPr>
-          <a:lstStyle/>
-          <a:p>
-            <a:pPr algn="l">
-              <a:lnSpc>
-                <a:spcPct val="108000"/>
-              </a:lnSpc>
-              <a:spcAft>
-                <a:spcPts val="0"/>
-              </a:spcAft>
-            </a:pPr>
-            <a:r>
-              <a:rPr sz="1500" b="0">
-                <a:solidFill>
-                  <a:srgbClr val="1F2430"/>
-                </a:solidFill>
-                <a:latin typeface="Meiryo"/>
-              </a:rPr>
-              <a:t>accept / retry / escalate を証拠で判定</a:t>
-            </a:r>
-          </a:p>
-        </p:txBody>
-      </p:sp>
-      <p:sp>
-        <p:nvSpPr>
-          <p:cNvPr id="41" name="Rectangle 40"/>
-          <p:cNvSpPr/>
-          <p:nvPr/>
-        </p:nvSpPr>
-        <p:spPr>
-          <a:xfrm>
-            <a:off x="7772400" y="4983480"/>
-            <a:ext cx="3840480" cy="713232"/>
-          </a:xfrm>
-          <a:prstGeom prst="rect">
-            <a:avLst/>
-          </a:prstGeom>
-          <a:solidFill>
-            <a:srgbClr val="F3F4FB"/>
-          </a:solidFill>
-          <a:ln w="12700">
-            <a:solidFill>
-              <a:srgbClr val="E3E5F0"/>
-            </a:solidFill>
-          </a:ln>
-          <a:effectLst/>
-        </p:spPr>
-        <p:style>
-          <a:lnRef idx="1">
-            <a:schemeClr val="accent1"/>
-          </a:lnRef>
-          <a:fillRef idx="3">
-            <a:schemeClr val="accent1"/>
-          </a:fillRef>
-          <a:effectRef idx="2">
-            <a:schemeClr val="accent1"/>
-          </a:effectRef>
-          <a:fontRef idx="minor">
-            <a:schemeClr val="lt1"/>
-          </a:fontRef>
-        </p:style>
-        <p:txBody>
-          <a:bodyPr rtlCol="0" anchor="ctr"/>
-          <a:lstStyle/>
-          <a:p>
-            <a:pPr algn="ctr"/>
-          </a:p>
-        </p:txBody>
-      </p:sp>
-      <p:sp>
-        <p:nvSpPr>
-          <p:cNvPr id="42" name="TextBox 41"/>
-          <p:cNvSpPr txBox="1"/>
-          <p:nvPr/>
-        </p:nvSpPr>
-        <p:spPr>
-          <a:xfrm>
-            <a:off x="7882128" y="4983480"/>
-            <a:ext cx="3621024" cy="713232"/>
-          </a:xfrm>
-          <a:prstGeom prst="rect">
-            <a:avLst/>
-          </a:prstGeom>
-          <a:noFill/>
-        </p:spPr>
-        <p:txBody>
-          <a:bodyPr wrap="square" anchor="ctr">
-            <a:spAutoFit/>
-          </a:bodyPr>
-          <a:lstStyle/>
-          <a:p>
-            <a:pPr algn="l">
-              <a:lnSpc>
-                <a:spcPct val="108000"/>
-              </a:lnSpc>
-              <a:spcAft>
-                <a:spcPts val="0"/>
-              </a:spcAft>
-            </a:pPr>
-            <a:r>
-              <a:rPr sz="1500" b="0">
-                <a:solidFill>
-                  <a:srgbClr val="5B6372"/>
-                </a:solidFill>
-                <a:latin typeface="Meiryo"/>
-              </a:rPr>
-              <a:t>src/verify.mjs / checks/fixture.csv</a:t>
-            </a:r>
-          </a:p>
-        </p:txBody>
-      </p:sp>
-      <p:sp>
-        <p:nvSpPr>
-          <p:cNvPr id="43" name="Rectangle 42"/>
-          <p:cNvSpPr/>
-          <p:nvPr/>
-        </p:nvSpPr>
-        <p:spPr>
-          <a:xfrm>
-            <a:off x="548640" y="5696712"/>
-            <a:ext cx="2103120" cy="713232"/>
-          </a:xfrm>
-          <a:prstGeom prst="rect">
-            <a:avLst/>
-          </a:prstGeom>
-          <a:solidFill>
-            <a:srgbClr val="FFFFFF"/>
-          </a:solidFill>
-          <a:ln w="12700">
-            <a:solidFill>
-              <a:srgbClr val="E3E5F0"/>
-            </a:solidFill>
-          </a:ln>
-          <a:effectLst/>
-        </p:spPr>
-        <p:style>
-          <a:lnRef idx="1">
-            <a:schemeClr val="accent1"/>
-          </a:lnRef>
-          <a:fillRef idx="3">
-            <a:schemeClr val="accent1"/>
-          </a:fillRef>
-          <a:effectRef idx="2">
-            <a:schemeClr val="accent1"/>
-          </a:effectRef>
-          <a:fontRef idx="minor">
-            <a:schemeClr val="lt1"/>
-          </a:fontRef>
-        </p:style>
-        <p:txBody>
-          <a:bodyPr rtlCol="0" anchor="ctr"/>
-          <a:lstStyle/>
-          <a:p>
-            <a:pPr algn="ctr"/>
-          </a:p>
-        </p:txBody>
-      </p:sp>
-      <p:sp>
-        <p:nvSpPr>
-          <p:cNvPr id="44" name="TextBox 43"/>
-          <p:cNvSpPr txBox="1"/>
-          <p:nvPr/>
-        </p:nvSpPr>
-        <p:spPr>
-          <a:xfrm>
-            <a:off x="658368" y="5696712"/>
-            <a:ext cx="1883664" cy="713232"/>
-          </a:xfrm>
-          <a:prstGeom prst="rect">
-            <a:avLst/>
-          </a:prstGeom>
-          <a:noFill/>
-        </p:spPr>
-        <p:txBody>
-          <a:bodyPr wrap="square" anchor="ctr">
-            <a:spAutoFit/>
-          </a:bodyPr>
-          <a:lstStyle/>
-          <a:p>
-            <a:pPr algn="l">
-              <a:lnSpc>
-                <a:spcPct val="108000"/>
-              </a:lnSpc>
-              <a:spcAft>
-                <a:spcPts val="0"/>
-              </a:spcAft>
-            </a:pPr>
-            <a:r>
-              <a:rPr sz="1500" b="1">
-                <a:solidFill>
-                  <a:srgbClr val="4C3AE3"/>
-                </a:solidFill>
-                <a:latin typeface="Meiryo"/>
-              </a:rPr>
-              <a:t>6 トレース</a:t>
-            </a:r>
-          </a:p>
-        </p:txBody>
-      </p:sp>
-      <p:sp>
-        <p:nvSpPr>
-          <p:cNvPr id="45" name="Rectangle 44"/>
-          <p:cNvSpPr/>
-          <p:nvPr/>
-        </p:nvSpPr>
-        <p:spPr>
-          <a:xfrm>
-            <a:off x="2651760" y="5696712"/>
-            <a:ext cx="5120640" cy="713232"/>
-          </a:xfrm>
-          <a:prstGeom prst="rect">
-            <a:avLst/>
-          </a:prstGeom>
-          <a:solidFill>
-            <a:srgbClr val="FFFFFF"/>
-          </a:solidFill>
-          <a:ln w="12700">
-            <a:solidFill>
-              <a:srgbClr val="E3E5F0"/>
-            </a:solidFill>
-          </a:ln>
-          <a:effectLst/>
-        </p:spPr>
-        <p:style>
-          <a:lnRef idx="1">
-            <a:schemeClr val="accent1"/>
-          </a:lnRef>
-          <a:fillRef idx="3">
-            <a:schemeClr val="accent1"/>
-          </a:fillRef>
-          <a:effectRef idx="2">
-            <a:schemeClr val="accent1"/>
-          </a:effectRef>
-          <a:fontRef idx="minor">
-            <a:schemeClr val="lt1"/>
-          </a:fontRef>
-        </p:style>
-        <p:txBody>
-          <a:bodyPr rtlCol="0" anchor="ctr"/>
-          <a:lstStyle/>
-          <a:p>
-            <a:pPr algn="ctr"/>
-          </a:p>
-        </p:txBody>
-      </p:sp>
-      <p:sp>
-        <p:nvSpPr>
-          <p:cNvPr id="46" name="TextBox 45"/>
-          <p:cNvSpPr txBox="1"/>
-          <p:nvPr/>
-        </p:nvSpPr>
-        <p:spPr>
-          <a:xfrm>
-            <a:off x="2761488" y="5696712"/>
-            <a:ext cx="4901184" cy="713232"/>
-          </a:xfrm>
-          <a:prstGeom prst="rect">
-            <a:avLst/>
-          </a:prstGeom>
-          <a:noFill/>
-        </p:spPr>
-        <p:txBody>
-          <a:bodyPr wrap="square" anchor="ctr">
-            <a:spAutoFit/>
-          </a:bodyPr>
-          <a:lstStyle/>
-          <a:p>
-            <a:pPr algn="l">
-              <a:lnSpc>
-                <a:spcPct val="108000"/>
-              </a:lnSpc>
-              <a:spcAft>
-                <a:spcPts val="0"/>
-              </a:spcAft>
-            </a:pPr>
-            <a:r>
-              <a:rPr sz="1500" b="0">
-                <a:solidFill>
-                  <a:srgbClr val="1F2430"/>
-                </a:solidFill>
-                <a:latin typeface="Meiryo"/>
-              </a:rPr>
-              <a:t>実行を1行で記録し失敗を基盤に変える</a:t>
-            </a:r>
-          </a:p>
-        </p:txBody>
-      </p:sp>
-      <p:sp>
-        <p:nvSpPr>
-          <p:cNvPr id="47" name="Rectangle 46"/>
-          <p:cNvSpPr/>
-          <p:nvPr/>
-        </p:nvSpPr>
-        <p:spPr>
-          <a:xfrm>
-            <a:off x="7772400" y="5696712"/>
-            <a:ext cx="3840480" cy="713232"/>
-          </a:xfrm>
-          <a:prstGeom prst="rect">
-            <a:avLst/>
-          </a:prstGeom>
-          <a:solidFill>
-            <a:srgbClr val="FFFFFF"/>
-          </a:solidFill>
-          <a:ln w="12700">
-            <a:solidFill>
-              <a:srgbClr val="E3E5F0"/>
-            </a:solidFill>
-          </a:ln>
-          <a:effectLst/>
-        </p:spPr>
-        <p:style>
-          <a:lnRef idx="1">
-            <a:schemeClr val="accent1"/>
-          </a:lnRef>
-          <a:fillRef idx="3">
-            <a:schemeClr val="accent1"/>
-          </a:fillRef>
-          <a:effectRef idx="2">
-            <a:schemeClr val="accent1"/>
-          </a:effectRef>
-          <a:fontRef idx="minor">
-            <a:schemeClr val="lt1"/>
-          </a:fontRef>
-        </p:style>
-        <p:txBody>
-          <a:bodyPr rtlCol="0" anchor="ctr"/>
-          <a:lstStyle/>
-          <a:p>
-            <a:pPr algn="ctr"/>
-          </a:p>
-        </p:txBody>
-      </p:sp>
-      <p:sp>
-        <p:nvSpPr>
-          <p:cNvPr id="48" name="TextBox 47"/>
-          <p:cNvSpPr txBox="1"/>
-          <p:nvPr/>
-        </p:nvSpPr>
-        <p:spPr>
-          <a:xfrm>
-            <a:off x="7882128" y="5696712"/>
-            <a:ext cx="3621024" cy="713232"/>
-          </a:xfrm>
-          <a:prstGeom prst="rect">
-            <a:avLst/>
-          </a:prstGeom>
-          <a:noFill/>
-        </p:spPr>
-        <p:txBody>
-          <a:bodyPr wrap="square" anchor="ctr">
-            <a:spAutoFit/>
-          </a:bodyPr>
-          <a:lstStyle/>
-          <a:p>
-            <a:pPr algn="l">
-              <a:lnSpc>
-                <a:spcPct val="108000"/>
-              </a:lnSpc>
-              <a:spcAft>
-                <a:spcPts val="0"/>
-              </a:spcAft>
-            </a:pPr>
-            <a:r>
-              <a:rPr sz="1500" b="0">
-                <a:solidFill>
-                  <a:srgbClr val="5B6372"/>
-                </a:solidFill>
-                <a:latin typeface="Meiryo"/>
-              </a:rPr>
-              <a:t>runs/traces.jsonl</a:t>
+              <a:t>・自律性は、証拠の質が上がった分だけ広げてよい。</a:t>
             </a:r>
           </a:p>
         </p:txBody>
@@ -6632,7 +5667,7 @@
                 </a:solidFill>
                 <a:latin typeface="Meiryo"/>
               </a:rPr>
-              <a:t>デモの流れ</a:t>
+              <a:t>6層の全体像</a:t>
             </a:r>
           </a:p>
           <a:p>
@@ -6651,7 +5686,7 @@
                 </a:solidFill>
                 <a:latin typeface="Meiryo"/>
               </a:rPr>
-              <a:t>node agent-harness/src/harness.mjs を実行すると…</a:t>
+              <a:t>各層が1ファイルに対応している</a:t>
             </a:r>
           </a:p>
         </p:txBody>
@@ -6664,14 +5699,14 @@
         </p:nvSpPr>
         <p:spPr>
           <a:xfrm>
-            <a:off x="548640" y="1463040"/>
-            <a:ext cx="3611880" cy="1783080"/>
+            <a:off x="548640" y="1417320"/>
+            <a:ext cx="2103120" cy="713232"/>
           </a:xfrm>
           <a:prstGeom prst="rect">
             <a:avLst/>
           </a:prstGeom>
           <a:solidFill>
-            <a:srgbClr val="F3F4FB"/>
+            <a:srgbClr val="4C3AE3"/>
           </a:solidFill>
           <a:ln>
             <a:noFill/>
@@ -6702,58 +5737,14 @@
       </p:sp>
       <p:sp>
         <p:nvSpPr>
-          <p:cNvPr id="8" name="Rectangle 7"/>
-          <p:cNvSpPr/>
-          <p:nvPr/>
-        </p:nvSpPr>
-        <p:spPr>
-          <a:xfrm>
-            <a:off x="548640" y="1463040"/>
-            <a:ext cx="128016" cy="1783080"/>
-          </a:xfrm>
-          <a:prstGeom prst="rect">
-            <a:avLst/>
-          </a:prstGeom>
-          <a:solidFill>
-            <a:srgbClr val="D13A3A"/>
-          </a:solidFill>
-          <a:ln>
-            <a:noFill/>
-          </a:ln>
-          <a:effectLst/>
-        </p:spPr>
-        <p:style>
-          <a:lnRef idx="1">
-            <a:schemeClr val="accent1"/>
-          </a:lnRef>
-          <a:fillRef idx="3">
-            <a:schemeClr val="accent1"/>
-          </a:fillRef>
-          <a:effectRef idx="2">
-            <a:schemeClr val="accent1"/>
-          </a:effectRef>
-          <a:fontRef idx="minor">
-            <a:schemeClr val="lt1"/>
-          </a:fontRef>
-        </p:style>
-        <p:txBody>
-          <a:bodyPr rtlCol="0" anchor="ctr"/>
-          <a:lstStyle/>
-          <a:p>
-            <a:pPr algn="ctr"/>
-          </a:p>
-        </p:txBody>
-      </p:sp>
-      <p:sp>
-        <p:nvSpPr>
-          <p:cNvPr id="9" name="TextBox 8"/>
+          <p:cNvPr id="8" name="TextBox 7"/>
           <p:cNvSpPr txBox="1"/>
           <p:nvPr/>
         </p:nvSpPr>
         <p:spPr>
           <a:xfrm>
-            <a:off x="868680" y="1645920"/>
-            <a:ext cx="3063240" cy="1463040"/>
+            <a:off x="658368" y="1417320"/>
+            <a:ext cx="1883664" cy="713232"/>
           </a:xfrm>
           <a:prstGeom prst="rect">
             <a:avLst/>
@@ -6761,450 +5752,7 @@
           <a:noFill/>
         </p:spPr>
         <p:txBody>
-          <a:bodyPr wrap="square" anchor="t">
-            <a:spAutoFit/>
-          </a:bodyPr>
-          <a:lstStyle/>
-          <a:p>
-            <a:pPr algn="l">
-              <a:lnSpc>
-                <a:spcPct val="115000"/>
-              </a:lnSpc>
-              <a:spcAft>
-                <a:spcPts val="600"/>
-              </a:spcAft>
-            </a:pPr>
-            <a:r>
-              <a:rPr sz="1800" b="1">
-                <a:solidFill>
-                  <a:srgbClr val="D13A3A"/>
-                </a:solidFill>
-                <a:latin typeface="Meiryo"/>
-              </a:rPr>
-              <a:t>1  作る → 失敗</a:t>
-            </a:r>
-          </a:p>
-          <a:p>
-            <a:pPr algn="l">
-              <a:lnSpc>
-                <a:spcPct val="115000"/>
-              </a:lnSpc>
-              <a:spcAft>
-                <a:spcPts val="600"/>
-              </a:spcAft>
-            </a:pPr>
-            <a:r>
-              <a:rPr sz="500" b="0">
-                <a:solidFill>
-                  <a:srgbClr val="D13A3A"/>
-                </a:solidFill>
-                <a:latin typeface="Meiryo"/>
-              </a:rPr>
-              <a:t/>
-            </a:r>
-          </a:p>
-          <a:p>
-            <a:pPr algn="l">
-              <a:lnSpc>
-                <a:spcPct val="115000"/>
-              </a:lnSpc>
-              <a:spcAft>
-                <a:spcPts val="600"/>
-              </a:spcAft>
-            </a:pPr>
-            <a:r>
-              <a:rPr sz="1400" b="0">
-                <a:solidFill>
-                  <a:srgbClr val="1F2430"/>
-                </a:solidFill>
-                <a:latin typeface="Meiryo"/>
-              </a:rPr>
-              <a:t>日付が 2026/09/11（ルール違反）
-→ 証拠ゲートが弾く</a:t>
-            </a:r>
-          </a:p>
-        </p:txBody>
-      </p:sp>
-      <p:sp>
-        <p:nvSpPr>
-          <p:cNvPr id="10" name="Rectangle 9"/>
-          <p:cNvSpPr/>
-          <p:nvPr/>
-        </p:nvSpPr>
-        <p:spPr>
-          <a:xfrm>
-            <a:off x="4416552" y="1463040"/>
-            <a:ext cx="3611880" cy="1783080"/>
-          </a:xfrm>
-          <a:prstGeom prst="rect">
-            <a:avLst/>
-          </a:prstGeom>
-          <a:solidFill>
-            <a:srgbClr val="F3F4FB"/>
-          </a:solidFill>
-          <a:ln>
-            <a:noFill/>
-          </a:ln>
-          <a:effectLst/>
-        </p:spPr>
-        <p:style>
-          <a:lnRef idx="1">
-            <a:schemeClr val="accent1"/>
-          </a:lnRef>
-          <a:fillRef idx="3">
-            <a:schemeClr val="accent1"/>
-          </a:fillRef>
-          <a:effectRef idx="2">
-            <a:schemeClr val="accent1"/>
-          </a:effectRef>
-          <a:fontRef idx="minor">
-            <a:schemeClr val="lt1"/>
-          </a:fontRef>
-        </p:style>
-        <p:txBody>
-          <a:bodyPr rtlCol="0" anchor="ctr"/>
-          <a:lstStyle/>
-          <a:p>
-            <a:pPr algn="ctr"/>
-          </a:p>
-        </p:txBody>
-      </p:sp>
-      <p:sp>
-        <p:nvSpPr>
-          <p:cNvPr id="11" name="Rectangle 10"/>
-          <p:cNvSpPr/>
-          <p:nvPr/>
-        </p:nvSpPr>
-        <p:spPr>
-          <a:xfrm>
-            <a:off x="4416552" y="1463040"/>
-            <a:ext cx="128016" cy="1783080"/>
-          </a:xfrm>
-          <a:prstGeom prst="rect">
-            <a:avLst/>
-          </a:prstGeom>
-          <a:solidFill>
-            <a:srgbClr val="1EA05A"/>
-          </a:solidFill>
-          <a:ln>
-            <a:noFill/>
-          </a:ln>
-          <a:effectLst/>
-        </p:spPr>
-        <p:style>
-          <a:lnRef idx="1">
-            <a:schemeClr val="accent1"/>
-          </a:lnRef>
-          <a:fillRef idx="3">
-            <a:schemeClr val="accent1"/>
-          </a:fillRef>
-          <a:effectRef idx="2">
-            <a:schemeClr val="accent1"/>
-          </a:effectRef>
-          <a:fontRef idx="minor">
-            <a:schemeClr val="lt1"/>
-          </a:fontRef>
-        </p:style>
-        <p:txBody>
-          <a:bodyPr rtlCol="0" anchor="ctr"/>
-          <a:lstStyle/>
-          <a:p>
-            <a:pPr algn="ctr"/>
-          </a:p>
-        </p:txBody>
-      </p:sp>
-      <p:sp>
-        <p:nvSpPr>
-          <p:cNvPr id="12" name="TextBox 11"/>
-          <p:cNvSpPr txBox="1"/>
-          <p:nvPr/>
-        </p:nvSpPr>
-        <p:spPr>
-          <a:xfrm>
-            <a:off x="4736592" y="1645920"/>
-            <a:ext cx="3063240" cy="1463040"/>
-          </a:xfrm>
-          <a:prstGeom prst="rect">
-            <a:avLst/>
-          </a:prstGeom>
-          <a:noFill/>
-        </p:spPr>
-        <p:txBody>
-          <a:bodyPr wrap="square" anchor="t">
-            <a:spAutoFit/>
-          </a:bodyPr>
-          <a:lstStyle/>
-          <a:p>
-            <a:pPr algn="l">
-              <a:lnSpc>
-                <a:spcPct val="115000"/>
-              </a:lnSpc>
-              <a:spcAft>
-                <a:spcPts val="600"/>
-              </a:spcAft>
-            </a:pPr>
-            <a:r>
-              <a:rPr sz="1800" b="1">
-                <a:solidFill>
-                  <a:srgbClr val="1EA05A"/>
-                </a:solidFill>
-                <a:latin typeface="Meiryo"/>
-              </a:rPr>
-              <a:t>2  証拠で自動修復</a:t>
-            </a:r>
-          </a:p>
-          <a:p>
-            <a:pPr algn="l">
-              <a:lnSpc>
-                <a:spcPct val="115000"/>
-              </a:lnSpc>
-              <a:spcAft>
-                <a:spcPts val="600"/>
-              </a:spcAft>
-            </a:pPr>
-            <a:r>
-              <a:rPr sz="500" b="0">
-                <a:solidFill>
-                  <a:srgbClr val="1EA05A"/>
-                </a:solidFill>
-                <a:latin typeface="Meiryo"/>
-              </a:rPr>
-              <a:t/>
-            </a:r>
-          </a:p>
-          <a:p>
-            <a:pPr algn="l">
-              <a:lnSpc>
-                <a:spcPct val="115000"/>
-              </a:lnSpc>
-              <a:spcAft>
-                <a:spcPts val="600"/>
-              </a:spcAft>
-            </a:pPr>
-            <a:r>
-              <a:rPr sz="1400" b="0">
-                <a:solidFill>
-                  <a:srgbClr val="1F2430"/>
-                </a:solidFill>
-                <a:latin typeface="Meiryo"/>
-              </a:rPr>
-              <a:t>2026-09-11 に直す
-→ 全チェック通過</a:t>
-            </a:r>
-          </a:p>
-        </p:txBody>
-      </p:sp>
-      <p:sp>
-        <p:nvSpPr>
-          <p:cNvPr id="13" name="Rectangle 12"/>
-          <p:cNvSpPr/>
-          <p:nvPr/>
-        </p:nvSpPr>
-        <p:spPr>
-          <a:xfrm>
-            <a:off x="8284464" y="1463040"/>
-            <a:ext cx="3611880" cy="1783080"/>
-          </a:xfrm>
-          <a:prstGeom prst="rect">
-            <a:avLst/>
-          </a:prstGeom>
-          <a:solidFill>
-            <a:srgbClr val="F3F4FB"/>
-          </a:solidFill>
-          <a:ln>
-            <a:noFill/>
-          </a:ln>
-          <a:effectLst/>
-        </p:spPr>
-        <p:style>
-          <a:lnRef idx="1">
-            <a:schemeClr val="accent1"/>
-          </a:lnRef>
-          <a:fillRef idx="3">
-            <a:schemeClr val="accent1"/>
-          </a:fillRef>
-          <a:effectRef idx="2">
-            <a:schemeClr val="accent1"/>
-          </a:effectRef>
-          <a:fontRef idx="minor">
-            <a:schemeClr val="lt1"/>
-          </a:fontRef>
-        </p:style>
-        <p:txBody>
-          <a:bodyPr rtlCol="0" anchor="ctr"/>
-          <a:lstStyle/>
-          <a:p>
-            <a:pPr algn="ctr"/>
-          </a:p>
-        </p:txBody>
-      </p:sp>
-      <p:sp>
-        <p:nvSpPr>
-          <p:cNvPr id="14" name="Rectangle 13"/>
-          <p:cNvSpPr/>
-          <p:nvPr/>
-        </p:nvSpPr>
-        <p:spPr>
-          <a:xfrm>
-            <a:off x="8284464" y="1463040"/>
-            <a:ext cx="128016" cy="1783080"/>
-          </a:xfrm>
-          <a:prstGeom prst="rect">
-            <a:avLst/>
-          </a:prstGeom>
-          <a:solidFill>
-            <a:srgbClr val="0E7C9E"/>
-          </a:solidFill>
-          <a:ln>
-            <a:noFill/>
-          </a:ln>
-          <a:effectLst/>
-        </p:spPr>
-        <p:style>
-          <a:lnRef idx="1">
-            <a:schemeClr val="accent1"/>
-          </a:lnRef>
-          <a:fillRef idx="3">
-            <a:schemeClr val="accent1"/>
-          </a:fillRef>
-          <a:effectRef idx="2">
-            <a:schemeClr val="accent1"/>
-          </a:effectRef>
-          <a:fontRef idx="minor">
-            <a:schemeClr val="lt1"/>
-          </a:fontRef>
-        </p:style>
-        <p:txBody>
-          <a:bodyPr rtlCol="0" anchor="ctr"/>
-          <a:lstStyle/>
-          <a:p>
-            <a:pPr algn="ctr"/>
-          </a:p>
-        </p:txBody>
-      </p:sp>
-      <p:sp>
-        <p:nvSpPr>
-          <p:cNvPr id="15" name="TextBox 14"/>
-          <p:cNvSpPr txBox="1"/>
-          <p:nvPr/>
-        </p:nvSpPr>
-        <p:spPr>
-          <a:xfrm>
-            <a:off x="8604504" y="1645920"/>
-            <a:ext cx="3063240" cy="1463040"/>
-          </a:xfrm>
-          <a:prstGeom prst="rect">
-            <a:avLst/>
-          </a:prstGeom>
-          <a:noFill/>
-        </p:spPr>
-        <p:txBody>
-          <a:bodyPr wrap="square" anchor="t">
-            <a:spAutoFit/>
-          </a:bodyPr>
-          <a:lstStyle/>
-          <a:p>
-            <a:pPr algn="l">
-              <a:lnSpc>
-                <a:spcPct val="115000"/>
-              </a:lnSpc>
-              <a:spcAft>
-                <a:spcPts val="600"/>
-              </a:spcAft>
-            </a:pPr>
-            <a:r>
-              <a:rPr sz="1800" b="1">
-                <a:solidFill>
-                  <a:srgbClr val="0E7C9E"/>
-                </a:solidFill>
-                <a:latin typeface="Meiryo"/>
-              </a:rPr>
-              <a:t>3  承認待ちで停止</a:t>
-            </a:r>
-          </a:p>
-          <a:p>
-            <a:pPr algn="l">
-              <a:lnSpc>
-                <a:spcPct val="115000"/>
-              </a:lnSpc>
-              <a:spcAft>
-                <a:spcPts val="600"/>
-              </a:spcAft>
-            </a:pPr>
-            <a:r>
-              <a:rPr sz="500" b="0">
-                <a:solidFill>
-                  <a:srgbClr val="0E7C9E"/>
-                </a:solidFill>
-                <a:latin typeface="Meiryo"/>
-              </a:rPr>
-              <a:t/>
-            </a:r>
-          </a:p>
-          <a:p>
-            <a:pPr algn="l">
-              <a:lnSpc>
-                <a:spcPct val="115000"/>
-              </a:lnSpc>
-              <a:spcAft>
-                <a:spcPts val="600"/>
-              </a:spcAft>
-            </a:pPr>
-            <a:r>
-              <a:rPr sz="1400" b="0">
-                <a:solidFill>
-                  <a:srgbClr val="1F2430"/>
-                </a:solidFill>
-                <a:latin typeface="Meiryo"/>
-              </a:rPr>
-              <a:t>送信は人間の承認が必要
-→ ここで安全に止まる</a:t>
-            </a:r>
-          </a:p>
-        </p:txBody>
-      </p:sp>
-      <p:pic>
-        <p:nvPicPr>
-          <p:cNvPr id="16" name="Picture 15" descr="harness-demo.gif"/>
-          <p:cNvPicPr>
-            <a:picLocks noChangeAspect="1"/>
-          </p:cNvPicPr>
-          <p:nvPr/>
-        </p:nvPicPr>
-        <p:blipFill>
-          <a:blip r:embed="rId2"/>
-          <a:stretch>
-            <a:fillRect/>
-          </a:stretch>
-        </p:blipFill>
-        <p:spPr>
-          <a:xfrm>
-            <a:off x="1234440" y="3520440"/>
-            <a:ext cx="9692640" cy="3939879"/>
-          </a:xfrm>
-          <a:prstGeom prst="rect">
-            <a:avLst/>
-          </a:prstGeom>
-        </p:spPr>
-      </p:pic>
-      <p:sp>
-        <p:nvSpPr>
-          <p:cNvPr id="17" name="TextBox 16"/>
-          <p:cNvSpPr txBox="1"/>
-          <p:nvPr/>
-        </p:nvSpPr>
-        <p:spPr>
-          <a:xfrm>
-            <a:off x="548640" y="6419088"/>
-            <a:ext cx="10972800" cy="365760"/>
-          </a:xfrm>
-          <a:prstGeom prst="rect">
-            <a:avLst/>
-          </a:prstGeom>
-          <a:noFill/>
-        </p:spPr>
-        <p:txBody>
-          <a:bodyPr wrap="square" anchor="t">
+          <a:bodyPr wrap="square" anchor="ctr">
             <a:spAutoFit/>
           </a:bodyPr>
           <a:lstStyle/>
@@ -7218,13 +5766,1769 @@
               </a:spcAft>
             </a:pPr>
             <a:r>
-              <a:rPr sz="1100" b="0">
+              <a:rPr sz="1600" b="1">
+                <a:solidFill>
+                  <a:srgbClr val="FFFFFF"/>
+                </a:solidFill>
+                <a:latin typeface="Meiryo"/>
+              </a:rPr>
+              <a:t>層</a:t>
+            </a:r>
+          </a:p>
+        </p:txBody>
+      </p:sp>
+      <p:sp>
+        <p:nvSpPr>
+          <p:cNvPr id="9" name="Rectangle 8"/>
+          <p:cNvSpPr/>
+          <p:nvPr/>
+        </p:nvSpPr>
+        <p:spPr>
+          <a:xfrm>
+            <a:off x="2651760" y="1417320"/>
+            <a:ext cx="5120640" cy="713232"/>
+          </a:xfrm>
+          <a:prstGeom prst="rect">
+            <a:avLst/>
+          </a:prstGeom>
+          <a:solidFill>
+            <a:srgbClr val="4C3AE3"/>
+          </a:solidFill>
+          <a:ln>
+            <a:noFill/>
+          </a:ln>
+          <a:effectLst/>
+        </p:spPr>
+        <p:style>
+          <a:lnRef idx="1">
+            <a:schemeClr val="accent1"/>
+          </a:lnRef>
+          <a:fillRef idx="3">
+            <a:schemeClr val="accent1"/>
+          </a:fillRef>
+          <a:effectRef idx="2">
+            <a:schemeClr val="accent1"/>
+          </a:effectRef>
+          <a:fontRef idx="minor">
+            <a:schemeClr val="lt1"/>
+          </a:fontRef>
+        </p:style>
+        <p:txBody>
+          <a:bodyPr rtlCol="0" anchor="ctr"/>
+          <a:lstStyle/>
+          <a:p>
+            <a:pPr algn="ctr"/>
+          </a:p>
+        </p:txBody>
+      </p:sp>
+      <p:sp>
+        <p:nvSpPr>
+          <p:cNvPr id="10" name="TextBox 9"/>
+          <p:cNvSpPr txBox="1"/>
+          <p:nvPr/>
+        </p:nvSpPr>
+        <p:spPr>
+          <a:xfrm>
+            <a:off x="2761488" y="1417320"/>
+            <a:ext cx="4901184" cy="713232"/>
+          </a:xfrm>
+          <a:prstGeom prst="rect">
+            <a:avLst/>
+          </a:prstGeom>
+          <a:noFill/>
+        </p:spPr>
+        <p:txBody>
+          <a:bodyPr wrap="square" anchor="ctr">
+            <a:spAutoFit/>
+          </a:bodyPr>
+          <a:lstStyle/>
+          <a:p>
+            <a:pPr algn="l">
+              <a:lnSpc>
+                <a:spcPct val="108000"/>
+              </a:lnSpc>
+              <a:spcAft>
+                <a:spcPts val="600"/>
+              </a:spcAft>
+            </a:pPr>
+            <a:r>
+              <a:rPr sz="1600" b="1">
+                <a:solidFill>
+                  <a:srgbClr val="FFFFFF"/>
+                </a:solidFill>
+                <a:latin typeface="Meiryo"/>
+              </a:rPr>
+              <a:t>役割</a:t>
+            </a:r>
+          </a:p>
+        </p:txBody>
+      </p:sp>
+      <p:sp>
+        <p:nvSpPr>
+          <p:cNvPr id="11" name="Rectangle 10"/>
+          <p:cNvSpPr/>
+          <p:nvPr/>
+        </p:nvSpPr>
+        <p:spPr>
+          <a:xfrm>
+            <a:off x="7772400" y="1417320"/>
+            <a:ext cx="3840480" cy="713232"/>
+          </a:xfrm>
+          <a:prstGeom prst="rect">
+            <a:avLst/>
+          </a:prstGeom>
+          <a:solidFill>
+            <a:srgbClr val="4C3AE3"/>
+          </a:solidFill>
+          <a:ln>
+            <a:noFill/>
+          </a:ln>
+          <a:effectLst/>
+        </p:spPr>
+        <p:style>
+          <a:lnRef idx="1">
+            <a:schemeClr val="accent1"/>
+          </a:lnRef>
+          <a:fillRef idx="3">
+            <a:schemeClr val="accent1"/>
+          </a:fillRef>
+          <a:effectRef idx="2">
+            <a:schemeClr val="accent1"/>
+          </a:effectRef>
+          <a:fontRef idx="minor">
+            <a:schemeClr val="lt1"/>
+          </a:fontRef>
+        </p:style>
+        <p:txBody>
+          <a:bodyPr rtlCol="0" anchor="ctr"/>
+          <a:lstStyle/>
+          <a:p>
+            <a:pPr algn="ctr"/>
+          </a:p>
+        </p:txBody>
+      </p:sp>
+      <p:sp>
+        <p:nvSpPr>
+          <p:cNvPr id="12" name="TextBox 11"/>
+          <p:cNvSpPr txBox="1"/>
+          <p:nvPr/>
+        </p:nvSpPr>
+        <p:spPr>
+          <a:xfrm>
+            <a:off x="7882128" y="1417320"/>
+            <a:ext cx="3621024" cy="713232"/>
+          </a:xfrm>
+          <a:prstGeom prst="rect">
+            <a:avLst/>
+          </a:prstGeom>
+          <a:noFill/>
+        </p:spPr>
+        <p:txBody>
+          <a:bodyPr wrap="square" anchor="ctr">
+            <a:spAutoFit/>
+          </a:bodyPr>
+          <a:lstStyle/>
+          <a:p>
+            <a:pPr algn="l">
+              <a:lnSpc>
+                <a:spcPct val="108000"/>
+              </a:lnSpc>
+              <a:spcAft>
+                <a:spcPts val="600"/>
+              </a:spcAft>
+            </a:pPr>
+            <a:r>
+              <a:rPr sz="1600" b="1">
+                <a:solidFill>
+                  <a:srgbClr val="FFFFFF"/>
+                </a:solidFill>
+                <a:latin typeface="Meiryo"/>
+              </a:rPr>
+              <a:t>対応ファイル</a:t>
+            </a:r>
+          </a:p>
+        </p:txBody>
+      </p:sp>
+      <p:sp>
+        <p:nvSpPr>
+          <p:cNvPr id="13" name="Rectangle 12"/>
+          <p:cNvSpPr/>
+          <p:nvPr/>
+        </p:nvSpPr>
+        <p:spPr>
+          <a:xfrm>
+            <a:off x="548640" y="2130552"/>
+            <a:ext cx="2103120" cy="713232"/>
+          </a:xfrm>
+          <a:prstGeom prst="rect">
+            <a:avLst/>
+          </a:prstGeom>
+          <a:solidFill>
+            <a:srgbClr val="F3F4FB"/>
+          </a:solidFill>
+          <a:ln w="12700">
+            <a:solidFill>
+              <a:srgbClr val="E3E5F0"/>
+            </a:solidFill>
+          </a:ln>
+          <a:effectLst/>
+        </p:spPr>
+        <p:style>
+          <a:lnRef idx="1">
+            <a:schemeClr val="accent1"/>
+          </a:lnRef>
+          <a:fillRef idx="3">
+            <a:schemeClr val="accent1"/>
+          </a:fillRef>
+          <a:effectRef idx="2">
+            <a:schemeClr val="accent1"/>
+          </a:effectRef>
+          <a:fontRef idx="minor">
+            <a:schemeClr val="lt1"/>
+          </a:fontRef>
+        </p:style>
+        <p:txBody>
+          <a:bodyPr rtlCol="0" anchor="ctr"/>
+          <a:lstStyle/>
+          <a:p>
+            <a:pPr algn="ctr"/>
+          </a:p>
+        </p:txBody>
+      </p:sp>
+      <p:sp>
+        <p:nvSpPr>
+          <p:cNvPr id="14" name="TextBox 13"/>
+          <p:cNvSpPr txBox="1"/>
+          <p:nvPr/>
+        </p:nvSpPr>
+        <p:spPr>
+          <a:xfrm>
+            <a:off x="658368" y="2130552"/>
+            <a:ext cx="1883664" cy="713232"/>
+          </a:xfrm>
+          <a:prstGeom prst="rect">
+            <a:avLst/>
+          </a:prstGeom>
+          <a:noFill/>
+        </p:spPr>
+        <p:txBody>
+          <a:bodyPr wrap="square" anchor="ctr">
+            <a:spAutoFit/>
+          </a:bodyPr>
+          <a:lstStyle/>
+          <a:p>
+            <a:pPr algn="l">
+              <a:lnSpc>
+                <a:spcPct val="108000"/>
+              </a:lnSpc>
+              <a:spcAft>
+                <a:spcPts val="0"/>
+              </a:spcAft>
+            </a:pPr>
+            <a:r>
+              <a:rPr sz="1500" b="1">
+                <a:solidFill>
+                  <a:srgbClr val="4C3AE3"/>
+                </a:solidFill>
+                <a:latin typeface="Meiryo"/>
+              </a:rPr>
+              <a:t>1 契約</a:t>
+            </a:r>
+          </a:p>
+        </p:txBody>
+      </p:sp>
+      <p:sp>
+        <p:nvSpPr>
+          <p:cNvPr id="15" name="Rectangle 14"/>
+          <p:cNvSpPr/>
+          <p:nvPr/>
+        </p:nvSpPr>
+        <p:spPr>
+          <a:xfrm>
+            <a:off x="2651760" y="2130552"/>
+            <a:ext cx="5120640" cy="713232"/>
+          </a:xfrm>
+          <a:prstGeom prst="rect">
+            <a:avLst/>
+          </a:prstGeom>
+          <a:solidFill>
+            <a:srgbClr val="F3F4FB"/>
+          </a:solidFill>
+          <a:ln w="12700">
+            <a:solidFill>
+              <a:srgbClr val="E3E5F0"/>
+            </a:solidFill>
+          </a:ln>
+          <a:effectLst/>
+        </p:spPr>
+        <p:style>
+          <a:lnRef idx="1">
+            <a:schemeClr val="accent1"/>
+          </a:lnRef>
+          <a:fillRef idx="3">
+            <a:schemeClr val="accent1"/>
+          </a:fillRef>
+          <a:effectRef idx="2">
+            <a:schemeClr val="accent1"/>
+          </a:effectRef>
+          <a:fontRef idx="minor">
+            <a:schemeClr val="lt1"/>
+          </a:fontRef>
+        </p:style>
+        <p:txBody>
+          <a:bodyPr rtlCol="0" anchor="ctr"/>
+          <a:lstStyle/>
+          <a:p>
+            <a:pPr algn="ctr"/>
+          </a:p>
+        </p:txBody>
+      </p:sp>
+      <p:sp>
+        <p:nvSpPr>
+          <p:cNvPr id="16" name="TextBox 15"/>
+          <p:cNvSpPr txBox="1"/>
+          <p:nvPr/>
+        </p:nvSpPr>
+        <p:spPr>
+          <a:xfrm>
+            <a:off x="2761488" y="2130552"/>
+            <a:ext cx="4901184" cy="713232"/>
+          </a:xfrm>
+          <a:prstGeom prst="rect">
+            <a:avLst/>
+          </a:prstGeom>
+          <a:noFill/>
+        </p:spPr>
+        <p:txBody>
+          <a:bodyPr wrap="square" anchor="ctr">
+            <a:spAutoFit/>
+          </a:bodyPr>
+          <a:lstStyle/>
+          <a:p>
+            <a:pPr algn="l">
+              <a:lnSpc>
+                <a:spcPct val="108000"/>
+              </a:lnSpc>
+              <a:spcAft>
+                <a:spcPts val="0"/>
+              </a:spcAft>
+            </a:pPr>
+            <a:r>
+              <a:rPr sz="1500" b="0">
+                <a:solidFill>
+                  <a:srgbClr val="1F2430"/>
+                </a:solidFill>
+                <a:latin typeface="Meiryo"/>
+              </a:rPr>
+              <a:t>クエストを機械可読な契約に変換</a:t>
+            </a:r>
+          </a:p>
+        </p:txBody>
+      </p:sp>
+      <p:sp>
+        <p:nvSpPr>
+          <p:cNvPr id="17" name="Rectangle 16"/>
+          <p:cNvSpPr/>
+          <p:nvPr/>
+        </p:nvSpPr>
+        <p:spPr>
+          <a:xfrm>
+            <a:off x="7772400" y="2130552"/>
+            <a:ext cx="3840480" cy="713232"/>
+          </a:xfrm>
+          <a:prstGeom prst="rect">
+            <a:avLst/>
+          </a:prstGeom>
+          <a:solidFill>
+            <a:srgbClr val="F3F4FB"/>
+          </a:solidFill>
+          <a:ln w="12700">
+            <a:solidFill>
+              <a:srgbClr val="E3E5F0"/>
+            </a:solidFill>
+          </a:ln>
+          <a:effectLst/>
+        </p:spPr>
+        <p:style>
+          <a:lnRef idx="1">
+            <a:schemeClr val="accent1"/>
+          </a:lnRef>
+          <a:fillRef idx="3">
+            <a:schemeClr val="accent1"/>
+          </a:fillRef>
+          <a:effectRef idx="2">
+            <a:schemeClr val="accent1"/>
+          </a:effectRef>
+          <a:fontRef idx="minor">
+            <a:schemeClr val="lt1"/>
+          </a:fontRef>
+        </p:style>
+        <p:txBody>
+          <a:bodyPr rtlCol="0" anchor="ctr"/>
+          <a:lstStyle/>
+          <a:p>
+            <a:pPr algn="ctr"/>
+          </a:p>
+        </p:txBody>
+      </p:sp>
+      <p:sp>
+        <p:nvSpPr>
+          <p:cNvPr id="18" name="TextBox 17"/>
+          <p:cNvSpPr txBox="1"/>
+          <p:nvPr/>
+        </p:nvSpPr>
+        <p:spPr>
+          <a:xfrm>
+            <a:off x="7882128" y="2130552"/>
+            <a:ext cx="3621024" cy="713232"/>
+          </a:xfrm>
+          <a:prstGeom prst="rect">
+            <a:avLst/>
+          </a:prstGeom>
+          <a:noFill/>
+        </p:spPr>
+        <p:txBody>
+          <a:bodyPr wrap="square" anchor="ctr">
+            <a:spAutoFit/>
+          </a:bodyPr>
+          <a:lstStyle/>
+          <a:p>
+            <a:pPr algn="l">
+              <a:lnSpc>
+                <a:spcPct val="108000"/>
+              </a:lnSpc>
+              <a:spcAft>
+                <a:spcPts val="0"/>
+              </a:spcAft>
+            </a:pPr>
+            <a:r>
+              <a:rPr sz="1500" b="0">
                 <a:solidFill>
                   <a:srgbClr val="5B6372"/>
                 </a:solidFill>
                 <a:latin typeface="Meiryo"/>
               </a:rPr>
-              <a:t>↑ スライドショーで再生すると実際の端末出力がアニメーションします</a:t>
+              <a:t>contracts/feature_042.json</a:t>
+            </a:r>
+          </a:p>
+        </p:txBody>
+      </p:sp>
+      <p:sp>
+        <p:nvSpPr>
+          <p:cNvPr id="19" name="Rectangle 18"/>
+          <p:cNvSpPr/>
+          <p:nvPr/>
+        </p:nvSpPr>
+        <p:spPr>
+          <a:xfrm>
+            <a:off x="548640" y="2843784"/>
+            <a:ext cx="2103120" cy="713232"/>
+          </a:xfrm>
+          <a:prstGeom prst="rect">
+            <a:avLst/>
+          </a:prstGeom>
+          <a:solidFill>
+            <a:srgbClr val="FFFFFF"/>
+          </a:solidFill>
+          <a:ln w="12700">
+            <a:solidFill>
+              <a:srgbClr val="E3E5F0"/>
+            </a:solidFill>
+          </a:ln>
+          <a:effectLst/>
+        </p:spPr>
+        <p:style>
+          <a:lnRef idx="1">
+            <a:schemeClr val="accent1"/>
+          </a:lnRef>
+          <a:fillRef idx="3">
+            <a:schemeClr val="accent1"/>
+          </a:fillRef>
+          <a:effectRef idx="2">
+            <a:schemeClr val="accent1"/>
+          </a:effectRef>
+          <a:fontRef idx="minor">
+            <a:schemeClr val="lt1"/>
+          </a:fontRef>
+        </p:style>
+        <p:txBody>
+          <a:bodyPr rtlCol="0" anchor="ctr"/>
+          <a:lstStyle/>
+          <a:p>
+            <a:pPr algn="ctr"/>
+          </a:p>
+        </p:txBody>
+      </p:sp>
+      <p:sp>
+        <p:nvSpPr>
+          <p:cNvPr id="20" name="TextBox 19"/>
+          <p:cNvSpPr txBox="1"/>
+          <p:nvPr/>
+        </p:nvSpPr>
+        <p:spPr>
+          <a:xfrm>
+            <a:off x="658368" y="2843784"/>
+            <a:ext cx="1883664" cy="713232"/>
+          </a:xfrm>
+          <a:prstGeom prst="rect">
+            <a:avLst/>
+          </a:prstGeom>
+          <a:noFill/>
+        </p:spPr>
+        <p:txBody>
+          <a:bodyPr wrap="square" anchor="ctr">
+            <a:spAutoFit/>
+          </a:bodyPr>
+          <a:lstStyle/>
+          <a:p>
+            <a:pPr algn="l">
+              <a:lnSpc>
+                <a:spcPct val="108000"/>
+              </a:lnSpc>
+              <a:spcAft>
+                <a:spcPts val="0"/>
+              </a:spcAft>
+            </a:pPr>
+            <a:r>
+              <a:rPr sz="1500" b="1">
+                <a:solidFill>
+                  <a:srgbClr val="4C3AE3"/>
+                </a:solidFill>
+                <a:latin typeface="Meiryo"/>
+              </a:rPr>
+              <a:t>2 コンテキスト</a:t>
+            </a:r>
+          </a:p>
+        </p:txBody>
+      </p:sp>
+      <p:sp>
+        <p:nvSpPr>
+          <p:cNvPr id="21" name="Rectangle 20"/>
+          <p:cNvSpPr/>
+          <p:nvPr/>
+        </p:nvSpPr>
+        <p:spPr>
+          <a:xfrm>
+            <a:off x="2651760" y="2843784"/>
+            <a:ext cx="5120640" cy="713232"/>
+          </a:xfrm>
+          <a:prstGeom prst="rect">
+            <a:avLst/>
+          </a:prstGeom>
+          <a:solidFill>
+            <a:srgbClr val="FFFFFF"/>
+          </a:solidFill>
+          <a:ln w="12700">
+            <a:solidFill>
+              <a:srgbClr val="E3E5F0"/>
+            </a:solidFill>
+          </a:ln>
+          <a:effectLst/>
+        </p:spPr>
+        <p:style>
+          <a:lnRef idx="1">
+            <a:schemeClr val="accent1"/>
+          </a:lnRef>
+          <a:fillRef idx="3">
+            <a:schemeClr val="accent1"/>
+          </a:fillRef>
+          <a:effectRef idx="2">
+            <a:schemeClr val="accent1"/>
+          </a:effectRef>
+          <a:fontRef idx="minor">
+            <a:schemeClr val="lt1"/>
+          </a:fontRef>
+        </p:style>
+        <p:txBody>
+          <a:bodyPr rtlCol="0" anchor="ctr"/>
+          <a:lstStyle/>
+          <a:p>
+            <a:pPr algn="ctr"/>
+          </a:p>
+        </p:txBody>
+      </p:sp>
+      <p:sp>
+        <p:nvSpPr>
+          <p:cNvPr id="22" name="TextBox 21"/>
+          <p:cNvSpPr txBox="1"/>
+          <p:nvPr/>
+        </p:nvSpPr>
+        <p:spPr>
+          <a:xfrm>
+            <a:off x="2761488" y="2843784"/>
+            <a:ext cx="4901184" cy="713232"/>
+          </a:xfrm>
+          <a:prstGeom prst="rect">
+            <a:avLst/>
+          </a:prstGeom>
+          <a:noFill/>
+        </p:spPr>
+        <p:txBody>
+          <a:bodyPr wrap="square" anchor="ctr">
+            <a:spAutoFit/>
+          </a:bodyPr>
+          <a:lstStyle/>
+          <a:p>
+            <a:pPr algn="l">
+              <a:lnSpc>
+                <a:spcPct val="108000"/>
+              </a:lnSpc>
+              <a:spcAft>
+                <a:spcPts val="0"/>
+              </a:spcAft>
+            </a:pPr>
+            <a:r>
+              <a:rPr sz="1500" b="0">
+                <a:solidFill>
+                  <a:srgbClr val="1F2430"/>
+                </a:solidFill>
+                <a:latin typeface="Meiryo"/>
+              </a:rPr>
+              <a:t>高信号な情報だけを組み立てる</a:t>
+            </a:r>
+          </a:p>
+        </p:txBody>
+      </p:sp>
+      <p:sp>
+        <p:nvSpPr>
+          <p:cNvPr id="23" name="Rectangle 22"/>
+          <p:cNvSpPr/>
+          <p:nvPr/>
+        </p:nvSpPr>
+        <p:spPr>
+          <a:xfrm>
+            <a:off x="7772400" y="2843784"/>
+            <a:ext cx="3840480" cy="713232"/>
+          </a:xfrm>
+          <a:prstGeom prst="rect">
+            <a:avLst/>
+          </a:prstGeom>
+          <a:solidFill>
+            <a:srgbClr val="FFFFFF"/>
+          </a:solidFill>
+          <a:ln w="12700">
+            <a:solidFill>
+              <a:srgbClr val="E3E5F0"/>
+            </a:solidFill>
+          </a:ln>
+          <a:effectLst/>
+        </p:spPr>
+        <p:style>
+          <a:lnRef idx="1">
+            <a:schemeClr val="accent1"/>
+          </a:lnRef>
+          <a:fillRef idx="3">
+            <a:schemeClr val="accent1"/>
+          </a:fillRef>
+          <a:effectRef idx="2">
+            <a:schemeClr val="accent1"/>
+          </a:effectRef>
+          <a:fontRef idx="minor">
+            <a:schemeClr val="lt1"/>
+          </a:fontRef>
+        </p:style>
+        <p:txBody>
+          <a:bodyPr rtlCol="0" anchor="ctr"/>
+          <a:lstStyle/>
+          <a:p>
+            <a:pPr algn="ctr"/>
+          </a:p>
+        </p:txBody>
+      </p:sp>
+      <p:sp>
+        <p:nvSpPr>
+          <p:cNvPr id="24" name="TextBox 23"/>
+          <p:cNvSpPr txBox="1"/>
+          <p:nvPr/>
+        </p:nvSpPr>
+        <p:spPr>
+          <a:xfrm>
+            <a:off x="7882128" y="2843784"/>
+            <a:ext cx="3621024" cy="713232"/>
+          </a:xfrm>
+          <a:prstGeom prst="rect">
+            <a:avLst/>
+          </a:prstGeom>
+          <a:noFill/>
+        </p:spPr>
+        <p:txBody>
+          <a:bodyPr wrap="square" anchor="ctr">
+            <a:spAutoFit/>
+          </a:bodyPr>
+          <a:lstStyle/>
+          <a:p>
+            <a:pPr algn="l">
+              <a:lnSpc>
+                <a:spcPct val="108000"/>
+              </a:lnSpc>
+              <a:spcAft>
+                <a:spcPts val="0"/>
+              </a:spcAft>
+            </a:pPr>
+            <a:r>
+              <a:rPr sz="1500" b="0">
+                <a:solidFill>
+                  <a:srgbClr val="5B6372"/>
+                </a:solidFill>
+                <a:latin typeface="Meiryo"/>
+              </a:rPr>
+              <a:t>src/context.mjs</a:t>
+            </a:r>
+          </a:p>
+        </p:txBody>
+      </p:sp>
+      <p:sp>
+        <p:nvSpPr>
+          <p:cNvPr id="25" name="Rectangle 24"/>
+          <p:cNvSpPr/>
+          <p:nvPr/>
+        </p:nvSpPr>
+        <p:spPr>
+          <a:xfrm>
+            <a:off x="548640" y="3557016"/>
+            <a:ext cx="2103120" cy="713232"/>
+          </a:xfrm>
+          <a:prstGeom prst="rect">
+            <a:avLst/>
+          </a:prstGeom>
+          <a:solidFill>
+            <a:srgbClr val="F3F4FB"/>
+          </a:solidFill>
+          <a:ln w="12700">
+            <a:solidFill>
+              <a:srgbClr val="E3E5F0"/>
+            </a:solidFill>
+          </a:ln>
+          <a:effectLst/>
+        </p:spPr>
+        <p:style>
+          <a:lnRef idx="1">
+            <a:schemeClr val="accent1"/>
+          </a:lnRef>
+          <a:fillRef idx="3">
+            <a:schemeClr val="accent1"/>
+          </a:fillRef>
+          <a:effectRef idx="2">
+            <a:schemeClr val="accent1"/>
+          </a:effectRef>
+          <a:fontRef idx="minor">
+            <a:schemeClr val="lt1"/>
+          </a:fontRef>
+        </p:style>
+        <p:txBody>
+          <a:bodyPr rtlCol="0" anchor="ctr"/>
+          <a:lstStyle/>
+          <a:p>
+            <a:pPr algn="ctr"/>
+          </a:p>
+        </p:txBody>
+      </p:sp>
+      <p:sp>
+        <p:nvSpPr>
+          <p:cNvPr id="26" name="TextBox 25"/>
+          <p:cNvSpPr txBox="1"/>
+          <p:nvPr/>
+        </p:nvSpPr>
+        <p:spPr>
+          <a:xfrm>
+            <a:off x="658368" y="3557016"/>
+            <a:ext cx="1883664" cy="713232"/>
+          </a:xfrm>
+          <a:prstGeom prst="rect">
+            <a:avLst/>
+          </a:prstGeom>
+          <a:noFill/>
+        </p:spPr>
+        <p:txBody>
+          <a:bodyPr wrap="square" anchor="ctr">
+            <a:spAutoFit/>
+          </a:bodyPr>
+          <a:lstStyle/>
+          <a:p>
+            <a:pPr algn="l">
+              <a:lnSpc>
+                <a:spcPct val="108000"/>
+              </a:lnSpc>
+              <a:spcAft>
+                <a:spcPts val="0"/>
+              </a:spcAft>
+            </a:pPr>
+            <a:r>
+              <a:rPr sz="1500" b="1">
+                <a:solidFill>
+                  <a:srgbClr val="4C3AE3"/>
+                </a:solidFill>
+                <a:latin typeface="Meiryo"/>
+              </a:rPr>
+              <a:t>3 ゲートウェイ</a:t>
+            </a:r>
+          </a:p>
+        </p:txBody>
+      </p:sp>
+      <p:sp>
+        <p:nvSpPr>
+          <p:cNvPr id="27" name="Rectangle 26"/>
+          <p:cNvSpPr/>
+          <p:nvPr/>
+        </p:nvSpPr>
+        <p:spPr>
+          <a:xfrm>
+            <a:off x="2651760" y="3557016"/>
+            <a:ext cx="5120640" cy="713232"/>
+          </a:xfrm>
+          <a:prstGeom prst="rect">
+            <a:avLst/>
+          </a:prstGeom>
+          <a:solidFill>
+            <a:srgbClr val="F3F4FB"/>
+          </a:solidFill>
+          <a:ln w="12700">
+            <a:solidFill>
+              <a:srgbClr val="E3E5F0"/>
+            </a:solidFill>
+          </a:ln>
+          <a:effectLst/>
+        </p:spPr>
+        <p:style>
+          <a:lnRef idx="1">
+            <a:schemeClr val="accent1"/>
+          </a:lnRef>
+          <a:fillRef idx="3">
+            <a:schemeClr val="accent1"/>
+          </a:fillRef>
+          <a:effectRef idx="2">
+            <a:schemeClr val="accent1"/>
+          </a:effectRef>
+          <a:fontRef idx="minor">
+            <a:schemeClr val="lt1"/>
+          </a:fontRef>
+        </p:style>
+        <p:txBody>
+          <a:bodyPr rtlCol="0" anchor="ctr"/>
+          <a:lstStyle/>
+          <a:p>
+            <a:pPr algn="ctr"/>
+          </a:p>
+        </p:txBody>
+      </p:sp>
+      <p:sp>
+        <p:nvSpPr>
+          <p:cNvPr id="28" name="TextBox 27"/>
+          <p:cNvSpPr txBox="1"/>
+          <p:nvPr/>
+        </p:nvSpPr>
+        <p:spPr>
+          <a:xfrm>
+            <a:off x="2761488" y="3557016"/>
+            <a:ext cx="4901184" cy="713232"/>
+          </a:xfrm>
+          <a:prstGeom prst="rect">
+            <a:avLst/>
+          </a:prstGeom>
+          <a:noFill/>
+        </p:spPr>
+        <p:txBody>
+          <a:bodyPr wrap="square" anchor="ctr">
+            <a:spAutoFit/>
+          </a:bodyPr>
+          <a:lstStyle/>
+          <a:p>
+            <a:pPr algn="l">
+              <a:lnSpc>
+                <a:spcPct val="108000"/>
+              </a:lnSpc>
+              <a:spcAft>
+                <a:spcPts val="0"/>
+              </a:spcAft>
+            </a:pPr>
+            <a:r>
+              <a:rPr sz="1500" b="0">
+                <a:solidFill>
+                  <a:srgbClr val="1F2430"/>
+                </a:solidFill>
+                <a:latin typeface="Meiryo"/>
+              </a:rPr>
+              <a:t>提案・許可・実行を分離する</a:t>
+            </a:r>
+          </a:p>
+        </p:txBody>
+      </p:sp>
+      <p:sp>
+        <p:nvSpPr>
+          <p:cNvPr id="29" name="Rectangle 28"/>
+          <p:cNvSpPr/>
+          <p:nvPr/>
+        </p:nvSpPr>
+        <p:spPr>
+          <a:xfrm>
+            <a:off x="7772400" y="3557016"/>
+            <a:ext cx="3840480" cy="713232"/>
+          </a:xfrm>
+          <a:prstGeom prst="rect">
+            <a:avLst/>
+          </a:prstGeom>
+          <a:solidFill>
+            <a:srgbClr val="F3F4FB"/>
+          </a:solidFill>
+          <a:ln w="12700">
+            <a:solidFill>
+              <a:srgbClr val="E3E5F0"/>
+            </a:solidFill>
+          </a:ln>
+          <a:effectLst/>
+        </p:spPr>
+        <p:style>
+          <a:lnRef idx="1">
+            <a:schemeClr val="accent1"/>
+          </a:lnRef>
+          <a:fillRef idx="3">
+            <a:schemeClr val="accent1"/>
+          </a:fillRef>
+          <a:effectRef idx="2">
+            <a:schemeClr val="accent1"/>
+          </a:effectRef>
+          <a:fontRef idx="minor">
+            <a:schemeClr val="lt1"/>
+          </a:fontRef>
+        </p:style>
+        <p:txBody>
+          <a:bodyPr rtlCol="0" anchor="ctr"/>
+          <a:lstStyle/>
+          <a:p>
+            <a:pPr algn="ctr"/>
+          </a:p>
+        </p:txBody>
+      </p:sp>
+      <p:sp>
+        <p:nvSpPr>
+          <p:cNvPr id="30" name="TextBox 29"/>
+          <p:cNvSpPr txBox="1"/>
+          <p:nvPr/>
+        </p:nvSpPr>
+        <p:spPr>
+          <a:xfrm>
+            <a:off x="7882128" y="3557016"/>
+            <a:ext cx="3621024" cy="713232"/>
+          </a:xfrm>
+          <a:prstGeom prst="rect">
+            <a:avLst/>
+          </a:prstGeom>
+          <a:noFill/>
+        </p:spPr>
+        <p:txBody>
+          <a:bodyPr wrap="square" anchor="ctr">
+            <a:spAutoFit/>
+          </a:bodyPr>
+          <a:lstStyle/>
+          <a:p>
+            <a:pPr algn="l">
+              <a:lnSpc>
+                <a:spcPct val="108000"/>
+              </a:lnSpc>
+              <a:spcAft>
+                <a:spcPts val="0"/>
+              </a:spcAft>
+            </a:pPr>
+            <a:r>
+              <a:rPr sz="1500" b="0">
+                <a:solidFill>
+                  <a:srgbClr val="5B6372"/>
+                </a:solidFill>
+                <a:latin typeface="Meiryo"/>
+              </a:rPr>
+              <a:t>src/gateway.mjs / permissions.json</a:t>
+            </a:r>
+          </a:p>
+        </p:txBody>
+      </p:sp>
+      <p:sp>
+        <p:nvSpPr>
+          <p:cNvPr id="31" name="Rectangle 30"/>
+          <p:cNvSpPr/>
+          <p:nvPr/>
+        </p:nvSpPr>
+        <p:spPr>
+          <a:xfrm>
+            <a:off x="548640" y="4270248"/>
+            <a:ext cx="2103120" cy="713232"/>
+          </a:xfrm>
+          <a:prstGeom prst="rect">
+            <a:avLst/>
+          </a:prstGeom>
+          <a:solidFill>
+            <a:srgbClr val="FFFFFF"/>
+          </a:solidFill>
+          <a:ln w="12700">
+            <a:solidFill>
+              <a:srgbClr val="E3E5F0"/>
+            </a:solidFill>
+          </a:ln>
+          <a:effectLst/>
+        </p:spPr>
+        <p:style>
+          <a:lnRef idx="1">
+            <a:schemeClr val="accent1"/>
+          </a:lnRef>
+          <a:fillRef idx="3">
+            <a:schemeClr val="accent1"/>
+          </a:fillRef>
+          <a:effectRef idx="2">
+            <a:schemeClr val="accent1"/>
+          </a:effectRef>
+          <a:fontRef idx="minor">
+            <a:schemeClr val="lt1"/>
+          </a:fontRef>
+        </p:style>
+        <p:txBody>
+          <a:bodyPr rtlCol="0" anchor="ctr"/>
+          <a:lstStyle/>
+          <a:p>
+            <a:pPr algn="ctr"/>
+          </a:p>
+        </p:txBody>
+      </p:sp>
+      <p:sp>
+        <p:nvSpPr>
+          <p:cNvPr id="32" name="TextBox 31"/>
+          <p:cNvSpPr txBox="1"/>
+          <p:nvPr/>
+        </p:nvSpPr>
+        <p:spPr>
+          <a:xfrm>
+            <a:off x="658368" y="4270248"/>
+            <a:ext cx="1883664" cy="713232"/>
+          </a:xfrm>
+          <a:prstGeom prst="rect">
+            <a:avLst/>
+          </a:prstGeom>
+          <a:noFill/>
+        </p:spPr>
+        <p:txBody>
+          <a:bodyPr wrap="square" anchor="ctr">
+            <a:spAutoFit/>
+          </a:bodyPr>
+          <a:lstStyle/>
+          <a:p>
+            <a:pPr algn="l">
+              <a:lnSpc>
+                <a:spcPct val="108000"/>
+              </a:lnSpc>
+              <a:spcAft>
+                <a:spcPts val="0"/>
+              </a:spcAft>
+            </a:pPr>
+            <a:r>
+              <a:rPr sz="1500" b="1">
+                <a:solidFill>
+                  <a:srgbClr val="4C3AE3"/>
+                </a:solidFill>
+                <a:latin typeface="Meiryo"/>
+              </a:rPr>
+              <a:t>4 状態・記憶</a:t>
+            </a:r>
+          </a:p>
+        </p:txBody>
+      </p:sp>
+      <p:sp>
+        <p:nvSpPr>
+          <p:cNvPr id="33" name="Rectangle 32"/>
+          <p:cNvSpPr/>
+          <p:nvPr/>
+        </p:nvSpPr>
+        <p:spPr>
+          <a:xfrm>
+            <a:off x="2651760" y="4270248"/>
+            <a:ext cx="5120640" cy="713232"/>
+          </a:xfrm>
+          <a:prstGeom prst="rect">
+            <a:avLst/>
+          </a:prstGeom>
+          <a:solidFill>
+            <a:srgbClr val="FFFFFF"/>
+          </a:solidFill>
+          <a:ln w="12700">
+            <a:solidFill>
+              <a:srgbClr val="E3E5F0"/>
+            </a:solidFill>
+          </a:ln>
+          <a:effectLst/>
+        </p:spPr>
+        <p:style>
+          <a:lnRef idx="1">
+            <a:schemeClr val="accent1"/>
+          </a:lnRef>
+          <a:fillRef idx="3">
+            <a:schemeClr val="accent1"/>
+          </a:fillRef>
+          <a:effectRef idx="2">
+            <a:schemeClr val="accent1"/>
+          </a:effectRef>
+          <a:fontRef idx="minor">
+            <a:schemeClr val="lt1"/>
+          </a:fontRef>
+        </p:style>
+        <p:txBody>
+          <a:bodyPr rtlCol="0" anchor="ctr"/>
+          <a:lstStyle/>
+          <a:p>
+            <a:pPr algn="ctr"/>
+          </a:p>
+        </p:txBody>
+      </p:sp>
+      <p:sp>
+        <p:nvSpPr>
+          <p:cNvPr id="34" name="TextBox 33"/>
+          <p:cNvSpPr txBox="1"/>
+          <p:nvPr/>
+        </p:nvSpPr>
+        <p:spPr>
+          <a:xfrm>
+            <a:off x="2761488" y="4270248"/>
+            <a:ext cx="4901184" cy="713232"/>
+          </a:xfrm>
+          <a:prstGeom prst="rect">
+            <a:avLst/>
+          </a:prstGeom>
+          <a:noFill/>
+        </p:spPr>
+        <p:txBody>
+          <a:bodyPr wrap="square" anchor="ctr">
+            <a:spAutoFit/>
+          </a:bodyPr>
+          <a:lstStyle/>
+          <a:p>
+            <a:pPr algn="l">
+              <a:lnSpc>
+                <a:spcPct val="108000"/>
+              </a:lnSpc>
+              <a:spcAft>
+                <a:spcPts val="0"/>
+              </a:spcAft>
+            </a:pPr>
+            <a:r>
+              <a:rPr sz="1500" b="0">
+                <a:solidFill>
+                  <a:srgbClr val="1F2430"/>
+                </a:solidFill>
+                <a:latin typeface="Meiryo"/>
+              </a:rPr>
+              <a:t>継続に必要な最低限だけ残す</a:t>
+            </a:r>
+          </a:p>
+        </p:txBody>
+      </p:sp>
+      <p:sp>
+        <p:nvSpPr>
+          <p:cNvPr id="35" name="Rectangle 34"/>
+          <p:cNvSpPr/>
+          <p:nvPr/>
+        </p:nvSpPr>
+        <p:spPr>
+          <a:xfrm>
+            <a:off x="7772400" y="4270248"/>
+            <a:ext cx="3840480" cy="713232"/>
+          </a:xfrm>
+          <a:prstGeom prst="rect">
+            <a:avLst/>
+          </a:prstGeom>
+          <a:solidFill>
+            <a:srgbClr val="FFFFFF"/>
+          </a:solidFill>
+          <a:ln w="12700">
+            <a:solidFill>
+              <a:srgbClr val="E3E5F0"/>
+            </a:solidFill>
+          </a:ln>
+          <a:effectLst/>
+        </p:spPr>
+        <p:style>
+          <a:lnRef idx="1">
+            <a:schemeClr val="accent1"/>
+          </a:lnRef>
+          <a:fillRef idx="3">
+            <a:schemeClr val="accent1"/>
+          </a:fillRef>
+          <a:effectRef idx="2">
+            <a:schemeClr val="accent1"/>
+          </a:effectRef>
+          <a:fontRef idx="minor">
+            <a:schemeClr val="lt1"/>
+          </a:fontRef>
+        </p:style>
+        <p:txBody>
+          <a:bodyPr rtlCol="0" anchor="ctr"/>
+          <a:lstStyle/>
+          <a:p>
+            <a:pPr algn="ctr"/>
+          </a:p>
+        </p:txBody>
+      </p:sp>
+      <p:sp>
+        <p:nvSpPr>
+          <p:cNvPr id="36" name="TextBox 35"/>
+          <p:cNvSpPr txBox="1"/>
+          <p:nvPr/>
+        </p:nvSpPr>
+        <p:spPr>
+          <a:xfrm>
+            <a:off x="7882128" y="4270248"/>
+            <a:ext cx="3621024" cy="713232"/>
+          </a:xfrm>
+          <a:prstGeom prst="rect">
+            <a:avLst/>
+          </a:prstGeom>
+          <a:noFill/>
+        </p:spPr>
+        <p:txBody>
+          <a:bodyPr wrap="square" anchor="ctr">
+            <a:spAutoFit/>
+          </a:bodyPr>
+          <a:lstStyle/>
+          <a:p>
+            <a:pPr algn="l">
+              <a:lnSpc>
+                <a:spcPct val="108000"/>
+              </a:lnSpc>
+              <a:spcAft>
+                <a:spcPts val="0"/>
+              </a:spcAft>
+            </a:pPr>
+            <a:r>
+              <a:rPr sz="1500" b="0">
+                <a:solidFill>
+                  <a:srgbClr val="5B6372"/>
+                </a:solidFill>
+                <a:latin typeface="Meiryo"/>
+              </a:rPr>
+              <a:t>src/state.mjs</a:t>
+            </a:r>
+          </a:p>
+        </p:txBody>
+      </p:sp>
+      <p:sp>
+        <p:nvSpPr>
+          <p:cNvPr id="37" name="Rectangle 36"/>
+          <p:cNvSpPr/>
+          <p:nvPr/>
+        </p:nvSpPr>
+        <p:spPr>
+          <a:xfrm>
+            <a:off x="548640" y="4983480"/>
+            <a:ext cx="2103120" cy="713232"/>
+          </a:xfrm>
+          <a:prstGeom prst="rect">
+            <a:avLst/>
+          </a:prstGeom>
+          <a:solidFill>
+            <a:srgbClr val="F3F4FB"/>
+          </a:solidFill>
+          <a:ln w="12700">
+            <a:solidFill>
+              <a:srgbClr val="E3E5F0"/>
+            </a:solidFill>
+          </a:ln>
+          <a:effectLst/>
+        </p:spPr>
+        <p:style>
+          <a:lnRef idx="1">
+            <a:schemeClr val="accent1"/>
+          </a:lnRef>
+          <a:fillRef idx="3">
+            <a:schemeClr val="accent1"/>
+          </a:fillRef>
+          <a:effectRef idx="2">
+            <a:schemeClr val="accent1"/>
+          </a:effectRef>
+          <a:fontRef idx="minor">
+            <a:schemeClr val="lt1"/>
+          </a:fontRef>
+        </p:style>
+        <p:txBody>
+          <a:bodyPr rtlCol="0" anchor="ctr"/>
+          <a:lstStyle/>
+          <a:p>
+            <a:pPr algn="ctr"/>
+          </a:p>
+        </p:txBody>
+      </p:sp>
+      <p:sp>
+        <p:nvSpPr>
+          <p:cNvPr id="38" name="TextBox 37"/>
+          <p:cNvSpPr txBox="1"/>
+          <p:nvPr/>
+        </p:nvSpPr>
+        <p:spPr>
+          <a:xfrm>
+            <a:off x="658368" y="4983480"/>
+            <a:ext cx="1883664" cy="713232"/>
+          </a:xfrm>
+          <a:prstGeom prst="rect">
+            <a:avLst/>
+          </a:prstGeom>
+          <a:noFill/>
+        </p:spPr>
+        <p:txBody>
+          <a:bodyPr wrap="square" anchor="ctr">
+            <a:spAutoFit/>
+          </a:bodyPr>
+          <a:lstStyle/>
+          <a:p>
+            <a:pPr algn="l">
+              <a:lnSpc>
+                <a:spcPct val="108000"/>
+              </a:lnSpc>
+              <a:spcAft>
+                <a:spcPts val="0"/>
+              </a:spcAft>
+            </a:pPr>
+            <a:r>
+              <a:rPr sz="1500" b="1">
+                <a:solidFill>
+                  <a:srgbClr val="4C3AE3"/>
+                </a:solidFill>
+                <a:latin typeface="Meiryo"/>
+              </a:rPr>
+              <a:t>5 証拠ゲート</a:t>
+            </a:r>
+          </a:p>
+        </p:txBody>
+      </p:sp>
+      <p:sp>
+        <p:nvSpPr>
+          <p:cNvPr id="39" name="Rectangle 38"/>
+          <p:cNvSpPr/>
+          <p:nvPr/>
+        </p:nvSpPr>
+        <p:spPr>
+          <a:xfrm>
+            <a:off x="2651760" y="4983480"/>
+            <a:ext cx="5120640" cy="713232"/>
+          </a:xfrm>
+          <a:prstGeom prst="rect">
+            <a:avLst/>
+          </a:prstGeom>
+          <a:solidFill>
+            <a:srgbClr val="F3F4FB"/>
+          </a:solidFill>
+          <a:ln w="12700">
+            <a:solidFill>
+              <a:srgbClr val="E3E5F0"/>
+            </a:solidFill>
+          </a:ln>
+          <a:effectLst/>
+        </p:spPr>
+        <p:style>
+          <a:lnRef idx="1">
+            <a:schemeClr val="accent1"/>
+          </a:lnRef>
+          <a:fillRef idx="3">
+            <a:schemeClr val="accent1"/>
+          </a:fillRef>
+          <a:effectRef idx="2">
+            <a:schemeClr val="accent1"/>
+          </a:effectRef>
+          <a:fontRef idx="minor">
+            <a:schemeClr val="lt1"/>
+          </a:fontRef>
+        </p:style>
+        <p:txBody>
+          <a:bodyPr rtlCol="0" anchor="ctr"/>
+          <a:lstStyle/>
+          <a:p>
+            <a:pPr algn="ctr"/>
+          </a:p>
+        </p:txBody>
+      </p:sp>
+      <p:sp>
+        <p:nvSpPr>
+          <p:cNvPr id="40" name="TextBox 39"/>
+          <p:cNvSpPr txBox="1"/>
+          <p:nvPr/>
+        </p:nvSpPr>
+        <p:spPr>
+          <a:xfrm>
+            <a:off x="2761488" y="4983480"/>
+            <a:ext cx="4901184" cy="713232"/>
+          </a:xfrm>
+          <a:prstGeom prst="rect">
+            <a:avLst/>
+          </a:prstGeom>
+          <a:noFill/>
+        </p:spPr>
+        <p:txBody>
+          <a:bodyPr wrap="square" anchor="ctr">
+            <a:spAutoFit/>
+          </a:bodyPr>
+          <a:lstStyle/>
+          <a:p>
+            <a:pPr algn="l">
+              <a:lnSpc>
+                <a:spcPct val="108000"/>
+              </a:lnSpc>
+              <a:spcAft>
+                <a:spcPts val="0"/>
+              </a:spcAft>
+            </a:pPr>
+            <a:r>
+              <a:rPr sz="1500" b="0">
+                <a:solidFill>
+                  <a:srgbClr val="1F2430"/>
+                </a:solidFill>
+                <a:latin typeface="Meiryo"/>
+              </a:rPr>
+              <a:t>accept / retry / escalate を証拠で判定</a:t>
+            </a:r>
+          </a:p>
+        </p:txBody>
+      </p:sp>
+      <p:sp>
+        <p:nvSpPr>
+          <p:cNvPr id="41" name="Rectangle 40"/>
+          <p:cNvSpPr/>
+          <p:nvPr/>
+        </p:nvSpPr>
+        <p:spPr>
+          <a:xfrm>
+            <a:off x="7772400" y="4983480"/>
+            <a:ext cx="3840480" cy="713232"/>
+          </a:xfrm>
+          <a:prstGeom prst="rect">
+            <a:avLst/>
+          </a:prstGeom>
+          <a:solidFill>
+            <a:srgbClr val="F3F4FB"/>
+          </a:solidFill>
+          <a:ln w="12700">
+            <a:solidFill>
+              <a:srgbClr val="E3E5F0"/>
+            </a:solidFill>
+          </a:ln>
+          <a:effectLst/>
+        </p:spPr>
+        <p:style>
+          <a:lnRef idx="1">
+            <a:schemeClr val="accent1"/>
+          </a:lnRef>
+          <a:fillRef idx="3">
+            <a:schemeClr val="accent1"/>
+          </a:fillRef>
+          <a:effectRef idx="2">
+            <a:schemeClr val="accent1"/>
+          </a:effectRef>
+          <a:fontRef idx="minor">
+            <a:schemeClr val="lt1"/>
+          </a:fontRef>
+        </p:style>
+        <p:txBody>
+          <a:bodyPr rtlCol="0" anchor="ctr"/>
+          <a:lstStyle/>
+          <a:p>
+            <a:pPr algn="ctr"/>
+          </a:p>
+        </p:txBody>
+      </p:sp>
+      <p:sp>
+        <p:nvSpPr>
+          <p:cNvPr id="42" name="TextBox 41"/>
+          <p:cNvSpPr txBox="1"/>
+          <p:nvPr/>
+        </p:nvSpPr>
+        <p:spPr>
+          <a:xfrm>
+            <a:off x="7882128" y="4983480"/>
+            <a:ext cx="3621024" cy="713232"/>
+          </a:xfrm>
+          <a:prstGeom prst="rect">
+            <a:avLst/>
+          </a:prstGeom>
+          <a:noFill/>
+        </p:spPr>
+        <p:txBody>
+          <a:bodyPr wrap="square" anchor="ctr">
+            <a:spAutoFit/>
+          </a:bodyPr>
+          <a:lstStyle/>
+          <a:p>
+            <a:pPr algn="l">
+              <a:lnSpc>
+                <a:spcPct val="108000"/>
+              </a:lnSpc>
+              <a:spcAft>
+                <a:spcPts val="0"/>
+              </a:spcAft>
+            </a:pPr>
+            <a:r>
+              <a:rPr sz="1500" b="0">
+                <a:solidFill>
+                  <a:srgbClr val="5B6372"/>
+                </a:solidFill>
+                <a:latin typeface="Meiryo"/>
+              </a:rPr>
+              <a:t>src/verify.mjs / checks/fixture.csv</a:t>
+            </a:r>
+          </a:p>
+        </p:txBody>
+      </p:sp>
+      <p:sp>
+        <p:nvSpPr>
+          <p:cNvPr id="43" name="Rectangle 42"/>
+          <p:cNvSpPr/>
+          <p:nvPr/>
+        </p:nvSpPr>
+        <p:spPr>
+          <a:xfrm>
+            <a:off x="548640" y="5696712"/>
+            <a:ext cx="2103120" cy="713232"/>
+          </a:xfrm>
+          <a:prstGeom prst="rect">
+            <a:avLst/>
+          </a:prstGeom>
+          <a:solidFill>
+            <a:srgbClr val="FFFFFF"/>
+          </a:solidFill>
+          <a:ln w="12700">
+            <a:solidFill>
+              <a:srgbClr val="E3E5F0"/>
+            </a:solidFill>
+          </a:ln>
+          <a:effectLst/>
+        </p:spPr>
+        <p:style>
+          <a:lnRef idx="1">
+            <a:schemeClr val="accent1"/>
+          </a:lnRef>
+          <a:fillRef idx="3">
+            <a:schemeClr val="accent1"/>
+          </a:fillRef>
+          <a:effectRef idx="2">
+            <a:schemeClr val="accent1"/>
+          </a:effectRef>
+          <a:fontRef idx="minor">
+            <a:schemeClr val="lt1"/>
+          </a:fontRef>
+        </p:style>
+        <p:txBody>
+          <a:bodyPr rtlCol="0" anchor="ctr"/>
+          <a:lstStyle/>
+          <a:p>
+            <a:pPr algn="ctr"/>
+          </a:p>
+        </p:txBody>
+      </p:sp>
+      <p:sp>
+        <p:nvSpPr>
+          <p:cNvPr id="44" name="TextBox 43"/>
+          <p:cNvSpPr txBox="1"/>
+          <p:nvPr/>
+        </p:nvSpPr>
+        <p:spPr>
+          <a:xfrm>
+            <a:off x="658368" y="5696712"/>
+            <a:ext cx="1883664" cy="713232"/>
+          </a:xfrm>
+          <a:prstGeom prst="rect">
+            <a:avLst/>
+          </a:prstGeom>
+          <a:noFill/>
+        </p:spPr>
+        <p:txBody>
+          <a:bodyPr wrap="square" anchor="ctr">
+            <a:spAutoFit/>
+          </a:bodyPr>
+          <a:lstStyle/>
+          <a:p>
+            <a:pPr algn="l">
+              <a:lnSpc>
+                <a:spcPct val="108000"/>
+              </a:lnSpc>
+              <a:spcAft>
+                <a:spcPts val="0"/>
+              </a:spcAft>
+            </a:pPr>
+            <a:r>
+              <a:rPr sz="1500" b="1">
+                <a:solidFill>
+                  <a:srgbClr val="4C3AE3"/>
+                </a:solidFill>
+                <a:latin typeface="Meiryo"/>
+              </a:rPr>
+              <a:t>6 トレース</a:t>
+            </a:r>
+          </a:p>
+        </p:txBody>
+      </p:sp>
+      <p:sp>
+        <p:nvSpPr>
+          <p:cNvPr id="45" name="Rectangle 44"/>
+          <p:cNvSpPr/>
+          <p:nvPr/>
+        </p:nvSpPr>
+        <p:spPr>
+          <a:xfrm>
+            <a:off x="2651760" y="5696712"/>
+            <a:ext cx="5120640" cy="713232"/>
+          </a:xfrm>
+          <a:prstGeom prst="rect">
+            <a:avLst/>
+          </a:prstGeom>
+          <a:solidFill>
+            <a:srgbClr val="FFFFFF"/>
+          </a:solidFill>
+          <a:ln w="12700">
+            <a:solidFill>
+              <a:srgbClr val="E3E5F0"/>
+            </a:solidFill>
+          </a:ln>
+          <a:effectLst/>
+        </p:spPr>
+        <p:style>
+          <a:lnRef idx="1">
+            <a:schemeClr val="accent1"/>
+          </a:lnRef>
+          <a:fillRef idx="3">
+            <a:schemeClr val="accent1"/>
+          </a:fillRef>
+          <a:effectRef idx="2">
+            <a:schemeClr val="accent1"/>
+          </a:effectRef>
+          <a:fontRef idx="minor">
+            <a:schemeClr val="lt1"/>
+          </a:fontRef>
+        </p:style>
+        <p:txBody>
+          <a:bodyPr rtlCol="0" anchor="ctr"/>
+          <a:lstStyle/>
+          <a:p>
+            <a:pPr algn="ctr"/>
+          </a:p>
+        </p:txBody>
+      </p:sp>
+      <p:sp>
+        <p:nvSpPr>
+          <p:cNvPr id="46" name="TextBox 45"/>
+          <p:cNvSpPr txBox="1"/>
+          <p:nvPr/>
+        </p:nvSpPr>
+        <p:spPr>
+          <a:xfrm>
+            <a:off x="2761488" y="5696712"/>
+            <a:ext cx="4901184" cy="713232"/>
+          </a:xfrm>
+          <a:prstGeom prst="rect">
+            <a:avLst/>
+          </a:prstGeom>
+          <a:noFill/>
+        </p:spPr>
+        <p:txBody>
+          <a:bodyPr wrap="square" anchor="ctr">
+            <a:spAutoFit/>
+          </a:bodyPr>
+          <a:lstStyle/>
+          <a:p>
+            <a:pPr algn="l">
+              <a:lnSpc>
+                <a:spcPct val="108000"/>
+              </a:lnSpc>
+              <a:spcAft>
+                <a:spcPts val="0"/>
+              </a:spcAft>
+            </a:pPr>
+            <a:r>
+              <a:rPr sz="1500" b="0">
+                <a:solidFill>
+                  <a:srgbClr val="1F2430"/>
+                </a:solidFill>
+                <a:latin typeface="Meiryo"/>
+              </a:rPr>
+              <a:t>実行を1行で記録し失敗を基盤に変える</a:t>
+            </a:r>
+          </a:p>
+        </p:txBody>
+      </p:sp>
+      <p:sp>
+        <p:nvSpPr>
+          <p:cNvPr id="47" name="Rectangle 46"/>
+          <p:cNvSpPr/>
+          <p:nvPr/>
+        </p:nvSpPr>
+        <p:spPr>
+          <a:xfrm>
+            <a:off x="7772400" y="5696712"/>
+            <a:ext cx="3840480" cy="713232"/>
+          </a:xfrm>
+          <a:prstGeom prst="rect">
+            <a:avLst/>
+          </a:prstGeom>
+          <a:solidFill>
+            <a:srgbClr val="FFFFFF"/>
+          </a:solidFill>
+          <a:ln w="12700">
+            <a:solidFill>
+              <a:srgbClr val="E3E5F0"/>
+            </a:solidFill>
+          </a:ln>
+          <a:effectLst/>
+        </p:spPr>
+        <p:style>
+          <a:lnRef idx="1">
+            <a:schemeClr val="accent1"/>
+          </a:lnRef>
+          <a:fillRef idx="3">
+            <a:schemeClr val="accent1"/>
+          </a:fillRef>
+          <a:effectRef idx="2">
+            <a:schemeClr val="accent1"/>
+          </a:effectRef>
+          <a:fontRef idx="minor">
+            <a:schemeClr val="lt1"/>
+          </a:fontRef>
+        </p:style>
+        <p:txBody>
+          <a:bodyPr rtlCol="0" anchor="ctr"/>
+          <a:lstStyle/>
+          <a:p>
+            <a:pPr algn="ctr"/>
+          </a:p>
+        </p:txBody>
+      </p:sp>
+      <p:sp>
+        <p:nvSpPr>
+          <p:cNvPr id="48" name="TextBox 47"/>
+          <p:cNvSpPr txBox="1"/>
+          <p:nvPr/>
+        </p:nvSpPr>
+        <p:spPr>
+          <a:xfrm>
+            <a:off x="7882128" y="5696712"/>
+            <a:ext cx="3621024" cy="713232"/>
+          </a:xfrm>
+          <a:prstGeom prst="rect">
+            <a:avLst/>
+          </a:prstGeom>
+          <a:noFill/>
+        </p:spPr>
+        <p:txBody>
+          <a:bodyPr wrap="square" anchor="ctr">
+            <a:spAutoFit/>
+          </a:bodyPr>
+          <a:lstStyle/>
+          <a:p>
+            <a:pPr algn="l">
+              <a:lnSpc>
+                <a:spcPct val="108000"/>
+              </a:lnSpc>
+              <a:spcAft>
+                <a:spcPts val="0"/>
+              </a:spcAft>
+            </a:pPr>
+            <a:r>
+              <a:rPr sz="1500" b="0">
+                <a:solidFill>
+                  <a:srgbClr val="5B6372"/>
+                </a:solidFill>
+                <a:latin typeface="Meiryo"/>
+              </a:rPr>
+              <a:t>runs/traces.jsonl</a:t>
             </a:r>
           </a:p>
         </p:txBody>
@@ -7458,7 +7762,7 @@
                 </a:solidFill>
                 <a:latin typeface="Meiryo"/>
               </a:rPr>
-              <a:t>1行変えるだけで学べる4つのこと</a:t>
+              <a:t>McKinsey のエージェント像 → 6層ハーネス</a:t>
             </a:r>
           </a:p>
           <a:p>
@@ -7477,7 +7781,7 @@
                 </a:solidFill>
                 <a:latin typeface="Meiryo"/>
               </a:rPr>
-              <a:t>README「★自分で壊して学ぶ」</a:t>
+              <a:t>定義を、動く仕組みに対応づける</a:t>
             </a:r>
           </a:p>
         </p:txBody>
@@ -7490,8 +7794,8 @@
         </p:nvSpPr>
         <p:spPr>
           <a:xfrm>
-            <a:off x="548640" y="1508760"/>
-            <a:ext cx="3931920" cy="868680"/>
+            <a:off x="548640" y="1417320"/>
+            <a:ext cx="3657600" cy="713232"/>
           </a:xfrm>
           <a:prstGeom prst="rect">
             <a:avLst/>
@@ -7534,8 +7838,8 @@
         </p:nvSpPr>
         <p:spPr>
           <a:xfrm>
-            <a:off x="658368" y="1508760"/>
-            <a:ext cx="3712464" cy="868680"/>
+            <a:off x="658368" y="1417320"/>
+            <a:ext cx="3438144" cy="713232"/>
           </a:xfrm>
           <a:prstGeom prst="rect">
             <a:avLst/>
@@ -7557,13 +7861,13 @@
               </a:spcAft>
             </a:pPr>
             <a:r>
-              <a:rPr sz="1600" b="1">
+              <a:rPr sz="1400" b="1">
                 <a:solidFill>
                   <a:srgbClr val="FFFFFF"/>
                 </a:solidFill>
                 <a:latin typeface="Meiryo"/>
               </a:rPr>
-              <a:t>変えるもの</a:t>
+              <a:t>McKinsey のエージェント能力</a:t>
             </a:r>
           </a:p>
         </p:txBody>
@@ -7576,8 +7880,8 @@
         </p:nvSpPr>
         <p:spPr>
           <a:xfrm>
-            <a:off x="4480560" y="1508760"/>
-            <a:ext cx="7132320" cy="868680"/>
+            <a:off x="4206240" y="1417320"/>
+            <a:ext cx="3200400" cy="713232"/>
           </a:xfrm>
           <a:prstGeom prst="rect">
             <a:avLst/>
@@ -7620,8 +7924,8 @@
         </p:nvSpPr>
         <p:spPr>
           <a:xfrm>
-            <a:off x="4590288" y="1508760"/>
-            <a:ext cx="6912864" cy="868680"/>
+            <a:off x="4315968" y="1417320"/>
+            <a:ext cx="2980944" cy="713232"/>
           </a:xfrm>
           <a:prstGeom prst="rect">
             <a:avLst/>
@@ -7643,13 +7947,13 @@
               </a:spcAft>
             </a:pPr>
             <a:r>
-              <a:rPr sz="1600" b="1">
+              <a:rPr sz="1400" b="1">
                 <a:solidFill>
                   <a:srgbClr val="FFFFFF"/>
                 </a:solidFill>
                 <a:latin typeface="Meiryo"/>
               </a:rPr>
-              <a:t>分かること</a:t>
+              <a:t>6層ハーネス</a:t>
             </a:r>
           </a:p>
         </p:txBody>
@@ -7662,8 +7966,94 @@
         </p:nvSpPr>
         <p:spPr>
           <a:xfrm>
-            <a:off x="548640" y="2377440"/>
-            <a:ext cx="3931920" cy="868680"/>
+            <a:off x="7406640" y="1417320"/>
+            <a:ext cx="4206240" cy="713232"/>
+          </a:xfrm>
+          <a:prstGeom prst="rect">
+            <a:avLst/>
+          </a:prstGeom>
+          <a:solidFill>
+            <a:srgbClr val="4C3AE3"/>
+          </a:solidFill>
+          <a:ln>
+            <a:noFill/>
+          </a:ln>
+          <a:effectLst/>
+        </p:spPr>
+        <p:style>
+          <a:lnRef idx="1">
+            <a:schemeClr val="accent1"/>
+          </a:lnRef>
+          <a:fillRef idx="3">
+            <a:schemeClr val="accent1"/>
+          </a:fillRef>
+          <a:effectRef idx="2">
+            <a:schemeClr val="accent1"/>
+          </a:effectRef>
+          <a:fontRef idx="minor">
+            <a:schemeClr val="lt1"/>
+          </a:fontRef>
+        </p:style>
+        <p:txBody>
+          <a:bodyPr rtlCol="0" anchor="ctr"/>
+          <a:lstStyle/>
+          <a:p>
+            <a:pPr algn="ctr"/>
+          </a:p>
+        </p:txBody>
+      </p:sp>
+      <p:sp>
+        <p:nvSpPr>
+          <p:cNvPr id="12" name="TextBox 11"/>
+          <p:cNvSpPr txBox="1"/>
+          <p:nvPr/>
+        </p:nvSpPr>
+        <p:spPr>
+          <a:xfrm>
+            <a:off x="7516368" y="1417320"/>
+            <a:ext cx="3986784" cy="713232"/>
+          </a:xfrm>
+          <a:prstGeom prst="rect">
+            <a:avLst/>
+          </a:prstGeom>
+          <a:noFill/>
+        </p:spPr>
+        <p:txBody>
+          <a:bodyPr wrap="square" anchor="ctr">
+            <a:spAutoFit/>
+          </a:bodyPr>
+          <a:lstStyle/>
+          <a:p>
+            <a:pPr algn="l">
+              <a:lnSpc>
+                <a:spcPct val="108000"/>
+              </a:lnSpc>
+              <a:spcAft>
+                <a:spcPts val="600"/>
+              </a:spcAft>
+            </a:pPr>
+            <a:r>
+              <a:rPr sz="1400" b="1">
+                <a:solidFill>
+                  <a:srgbClr val="FFFFFF"/>
+                </a:solidFill>
+                <a:latin typeface="Meiryo"/>
+              </a:rPr>
+              <a:t>実装の要点</a:t>
+            </a:r>
+          </a:p>
+        </p:txBody>
+      </p:sp>
+      <p:sp>
+        <p:nvSpPr>
+          <p:cNvPr id="13" name="Rectangle 12"/>
+          <p:cNvSpPr/>
+          <p:nvPr/>
+        </p:nvSpPr>
+        <p:spPr>
+          <a:xfrm>
+            <a:off x="548640" y="2130552"/>
+            <a:ext cx="3657600" cy="713232"/>
           </a:xfrm>
           <a:prstGeom prst="rect">
             <a:avLst/>
@@ -7702,14 +8092,14 @@
       </p:sp>
       <p:sp>
         <p:nvSpPr>
-          <p:cNvPr id="12" name="TextBox 11"/>
+          <p:cNvPr id="14" name="TextBox 13"/>
           <p:cNvSpPr txBox="1"/>
           <p:nvPr/>
         </p:nvSpPr>
         <p:spPr>
           <a:xfrm>
-            <a:off x="658368" y="2377440"/>
-            <a:ext cx="3712464" cy="868680"/>
+            <a:off x="658368" y="2130552"/>
+            <a:ext cx="3438144" cy="713232"/>
           </a:xfrm>
           <a:prstGeom prst="rect">
             <a:avLst/>
@@ -7731,27 +8121,27 @@
               </a:spcAft>
             </a:pPr>
             <a:r>
-              <a:rPr sz="1500" b="1">
+              <a:rPr sz="1300" b="1">
                 <a:solidFill>
                   <a:srgbClr val="1F2430"/>
                 </a:solidFill>
                 <a:latin typeface="Meiryo"/>
               </a:rPr>
-              <a:t>検証チェックを消す</a:t>
-            </a:r>
-          </a:p>
-        </p:txBody>
-      </p:sp>
-      <p:sp>
-        <p:nvSpPr>
-          <p:cNvPr id="13" name="Rectangle 12"/>
+              <a:t>知覚（入力・環境把握）</a:t>
+            </a:r>
+          </a:p>
+        </p:txBody>
+      </p:sp>
+      <p:sp>
+        <p:nvSpPr>
+          <p:cNvPr id="15" name="Rectangle 14"/>
           <p:cNvSpPr/>
           <p:nvPr/>
         </p:nvSpPr>
         <p:spPr>
           <a:xfrm>
-            <a:off x="4480560" y="2377440"/>
-            <a:ext cx="7132320" cy="868680"/>
+            <a:off x="4206240" y="2130552"/>
+            <a:ext cx="3200400" cy="713232"/>
           </a:xfrm>
           <a:prstGeom prst="rect">
             <a:avLst/>
@@ -7790,14 +8180,14 @@
       </p:sp>
       <p:sp>
         <p:nvSpPr>
-          <p:cNvPr id="14" name="TextBox 13"/>
+          <p:cNvPr id="16" name="TextBox 15"/>
           <p:cNvSpPr txBox="1"/>
           <p:nvPr/>
         </p:nvSpPr>
         <p:spPr>
           <a:xfrm>
-            <a:off x="4590288" y="2377440"/>
-            <a:ext cx="6912864" cy="868680"/>
+            <a:off x="4315968" y="2130552"/>
+            <a:ext cx="2980944" cy="713232"/>
           </a:xfrm>
           <a:prstGeom prst="rect">
             <a:avLst/>
@@ -7819,27 +8209,115 @@
               </a:spcAft>
             </a:pPr>
             <a:r>
-              <a:rPr sz="1500" b="0">
-                <a:solidFill>
-                  <a:srgbClr val="1F2430"/>
-                </a:solidFill>
-                <a:latin typeface="Meiryo"/>
-              </a:rPr>
-              <a:t>証拠が細かいほどAIは自力で直せる。証拠がないと直せない</a:t>
-            </a:r>
-          </a:p>
-        </p:txBody>
-      </p:sp>
-      <p:sp>
-        <p:nvSpPr>
-          <p:cNvPr id="15" name="Rectangle 14"/>
+              <a:rPr sz="1300" b="1">
+                <a:solidFill>
+                  <a:srgbClr val="4C3AE3"/>
+                </a:solidFill>
+                <a:latin typeface="Meiryo"/>
+              </a:rPr>
+              <a:t>層2 コンテキスト</a:t>
+            </a:r>
+          </a:p>
+        </p:txBody>
+      </p:sp>
+      <p:sp>
+        <p:nvSpPr>
+          <p:cNvPr id="17" name="Rectangle 16"/>
           <p:cNvSpPr/>
           <p:nvPr/>
         </p:nvSpPr>
         <p:spPr>
           <a:xfrm>
-            <a:off x="548640" y="3246120"/>
-            <a:ext cx="3931920" cy="868680"/>
+            <a:off x="7406640" y="2130552"/>
+            <a:ext cx="4206240" cy="713232"/>
+          </a:xfrm>
+          <a:prstGeom prst="rect">
+            <a:avLst/>
+          </a:prstGeom>
+          <a:solidFill>
+            <a:srgbClr val="F3F4FB"/>
+          </a:solidFill>
+          <a:ln w="12700">
+            <a:solidFill>
+              <a:srgbClr val="E3E5F0"/>
+            </a:solidFill>
+          </a:ln>
+          <a:effectLst/>
+        </p:spPr>
+        <p:style>
+          <a:lnRef idx="1">
+            <a:schemeClr val="accent1"/>
+          </a:lnRef>
+          <a:fillRef idx="3">
+            <a:schemeClr val="accent1"/>
+          </a:fillRef>
+          <a:effectRef idx="2">
+            <a:schemeClr val="accent1"/>
+          </a:effectRef>
+          <a:fontRef idx="minor">
+            <a:schemeClr val="lt1"/>
+          </a:fontRef>
+        </p:style>
+        <p:txBody>
+          <a:bodyPr rtlCol="0" anchor="ctr"/>
+          <a:lstStyle/>
+          <a:p>
+            <a:pPr algn="ctr"/>
+          </a:p>
+        </p:txBody>
+      </p:sp>
+      <p:sp>
+        <p:nvSpPr>
+          <p:cNvPr id="18" name="TextBox 17"/>
+          <p:cNvSpPr txBox="1"/>
+          <p:nvPr/>
+        </p:nvSpPr>
+        <p:spPr>
+          <a:xfrm>
+            <a:off x="7516368" y="2130552"/>
+            <a:ext cx="3986784" cy="713232"/>
+          </a:xfrm>
+          <a:prstGeom prst="rect">
+            <a:avLst/>
+          </a:prstGeom>
+          <a:noFill/>
+        </p:spPr>
+        <p:txBody>
+          <a:bodyPr wrap="square" anchor="ctr">
+            <a:spAutoFit/>
+          </a:bodyPr>
+          <a:lstStyle/>
+          <a:p>
+            <a:pPr algn="l">
+              <a:lnSpc>
+                <a:spcPct val="108000"/>
+              </a:lnSpc>
+              <a:spcAft>
+                <a:spcPts val="0"/>
+              </a:spcAft>
+            </a:pPr>
+            <a:r>
+              <a:rPr sz="1300" b="0">
+                <a:solidFill>
+                  <a:srgbClr val="5B6372"/>
+                </a:solidFill>
+                <a:latin typeface="Meiryo"/>
+              </a:rPr>
+              <a:t>高信号な情報だけを組み立てる</a:t>
+            </a:r>
+          </a:p>
+        </p:txBody>
+      </p:sp>
+      <p:sp>
+        <p:nvSpPr>
+          <p:cNvPr id="19" name="Rectangle 18"/>
+          <p:cNvSpPr/>
+          <p:nvPr/>
+        </p:nvSpPr>
+        <p:spPr>
+          <a:xfrm>
+            <a:off x="548640" y="2843784"/>
+            <a:ext cx="3657600" cy="713232"/>
           </a:xfrm>
           <a:prstGeom prst="rect">
             <a:avLst/>
@@ -7878,14 +8356,14 @@
       </p:sp>
       <p:sp>
         <p:nvSpPr>
-          <p:cNvPr id="16" name="TextBox 15"/>
+          <p:cNvPr id="20" name="TextBox 19"/>
           <p:cNvSpPr txBox="1"/>
           <p:nvPr/>
         </p:nvSpPr>
         <p:spPr>
           <a:xfrm>
-            <a:off x="658368" y="3246120"/>
-            <a:ext cx="3712464" cy="868680"/>
+            <a:off x="658368" y="2843784"/>
+            <a:ext cx="3438144" cy="713232"/>
           </a:xfrm>
           <a:prstGeom prst="rect">
             <a:avLst/>
@@ -7907,27 +8385,27 @@
               </a:spcAft>
             </a:pPr>
             <a:r>
-              <a:rPr sz="1500" b="1">
+              <a:rPr sz="1300" b="1">
                 <a:solidFill>
                   <a:srgbClr val="1F2430"/>
                 </a:solidFill>
                 <a:latin typeface="Meiryo"/>
               </a:rPr>
-              <a:t>契約の max_repairs を変える</a:t>
-            </a:r>
-          </a:p>
-        </p:txBody>
-      </p:sp>
-      <p:sp>
-        <p:nvSpPr>
-          <p:cNvPr id="17" name="Rectangle 16"/>
+              <a:t>推論・計画</a:t>
+            </a:r>
+          </a:p>
+        </p:txBody>
+      </p:sp>
+      <p:sp>
+        <p:nvSpPr>
+          <p:cNvPr id="21" name="Rectangle 20"/>
           <p:cNvSpPr/>
           <p:nvPr/>
         </p:nvSpPr>
         <p:spPr>
           <a:xfrm>
-            <a:off x="4480560" y="3246120"/>
-            <a:ext cx="7132320" cy="868680"/>
+            <a:off x="4206240" y="2843784"/>
+            <a:ext cx="3200400" cy="713232"/>
           </a:xfrm>
           <a:prstGeom prst="rect">
             <a:avLst/>
@@ -7966,14 +8444,14 @@
       </p:sp>
       <p:sp>
         <p:nvSpPr>
-          <p:cNvPr id="18" name="TextBox 17"/>
+          <p:cNvPr id="22" name="TextBox 21"/>
           <p:cNvSpPr txBox="1"/>
           <p:nvPr/>
         </p:nvSpPr>
         <p:spPr>
           <a:xfrm>
-            <a:off x="4590288" y="3246120"/>
-            <a:ext cx="6912864" cy="868680"/>
+            <a:off x="4315968" y="2843784"/>
+            <a:ext cx="2980944" cy="713232"/>
           </a:xfrm>
           <a:prstGeom prst="rect">
             <a:avLst/>
@@ -7995,27 +8473,115 @@
               </a:spcAft>
             </a:pPr>
             <a:r>
-              <a:rPr sz="1500" b="0">
-                <a:solidFill>
-                  <a:srgbClr val="1F2430"/>
-                </a:solidFill>
-                <a:latin typeface="Meiryo"/>
-              </a:rPr>
-              <a:t>何回リトライするかはAIでなくルール（契約）が決める</a:t>
-            </a:r>
-          </a:p>
-        </p:txBody>
-      </p:sp>
-      <p:sp>
-        <p:nvSpPr>
-          <p:cNvPr id="19" name="Rectangle 18"/>
+              <a:rPr sz="1300" b="1">
+                <a:solidFill>
+                  <a:srgbClr val="4C3AE3"/>
+                </a:solidFill>
+                <a:latin typeface="Meiryo"/>
+              </a:rPr>
+              <a:t>層1 契約 ＋ モデル</a:t>
+            </a:r>
+          </a:p>
+        </p:txBody>
+      </p:sp>
+      <p:sp>
+        <p:nvSpPr>
+          <p:cNvPr id="23" name="Rectangle 22"/>
           <p:cNvSpPr/>
           <p:nvPr/>
         </p:nvSpPr>
         <p:spPr>
           <a:xfrm>
-            <a:off x="548640" y="4114800"/>
-            <a:ext cx="3931920" cy="868680"/>
+            <a:off x="7406640" y="2843784"/>
+            <a:ext cx="4206240" cy="713232"/>
+          </a:xfrm>
+          <a:prstGeom prst="rect">
+            <a:avLst/>
+          </a:prstGeom>
+          <a:solidFill>
+            <a:srgbClr val="FFFFFF"/>
+          </a:solidFill>
+          <a:ln w="12700">
+            <a:solidFill>
+              <a:srgbClr val="E3E5F0"/>
+            </a:solidFill>
+          </a:ln>
+          <a:effectLst/>
+        </p:spPr>
+        <p:style>
+          <a:lnRef idx="1">
+            <a:schemeClr val="accent1"/>
+          </a:lnRef>
+          <a:fillRef idx="3">
+            <a:schemeClr val="accent1"/>
+          </a:fillRef>
+          <a:effectRef idx="2">
+            <a:schemeClr val="accent1"/>
+          </a:effectRef>
+          <a:fontRef idx="minor">
+            <a:schemeClr val="lt1"/>
+          </a:fontRef>
+        </p:style>
+        <p:txBody>
+          <a:bodyPr rtlCol="0" anchor="ctr"/>
+          <a:lstStyle/>
+          <a:p>
+            <a:pPr algn="ctr"/>
+          </a:p>
+        </p:txBody>
+      </p:sp>
+      <p:sp>
+        <p:nvSpPr>
+          <p:cNvPr id="24" name="TextBox 23"/>
+          <p:cNvSpPr txBox="1"/>
+          <p:nvPr/>
+        </p:nvSpPr>
+        <p:spPr>
+          <a:xfrm>
+            <a:off x="7516368" y="2843784"/>
+            <a:ext cx="3986784" cy="713232"/>
+          </a:xfrm>
+          <a:prstGeom prst="rect">
+            <a:avLst/>
+          </a:prstGeom>
+          <a:noFill/>
+        </p:spPr>
+        <p:txBody>
+          <a:bodyPr wrap="square" anchor="ctr">
+            <a:spAutoFit/>
+          </a:bodyPr>
+          <a:lstStyle/>
+          <a:p>
+            <a:pPr algn="l">
+              <a:lnSpc>
+                <a:spcPct val="108000"/>
+              </a:lnSpc>
+              <a:spcAft>
+                <a:spcPts val="0"/>
+              </a:spcAft>
+            </a:pPr>
+            <a:r>
+              <a:rPr sz="1300" b="0">
+                <a:solidFill>
+                  <a:srgbClr val="5B6372"/>
+                </a:solidFill>
+                <a:latin typeface="Meiryo"/>
+              </a:rPr>
+              <a:t>done_when で完了条件を固定</a:t>
+            </a:r>
+          </a:p>
+        </p:txBody>
+      </p:sp>
+      <p:sp>
+        <p:nvSpPr>
+          <p:cNvPr id="25" name="Rectangle 24"/>
+          <p:cNvSpPr/>
+          <p:nvPr/>
+        </p:nvSpPr>
+        <p:spPr>
+          <a:xfrm>
+            <a:off x="548640" y="3557016"/>
+            <a:ext cx="3657600" cy="713232"/>
           </a:xfrm>
           <a:prstGeom prst="rect">
             <a:avLst/>
@@ -8054,14 +8620,14 @@
       </p:sp>
       <p:sp>
         <p:nvSpPr>
-          <p:cNvPr id="20" name="TextBox 19"/>
+          <p:cNvPr id="26" name="TextBox 25"/>
           <p:cNvSpPr txBox="1"/>
           <p:nvPr/>
         </p:nvSpPr>
         <p:spPr>
           <a:xfrm>
-            <a:off x="658368" y="4114800"/>
-            <a:ext cx="3712464" cy="868680"/>
+            <a:off x="658368" y="3557016"/>
+            <a:ext cx="3438144" cy="713232"/>
           </a:xfrm>
           <a:prstGeom prst="rect">
             <a:avLst/>
@@ -8083,27 +8649,27 @@
               </a:spcAft>
             </a:pPr>
             <a:r>
-              <a:rPr sz="1500" b="1">
+              <a:rPr sz="1300" b="1">
                 <a:solidFill>
                   <a:srgbClr val="1F2430"/>
                 </a:solidFill>
                 <a:latin typeface="Meiryo"/>
               </a:rPr>
-              <a:t>権限を automatic に変える</a:t>
-            </a:r>
-          </a:p>
-        </p:txBody>
-      </p:sp>
-      <p:sp>
-        <p:nvSpPr>
-          <p:cNvPr id="21" name="Rectangle 20"/>
+              <a:t>ツール利用・行動</a:t>
+            </a:r>
+          </a:p>
+        </p:txBody>
+      </p:sp>
+      <p:sp>
+        <p:nvSpPr>
+          <p:cNvPr id="27" name="Rectangle 26"/>
           <p:cNvSpPr/>
           <p:nvPr/>
         </p:nvSpPr>
         <p:spPr>
           <a:xfrm>
-            <a:off x="4480560" y="4114800"/>
-            <a:ext cx="7132320" cy="868680"/>
+            <a:off x="4206240" y="3557016"/>
+            <a:ext cx="3200400" cy="713232"/>
           </a:xfrm>
           <a:prstGeom prst="rect">
             <a:avLst/>
@@ -8142,14 +8708,14 @@
       </p:sp>
       <p:sp>
         <p:nvSpPr>
-          <p:cNvPr id="22" name="TextBox 21"/>
+          <p:cNvPr id="28" name="TextBox 27"/>
           <p:cNvSpPr txBox="1"/>
           <p:nvPr/>
         </p:nvSpPr>
         <p:spPr>
           <a:xfrm>
-            <a:off x="4590288" y="4114800"/>
-            <a:ext cx="6912864" cy="868680"/>
+            <a:off x="4315968" y="3557016"/>
+            <a:ext cx="2980944" cy="713232"/>
           </a:xfrm>
           <a:prstGeom prst="rect">
             <a:avLst/>
@@ -8171,27 +8737,115 @@
               </a:spcAft>
             </a:pPr>
             <a:r>
-              <a:rPr sz="1500" b="0">
-                <a:solidFill>
-                  <a:srgbClr val="1F2430"/>
-                </a:solidFill>
-                <a:latin typeface="Meiryo"/>
-              </a:rPr>
-              <a:t>AIのコードを1行も触らず承認要否だけ変えられる（提案・許可・実行の分離）</a:t>
-            </a:r>
-          </a:p>
-        </p:txBody>
-      </p:sp>
-      <p:sp>
-        <p:nvSpPr>
-          <p:cNvPr id="23" name="Rectangle 22"/>
+              <a:rPr sz="1300" b="1">
+                <a:solidFill>
+                  <a:srgbClr val="4C3AE3"/>
+                </a:solidFill>
+                <a:latin typeface="Meiryo"/>
+              </a:rPr>
+              <a:t>層3 ゲートウェイ</a:t>
+            </a:r>
+          </a:p>
+        </p:txBody>
+      </p:sp>
+      <p:sp>
+        <p:nvSpPr>
+          <p:cNvPr id="29" name="Rectangle 28"/>
           <p:cNvSpPr/>
           <p:nvPr/>
         </p:nvSpPr>
         <p:spPr>
           <a:xfrm>
-            <a:off x="548640" y="4983480"/>
-            <a:ext cx="3931920" cy="868680"/>
+            <a:off x="7406640" y="3557016"/>
+            <a:ext cx="4206240" cy="713232"/>
+          </a:xfrm>
+          <a:prstGeom prst="rect">
+            <a:avLst/>
+          </a:prstGeom>
+          <a:solidFill>
+            <a:srgbClr val="F3F4FB"/>
+          </a:solidFill>
+          <a:ln w="12700">
+            <a:solidFill>
+              <a:srgbClr val="E3E5F0"/>
+            </a:solidFill>
+          </a:ln>
+          <a:effectLst/>
+        </p:spPr>
+        <p:style>
+          <a:lnRef idx="1">
+            <a:schemeClr val="accent1"/>
+          </a:lnRef>
+          <a:fillRef idx="3">
+            <a:schemeClr val="accent1"/>
+          </a:fillRef>
+          <a:effectRef idx="2">
+            <a:schemeClr val="accent1"/>
+          </a:effectRef>
+          <a:fontRef idx="minor">
+            <a:schemeClr val="lt1"/>
+          </a:fontRef>
+        </p:style>
+        <p:txBody>
+          <a:bodyPr rtlCol="0" anchor="ctr"/>
+          <a:lstStyle/>
+          <a:p>
+            <a:pPr algn="ctr"/>
+          </a:p>
+        </p:txBody>
+      </p:sp>
+      <p:sp>
+        <p:nvSpPr>
+          <p:cNvPr id="30" name="TextBox 29"/>
+          <p:cNvSpPr txBox="1"/>
+          <p:nvPr/>
+        </p:nvSpPr>
+        <p:spPr>
+          <a:xfrm>
+            <a:off x="7516368" y="3557016"/>
+            <a:ext cx="3986784" cy="713232"/>
+          </a:xfrm>
+          <a:prstGeom prst="rect">
+            <a:avLst/>
+          </a:prstGeom>
+          <a:noFill/>
+        </p:spPr>
+        <p:txBody>
+          <a:bodyPr wrap="square" anchor="ctr">
+            <a:spAutoFit/>
+          </a:bodyPr>
+          <a:lstStyle/>
+          <a:p>
+            <a:pPr algn="l">
+              <a:lnSpc>
+                <a:spcPct val="108000"/>
+              </a:lnSpc>
+              <a:spcAft>
+                <a:spcPts val="0"/>
+              </a:spcAft>
+            </a:pPr>
+            <a:r>
+              <a:rPr sz="1300" b="0">
+                <a:solidFill>
+                  <a:srgbClr val="5B6372"/>
+                </a:solidFill>
+                <a:latin typeface="Meiryo"/>
+              </a:rPr>
+              <a:t>提案・許可・実行を分離</a:t>
+            </a:r>
+          </a:p>
+        </p:txBody>
+      </p:sp>
+      <p:sp>
+        <p:nvSpPr>
+          <p:cNvPr id="31" name="Rectangle 30"/>
+          <p:cNvSpPr/>
+          <p:nvPr/>
+        </p:nvSpPr>
+        <p:spPr>
+          <a:xfrm>
+            <a:off x="548640" y="4270248"/>
+            <a:ext cx="3657600" cy="713232"/>
           </a:xfrm>
           <a:prstGeom prst="rect">
             <a:avLst/>
@@ -8230,14 +8884,14 @@
       </p:sp>
       <p:sp>
         <p:nvSpPr>
-          <p:cNvPr id="24" name="TextBox 23"/>
+          <p:cNvPr id="32" name="TextBox 31"/>
           <p:cNvSpPr txBox="1"/>
           <p:nvPr/>
         </p:nvSpPr>
         <p:spPr>
           <a:xfrm>
-            <a:off x="658368" y="4983480"/>
-            <a:ext cx="3712464" cy="868680"/>
+            <a:off x="658368" y="4270248"/>
+            <a:ext cx="3438144" cy="713232"/>
           </a:xfrm>
           <a:prstGeom prst="rect">
             <a:avLst/>
@@ -8259,27 +8913,27 @@
               </a:spcAft>
             </a:pPr>
             <a:r>
-              <a:rPr sz="1500" b="1">
+              <a:rPr sz="1300" b="1">
                 <a:solidFill>
                   <a:srgbClr val="1F2430"/>
                 </a:solidFill>
                 <a:latin typeface="Meiryo"/>
               </a:rPr>
-              <a:t>コンテキストから証拠を消す</a:t>
-            </a:r>
-          </a:p>
-        </p:txBody>
-      </p:sp>
-      <p:sp>
-        <p:nvSpPr>
-          <p:cNvPr id="25" name="Rectangle 24"/>
+              <a:t>記憶・状態</a:t>
+            </a:r>
+          </a:p>
+        </p:txBody>
+      </p:sp>
+      <p:sp>
+        <p:nvSpPr>
+          <p:cNvPr id="33" name="Rectangle 32"/>
           <p:cNvSpPr/>
           <p:nvPr/>
         </p:nvSpPr>
         <p:spPr>
           <a:xfrm>
-            <a:off x="4480560" y="4983480"/>
-            <a:ext cx="7132320" cy="868680"/>
+            <a:off x="4206240" y="4270248"/>
+            <a:ext cx="3200400" cy="713232"/>
           </a:xfrm>
           <a:prstGeom prst="rect">
             <a:avLst/>
@@ -8318,14 +8972,14 @@
       </p:sp>
       <p:sp>
         <p:nvSpPr>
-          <p:cNvPr id="26" name="TextBox 25"/>
+          <p:cNvPr id="34" name="TextBox 33"/>
           <p:cNvSpPr txBox="1"/>
           <p:nvPr/>
         </p:nvSpPr>
         <p:spPr>
           <a:xfrm>
-            <a:off x="4590288" y="4983480"/>
-            <a:ext cx="6912864" cy="868680"/>
+            <a:off x="4315968" y="4270248"/>
+            <a:ext cx="2980944" cy="713232"/>
           </a:xfrm>
           <a:prstGeom prst="rect">
             <a:avLst/>
@@ -8347,27 +9001,73 @@
               </a:spcAft>
             </a:pPr>
             <a:r>
-              <a:rPr sz="1500" b="0">
-                <a:solidFill>
-                  <a:srgbClr val="1F2430"/>
-                </a:solidFill>
-                <a:latin typeface="Meiryo"/>
-              </a:rPr>
-              <a:t>環境が証拠を返さないとAIは同じ失敗を繰り返す</a:t>
-            </a:r>
-          </a:p>
-        </p:txBody>
-      </p:sp>
-      <p:sp>
-        <p:nvSpPr>
-          <p:cNvPr id="27" name="TextBox 26"/>
+              <a:rPr sz="1300" b="1">
+                <a:solidFill>
+                  <a:srgbClr val="4C3AE3"/>
+                </a:solidFill>
+                <a:latin typeface="Meiryo"/>
+              </a:rPr>
+              <a:t>層4 状態</a:t>
+            </a:r>
+          </a:p>
+        </p:txBody>
+      </p:sp>
+      <p:sp>
+        <p:nvSpPr>
+          <p:cNvPr id="35" name="Rectangle 34"/>
+          <p:cNvSpPr/>
+          <p:nvPr/>
+        </p:nvSpPr>
+        <p:spPr>
+          <a:xfrm>
+            <a:off x="7406640" y="4270248"/>
+            <a:ext cx="4206240" cy="713232"/>
+          </a:xfrm>
+          <a:prstGeom prst="rect">
+            <a:avLst/>
+          </a:prstGeom>
+          <a:solidFill>
+            <a:srgbClr val="FFFFFF"/>
+          </a:solidFill>
+          <a:ln w="12700">
+            <a:solidFill>
+              <a:srgbClr val="E3E5F0"/>
+            </a:solidFill>
+          </a:ln>
+          <a:effectLst/>
+        </p:spPr>
+        <p:style>
+          <a:lnRef idx="1">
+            <a:schemeClr val="accent1"/>
+          </a:lnRef>
+          <a:fillRef idx="3">
+            <a:schemeClr val="accent1"/>
+          </a:fillRef>
+          <a:effectRef idx="2">
+            <a:schemeClr val="accent1"/>
+          </a:effectRef>
+          <a:fontRef idx="minor">
+            <a:schemeClr val="lt1"/>
+          </a:fontRef>
+        </p:style>
+        <p:txBody>
+          <a:bodyPr rtlCol="0" anchor="ctr"/>
+          <a:lstStyle/>
+          <a:p>
+            <a:pPr algn="ctr"/>
+          </a:p>
+        </p:txBody>
+      </p:sp>
+      <p:sp>
+        <p:nvSpPr>
+          <p:cNvPr id="36" name="TextBox 35"/>
           <p:cNvSpPr txBox="1"/>
           <p:nvPr/>
         </p:nvSpPr>
         <p:spPr>
           <a:xfrm>
-            <a:off x="548640" y="5394960"/>
-            <a:ext cx="10972800" cy="1097280"/>
+            <a:off x="7516368" y="4270248"/>
+            <a:ext cx="3986784" cy="713232"/>
           </a:xfrm>
           <a:prstGeom prst="rect">
             <a:avLst/>
@@ -8375,36 +9075,555 @@
           <a:noFill/>
         </p:spPr>
         <p:txBody>
-          <a:bodyPr wrap="square" anchor="t">
+          <a:bodyPr wrap="square" anchor="ctr">
             <a:spAutoFit/>
           </a:bodyPr>
           <a:lstStyle/>
           <a:p>
             <a:pPr algn="l">
               <a:lnSpc>
-                <a:spcPct val="120000"/>
+                <a:spcPct val="108000"/>
               </a:lnSpc>
               <a:spcAft>
-                <a:spcPts val="600"/>
+                <a:spcPts val="0"/>
               </a:spcAft>
             </a:pPr>
             <a:r>
-              <a:rPr sz="1500" b="1">
-                <a:solidFill>
-                  <a:srgbClr val="1EA05A"/>
-                </a:solidFill>
-                <a:latin typeface="Meiryo"/>
-              </a:rPr>
-              <a:t>実証済み</a:t>
-            </a:r>
-            <a:r>
-              <a:rPr sz="1500" b="0">
+              <a:rPr sz="1300" b="0">
+                <a:solidFill>
+                  <a:srgbClr val="5B6372"/>
+                </a:solidFill>
+                <a:latin typeface="Meiryo"/>
+              </a:rPr>
+              <a:t>継続に必要な最低限を残す</a:t>
+            </a:r>
+          </a:p>
+        </p:txBody>
+      </p:sp>
+      <p:sp>
+        <p:nvSpPr>
+          <p:cNvPr id="37" name="Rectangle 36"/>
+          <p:cNvSpPr/>
+          <p:nvPr/>
+        </p:nvSpPr>
+        <p:spPr>
+          <a:xfrm>
+            <a:off x="548640" y="4983480"/>
+            <a:ext cx="3657600" cy="713232"/>
+          </a:xfrm>
+          <a:prstGeom prst="rect">
+            <a:avLst/>
+          </a:prstGeom>
+          <a:solidFill>
+            <a:srgbClr val="F3F4FB"/>
+          </a:solidFill>
+          <a:ln w="12700">
+            <a:solidFill>
+              <a:srgbClr val="E3E5F0"/>
+            </a:solidFill>
+          </a:ln>
+          <a:effectLst/>
+        </p:spPr>
+        <p:style>
+          <a:lnRef idx="1">
+            <a:schemeClr val="accent1"/>
+          </a:lnRef>
+          <a:fillRef idx="3">
+            <a:schemeClr val="accent1"/>
+          </a:fillRef>
+          <a:effectRef idx="2">
+            <a:schemeClr val="accent1"/>
+          </a:effectRef>
+          <a:fontRef idx="minor">
+            <a:schemeClr val="lt1"/>
+          </a:fontRef>
+        </p:style>
+        <p:txBody>
+          <a:bodyPr rtlCol="0" anchor="ctr"/>
+          <a:lstStyle/>
+          <a:p>
+            <a:pPr algn="ctr"/>
+          </a:p>
+        </p:txBody>
+      </p:sp>
+      <p:sp>
+        <p:nvSpPr>
+          <p:cNvPr id="38" name="TextBox 37"/>
+          <p:cNvSpPr txBox="1"/>
+          <p:nvPr/>
+        </p:nvSpPr>
+        <p:spPr>
+          <a:xfrm>
+            <a:off x="658368" y="4983480"/>
+            <a:ext cx="3438144" cy="713232"/>
+          </a:xfrm>
+          <a:prstGeom prst="rect">
+            <a:avLst/>
+          </a:prstGeom>
+          <a:noFill/>
+        </p:spPr>
+        <p:txBody>
+          <a:bodyPr wrap="square" anchor="ctr">
+            <a:spAutoFit/>
+          </a:bodyPr>
+          <a:lstStyle/>
+          <a:p>
+            <a:pPr algn="l">
+              <a:lnSpc>
+                <a:spcPct val="108000"/>
+              </a:lnSpc>
+              <a:spcAft>
+                <a:spcPts val="0"/>
+              </a:spcAft>
+            </a:pPr>
+            <a:r>
+              <a:rPr sz="1300" b="1">
                 <a:solidFill>
                   <a:srgbClr val="1F2430"/>
                 </a:solidFill>
                 <a:latin typeface="Meiryo"/>
               </a:rPr>
-              <a:t>：コンテキストから証拠を外すと、AIは修復を空振りして escalate する — を実走で確認。</a:t>
+              <a:t>自律の制御・ガードレール</a:t>
+            </a:r>
+          </a:p>
+        </p:txBody>
+      </p:sp>
+      <p:sp>
+        <p:nvSpPr>
+          <p:cNvPr id="39" name="Rectangle 38"/>
+          <p:cNvSpPr/>
+          <p:nvPr/>
+        </p:nvSpPr>
+        <p:spPr>
+          <a:xfrm>
+            <a:off x="4206240" y="4983480"/>
+            <a:ext cx="3200400" cy="713232"/>
+          </a:xfrm>
+          <a:prstGeom prst="rect">
+            <a:avLst/>
+          </a:prstGeom>
+          <a:solidFill>
+            <a:srgbClr val="F3F4FB"/>
+          </a:solidFill>
+          <a:ln w="12700">
+            <a:solidFill>
+              <a:srgbClr val="E3E5F0"/>
+            </a:solidFill>
+          </a:ln>
+          <a:effectLst/>
+        </p:spPr>
+        <p:style>
+          <a:lnRef idx="1">
+            <a:schemeClr val="accent1"/>
+          </a:lnRef>
+          <a:fillRef idx="3">
+            <a:schemeClr val="accent1"/>
+          </a:fillRef>
+          <a:effectRef idx="2">
+            <a:schemeClr val="accent1"/>
+          </a:effectRef>
+          <a:fontRef idx="minor">
+            <a:schemeClr val="lt1"/>
+          </a:fontRef>
+        </p:style>
+        <p:txBody>
+          <a:bodyPr rtlCol="0" anchor="ctr"/>
+          <a:lstStyle/>
+          <a:p>
+            <a:pPr algn="ctr"/>
+          </a:p>
+        </p:txBody>
+      </p:sp>
+      <p:sp>
+        <p:nvSpPr>
+          <p:cNvPr id="40" name="TextBox 39"/>
+          <p:cNvSpPr txBox="1"/>
+          <p:nvPr/>
+        </p:nvSpPr>
+        <p:spPr>
+          <a:xfrm>
+            <a:off x="4315968" y="4983480"/>
+            <a:ext cx="2980944" cy="713232"/>
+          </a:xfrm>
+          <a:prstGeom prst="rect">
+            <a:avLst/>
+          </a:prstGeom>
+          <a:noFill/>
+        </p:spPr>
+        <p:txBody>
+          <a:bodyPr wrap="square" anchor="ctr">
+            <a:spAutoFit/>
+          </a:bodyPr>
+          <a:lstStyle/>
+          <a:p>
+            <a:pPr algn="l">
+              <a:lnSpc>
+                <a:spcPct val="108000"/>
+              </a:lnSpc>
+              <a:spcAft>
+                <a:spcPts val="0"/>
+              </a:spcAft>
+            </a:pPr>
+            <a:r>
+              <a:rPr sz="1300" b="1">
+                <a:solidFill>
+                  <a:srgbClr val="4C3AE3"/>
+                </a:solidFill>
+                <a:latin typeface="Meiryo"/>
+              </a:rPr>
+              <a:t>層3 権限 ＋ 層5 検証</a:t>
+            </a:r>
+          </a:p>
+        </p:txBody>
+      </p:sp>
+      <p:sp>
+        <p:nvSpPr>
+          <p:cNvPr id="41" name="Rectangle 40"/>
+          <p:cNvSpPr/>
+          <p:nvPr/>
+        </p:nvSpPr>
+        <p:spPr>
+          <a:xfrm>
+            <a:off x="7406640" y="4983480"/>
+            <a:ext cx="4206240" cy="713232"/>
+          </a:xfrm>
+          <a:prstGeom prst="rect">
+            <a:avLst/>
+          </a:prstGeom>
+          <a:solidFill>
+            <a:srgbClr val="F3F4FB"/>
+          </a:solidFill>
+          <a:ln w="12700">
+            <a:solidFill>
+              <a:srgbClr val="E3E5F0"/>
+            </a:solidFill>
+          </a:ln>
+          <a:effectLst/>
+        </p:spPr>
+        <p:style>
+          <a:lnRef idx="1">
+            <a:schemeClr val="accent1"/>
+          </a:lnRef>
+          <a:fillRef idx="3">
+            <a:schemeClr val="accent1"/>
+          </a:fillRef>
+          <a:effectRef idx="2">
+            <a:schemeClr val="accent1"/>
+          </a:effectRef>
+          <a:fontRef idx="minor">
+            <a:schemeClr val="lt1"/>
+          </a:fontRef>
+        </p:style>
+        <p:txBody>
+          <a:bodyPr rtlCol="0" anchor="ctr"/>
+          <a:lstStyle/>
+          <a:p>
+            <a:pPr algn="ctr"/>
+          </a:p>
+        </p:txBody>
+      </p:sp>
+      <p:sp>
+        <p:nvSpPr>
+          <p:cNvPr id="42" name="TextBox 41"/>
+          <p:cNvSpPr txBox="1"/>
+          <p:nvPr/>
+        </p:nvSpPr>
+        <p:spPr>
+          <a:xfrm>
+            <a:off x="7516368" y="4983480"/>
+            <a:ext cx="3986784" cy="713232"/>
+          </a:xfrm>
+          <a:prstGeom prst="rect">
+            <a:avLst/>
+          </a:prstGeom>
+          <a:noFill/>
+        </p:spPr>
+        <p:txBody>
+          <a:bodyPr wrap="square" anchor="ctr">
+            <a:spAutoFit/>
+          </a:bodyPr>
+          <a:lstStyle/>
+          <a:p>
+            <a:pPr algn="l">
+              <a:lnSpc>
+                <a:spcPct val="108000"/>
+              </a:lnSpc>
+              <a:spcAft>
+                <a:spcPts val="0"/>
+              </a:spcAft>
+            </a:pPr>
+            <a:r>
+              <a:rPr sz="1300" b="0">
+                <a:solidFill>
+                  <a:srgbClr val="5B6372"/>
+                </a:solidFill>
+                <a:latin typeface="Meiryo"/>
+              </a:rPr>
+              <a:t>リスクで承認、証拠で判定</a:t>
+            </a:r>
+          </a:p>
+        </p:txBody>
+      </p:sp>
+      <p:sp>
+        <p:nvSpPr>
+          <p:cNvPr id="43" name="Rectangle 42"/>
+          <p:cNvSpPr/>
+          <p:nvPr/>
+        </p:nvSpPr>
+        <p:spPr>
+          <a:xfrm>
+            <a:off x="548640" y="5696712"/>
+            <a:ext cx="3657600" cy="713232"/>
+          </a:xfrm>
+          <a:prstGeom prst="rect">
+            <a:avLst/>
+          </a:prstGeom>
+          <a:solidFill>
+            <a:srgbClr val="FFFFFF"/>
+          </a:solidFill>
+          <a:ln w="12700">
+            <a:solidFill>
+              <a:srgbClr val="E3E5F0"/>
+            </a:solidFill>
+          </a:ln>
+          <a:effectLst/>
+        </p:spPr>
+        <p:style>
+          <a:lnRef idx="1">
+            <a:schemeClr val="accent1"/>
+          </a:lnRef>
+          <a:fillRef idx="3">
+            <a:schemeClr val="accent1"/>
+          </a:fillRef>
+          <a:effectRef idx="2">
+            <a:schemeClr val="accent1"/>
+          </a:effectRef>
+          <a:fontRef idx="minor">
+            <a:schemeClr val="lt1"/>
+          </a:fontRef>
+        </p:style>
+        <p:txBody>
+          <a:bodyPr rtlCol="0" anchor="ctr"/>
+          <a:lstStyle/>
+          <a:p>
+            <a:pPr algn="ctr"/>
+          </a:p>
+        </p:txBody>
+      </p:sp>
+      <p:sp>
+        <p:nvSpPr>
+          <p:cNvPr id="44" name="TextBox 43"/>
+          <p:cNvSpPr txBox="1"/>
+          <p:nvPr/>
+        </p:nvSpPr>
+        <p:spPr>
+          <a:xfrm>
+            <a:off x="658368" y="5696712"/>
+            <a:ext cx="3438144" cy="713232"/>
+          </a:xfrm>
+          <a:prstGeom prst="rect">
+            <a:avLst/>
+          </a:prstGeom>
+          <a:noFill/>
+        </p:spPr>
+        <p:txBody>
+          <a:bodyPr wrap="square" anchor="ctr">
+            <a:spAutoFit/>
+          </a:bodyPr>
+          <a:lstStyle/>
+          <a:p>
+            <a:pPr algn="l">
+              <a:lnSpc>
+                <a:spcPct val="108000"/>
+              </a:lnSpc>
+              <a:spcAft>
+                <a:spcPts val="0"/>
+              </a:spcAft>
+            </a:pPr>
+            <a:r>
+              <a:rPr sz="1300" b="1">
+                <a:solidFill>
+                  <a:srgbClr val="1F2430"/>
+                </a:solidFill>
+                <a:latin typeface="Meiryo"/>
+              </a:rPr>
+              <a:t>学習・改善</a:t>
+            </a:r>
+          </a:p>
+        </p:txBody>
+      </p:sp>
+      <p:sp>
+        <p:nvSpPr>
+          <p:cNvPr id="45" name="Rectangle 44"/>
+          <p:cNvSpPr/>
+          <p:nvPr/>
+        </p:nvSpPr>
+        <p:spPr>
+          <a:xfrm>
+            <a:off x="4206240" y="5696712"/>
+            <a:ext cx="3200400" cy="713232"/>
+          </a:xfrm>
+          <a:prstGeom prst="rect">
+            <a:avLst/>
+          </a:prstGeom>
+          <a:solidFill>
+            <a:srgbClr val="FFFFFF"/>
+          </a:solidFill>
+          <a:ln w="12700">
+            <a:solidFill>
+              <a:srgbClr val="E3E5F0"/>
+            </a:solidFill>
+          </a:ln>
+          <a:effectLst/>
+        </p:spPr>
+        <p:style>
+          <a:lnRef idx="1">
+            <a:schemeClr val="accent1"/>
+          </a:lnRef>
+          <a:fillRef idx="3">
+            <a:schemeClr val="accent1"/>
+          </a:fillRef>
+          <a:effectRef idx="2">
+            <a:schemeClr val="accent1"/>
+          </a:effectRef>
+          <a:fontRef idx="minor">
+            <a:schemeClr val="lt1"/>
+          </a:fontRef>
+        </p:style>
+        <p:txBody>
+          <a:bodyPr rtlCol="0" anchor="ctr"/>
+          <a:lstStyle/>
+          <a:p>
+            <a:pPr algn="ctr"/>
+          </a:p>
+        </p:txBody>
+      </p:sp>
+      <p:sp>
+        <p:nvSpPr>
+          <p:cNvPr id="46" name="TextBox 45"/>
+          <p:cNvSpPr txBox="1"/>
+          <p:nvPr/>
+        </p:nvSpPr>
+        <p:spPr>
+          <a:xfrm>
+            <a:off x="4315968" y="5696712"/>
+            <a:ext cx="2980944" cy="713232"/>
+          </a:xfrm>
+          <a:prstGeom prst="rect">
+            <a:avLst/>
+          </a:prstGeom>
+          <a:noFill/>
+        </p:spPr>
+        <p:txBody>
+          <a:bodyPr wrap="square" anchor="ctr">
+            <a:spAutoFit/>
+          </a:bodyPr>
+          <a:lstStyle/>
+          <a:p>
+            <a:pPr algn="l">
+              <a:lnSpc>
+                <a:spcPct val="108000"/>
+              </a:lnSpc>
+              <a:spcAft>
+                <a:spcPts val="0"/>
+              </a:spcAft>
+            </a:pPr>
+            <a:r>
+              <a:rPr sz="1300" b="1">
+                <a:solidFill>
+                  <a:srgbClr val="4C3AE3"/>
+                </a:solidFill>
+                <a:latin typeface="Meiryo"/>
+              </a:rPr>
+              <a:t>層6 トレース ＋ 失敗分類</a:t>
+            </a:r>
+          </a:p>
+        </p:txBody>
+      </p:sp>
+      <p:sp>
+        <p:nvSpPr>
+          <p:cNvPr id="47" name="Rectangle 46"/>
+          <p:cNvSpPr/>
+          <p:nvPr/>
+        </p:nvSpPr>
+        <p:spPr>
+          <a:xfrm>
+            <a:off x="7406640" y="5696712"/>
+            <a:ext cx="4206240" cy="713232"/>
+          </a:xfrm>
+          <a:prstGeom prst="rect">
+            <a:avLst/>
+          </a:prstGeom>
+          <a:solidFill>
+            <a:srgbClr val="FFFFFF"/>
+          </a:solidFill>
+          <a:ln w="12700">
+            <a:solidFill>
+              <a:srgbClr val="E3E5F0"/>
+            </a:solidFill>
+          </a:ln>
+          <a:effectLst/>
+        </p:spPr>
+        <p:style>
+          <a:lnRef idx="1">
+            <a:schemeClr val="accent1"/>
+          </a:lnRef>
+          <a:fillRef idx="3">
+            <a:schemeClr val="accent1"/>
+          </a:fillRef>
+          <a:effectRef idx="2">
+            <a:schemeClr val="accent1"/>
+          </a:effectRef>
+          <a:fontRef idx="minor">
+            <a:schemeClr val="lt1"/>
+          </a:fontRef>
+        </p:style>
+        <p:txBody>
+          <a:bodyPr rtlCol="0" anchor="ctr"/>
+          <a:lstStyle/>
+          <a:p>
+            <a:pPr algn="ctr"/>
+          </a:p>
+        </p:txBody>
+      </p:sp>
+      <p:sp>
+        <p:nvSpPr>
+          <p:cNvPr id="48" name="TextBox 47"/>
+          <p:cNvSpPr txBox="1"/>
+          <p:nvPr/>
+        </p:nvSpPr>
+        <p:spPr>
+          <a:xfrm>
+            <a:off x="7516368" y="5696712"/>
+            <a:ext cx="3986784" cy="713232"/>
+          </a:xfrm>
+          <a:prstGeom prst="rect">
+            <a:avLst/>
+          </a:prstGeom>
+          <a:noFill/>
+        </p:spPr>
+        <p:txBody>
+          <a:bodyPr wrap="square" anchor="ctr">
+            <a:spAutoFit/>
+          </a:bodyPr>
+          <a:lstStyle/>
+          <a:p>
+            <a:pPr algn="l">
+              <a:lnSpc>
+                <a:spcPct val="108000"/>
+              </a:lnSpc>
+              <a:spcAft>
+                <a:spcPts val="0"/>
+              </a:spcAft>
+            </a:pPr>
+            <a:r>
+              <a:rPr sz="1300" b="0">
+                <a:solidFill>
+                  <a:srgbClr val="5B6372"/>
+                </a:solidFill>
+                <a:latin typeface="Meiryo"/>
+              </a:rPr>
+              <a:t>失敗を4種に分類し基盤に変える</a:t>
             </a:r>
           </a:p>
         </p:txBody>
@@ -8638,120 +9857,9 @@
                 </a:solidFill>
                 <a:latin typeface="Meiryo"/>
               </a:rPr>
-              <a:t>実務での使いどころ</a:t>
-            </a:r>
-          </a:p>
-        </p:txBody>
-      </p:sp>
-      <p:sp>
-        <p:nvSpPr>
-          <p:cNvPr id="7" name="Rectangle 6"/>
-          <p:cNvSpPr/>
-          <p:nvPr/>
-        </p:nvSpPr>
-        <p:spPr>
-          <a:xfrm>
-            <a:off x="548640" y="1554480"/>
-            <a:ext cx="11064240" cy="1234440"/>
-          </a:xfrm>
-          <a:prstGeom prst="rect">
-            <a:avLst/>
-          </a:prstGeom>
-          <a:solidFill>
-            <a:srgbClr val="F3F4FB"/>
-          </a:solidFill>
-          <a:ln>
-            <a:noFill/>
-          </a:ln>
-          <a:effectLst/>
-        </p:spPr>
-        <p:style>
-          <a:lnRef idx="1">
-            <a:schemeClr val="accent1"/>
-          </a:lnRef>
-          <a:fillRef idx="3">
-            <a:schemeClr val="accent1"/>
-          </a:fillRef>
-          <a:effectRef idx="2">
-            <a:schemeClr val="accent1"/>
-          </a:effectRef>
-          <a:fontRef idx="minor">
-            <a:schemeClr val="lt1"/>
-          </a:fontRef>
-        </p:style>
-        <p:txBody>
-          <a:bodyPr rtlCol="0" anchor="ctr"/>
-          <a:lstStyle/>
-          <a:p>
-            <a:pPr algn="ctr"/>
-          </a:p>
-        </p:txBody>
-      </p:sp>
-      <p:sp>
-        <p:nvSpPr>
-          <p:cNvPr id="8" name="Rectangle 7"/>
-          <p:cNvSpPr/>
-          <p:nvPr/>
-        </p:nvSpPr>
-        <p:spPr>
-          <a:xfrm>
-            <a:off x="548640" y="1554480"/>
-            <a:ext cx="146304" cy="1234440"/>
-          </a:xfrm>
-          <a:prstGeom prst="rect">
-            <a:avLst/>
-          </a:prstGeom>
-          <a:solidFill>
-            <a:srgbClr val="4C3AE3"/>
-          </a:solidFill>
-          <a:ln>
-            <a:noFill/>
-          </a:ln>
-          <a:effectLst/>
-        </p:spPr>
-        <p:style>
-          <a:lnRef idx="1">
-            <a:schemeClr val="accent1"/>
-          </a:lnRef>
-          <a:fillRef idx="3">
-            <a:schemeClr val="accent1"/>
-          </a:fillRef>
-          <a:effectRef idx="2">
-            <a:schemeClr val="accent1"/>
-          </a:effectRef>
-          <a:fontRef idx="minor">
-            <a:schemeClr val="lt1"/>
-          </a:fontRef>
-        </p:style>
-        <p:txBody>
-          <a:bodyPr rtlCol="0" anchor="ctr"/>
-          <a:lstStyle/>
-          <a:p>
-            <a:pPr algn="ctr"/>
-          </a:p>
-        </p:txBody>
-      </p:sp>
-      <p:sp>
-        <p:nvSpPr>
-          <p:cNvPr id="9" name="TextBox 8"/>
-          <p:cNvSpPr txBox="1"/>
-          <p:nvPr/>
-        </p:nvSpPr>
-        <p:spPr>
-          <a:xfrm>
-            <a:off x="914400" y="1737360"/>
-            <a:ext cx="10424160" cy="914400"/>
-          </a:xfrm>
-          <a:prstGeom prst="rect">
-            <a:avLst/>
-          </a:prstGeom>
-          <a:noFill/>
-        </p:spPr>
-        <p:txBody>
-          <a:bodyPr wrap="square" anchor="ctr">
-            <a:spAutoFit/>
-          </a:bodyPr>
-          <a:lstStyle/>
+              <a:t>デモの流れ</a:t>
+            </a:r>
+          </a:p>
           <a:p>
             <a:pPr algn="l">
               <a:lnSpc>
@@ -8762,36 +9870,27 @@
               </a:spcAft>
             </a:pPr>
             <a:r>
-              <a:rPr sz="1900" b="1">
-                <a:solidFill>
-                  <a:srgbClr val="4C3AE3"/>
-                </a:solidFill>
-                <a:latin typeface="Meiryo"/>
-              </a:rPr>
-              <a:t>教材として</a:t>
-            </a:r>
-            <a:r>
-              <a:rPr sz="1600" b="0">
-                <a:solidFill>
-                  <a:srgbClr val="1F2430"/>
-                </a:solidFill>
-                <a:latin typeface="Meiryo"/>
-              </a:rPr>
-              <a:t>    チームに『ハーネスとは何か』を5分で説明する</a:t>
-            </a:r>
-          </a:p>
-        </p:txBody>
-      </p:sp>
-      <p:sp>
-        <p:nvSpPr>
-          <p:cNvPr id="10" name="Rectangle 9"/>
+              <a:rPr sz="1300" b="0">
+                <a:solidFill>
+                  <a:srgbClr val="D9D4FF"/>
+                </a:solidFill>
+                <a:latin typeface="Meiryo"/>
+              </a:rPr>
+              <a:t>node agent-harness/src/harness.mjs を実行すると…</a:t>
+            </a:r>
+          </a:p>
+        </p:txBody>
+      </p:sp>
+      <p:sp>
+        <p:nvSpPr>
+          <p:cNvPr id="7" name="Rectangle 6"/>
           <p:cNvSpPr/>
           <p:nvPr/>
         </p:nvSpPr>
         <p:spPr>
           <a:xfrm>
-            <a:off x="548640" y="3063240"/>
-            <a:ext cx="11064240" cy="1234440"/>
+            <a:off x="548640" y="1463040"/>
+            <a:ext cx="3611880" cy="1783080"/>
           </a:xfrm>
           <a:prstGeom prst="rect">
             <a:avLst/>
@@ -8828,20 +9927,20 @@
       </p:sp>
       <p:sp>
         <p:nvSpPr>
-          <p:cNvPr id="11" name="Rectangle 10"/>
+          <p:cNvPr id="8" name="Rectangle 7"/>
           <p:cNvSpPr/>
           <p:nvPr/>
         </p:nvSpPr>
         <p:spPr>
           <a:xfrm>
-            <a:off x="548640" y="3063240"/>
-            <a:ext cx="146304" cy="1234440"/>
+            <a:off x="548640" y="1463040"/>
+            <a:ext cx="128016" cy="1783080"/>
           </a:xfrm>
           <a:prstGeom prst="rect">
             <a:avLst/>
           </a:prstGeom>
           <a:solidFill>
-            <a:srgbClr val="4C3AE3"/>
+            <a:srgbClr val="D13A3A"/>
           </a:solidFill>
           <a:ln>
             <a:noFill/>
@@ -8872,14 +9971,183 @@
       </p:sp>
       <p:sp>
         <p:nvSpPr>
+          <p:cNvPr id="9" name="TextBox 8"/>
+          <p:cNvSpPr txBox="1"/>
+          <p:nvPr/>
+        </p:nvSpPr>
+        <p:spPr>
+          <a:xfrm>
+            <a:off x="868680" y="1645920"/>
+            <a:ext cx="3063240" cy="1463040"/>
+          </a:xfrm>
+          <a:prstGeom prst="rect">
+            <a:avLst/>
+          </a:prstGeom>
+          <a:noFill/>
+        </p:spPr>
+        <p:txBody>
+          <a:bodyPr wrap="square" anchor="t">
+            <a:spAutoFit/>
+          </a:bodyPr>
+          <a:lstStyle/>
+          <a:p>
+            <a:pPr algn="l">
+              <a:lnSpc>
+                <a:spcPct val="115000"/>
+              </a:lnSpc>
+              <a:spcAft>
+                <a:spcPts val="600"/>
+              </a:spcAft>
+            </a:pPr>
+            <a:r>
+              <a:rPr sz="1800" b="1">
+                <a:solidFill>
+                  <a:srgbClr val="D13A3A"/>
+                </a:solidFill>
+                <a:latin typeface="Meiryo"/>
+              </a:rPr>
+              <a:t>1  作る → 失敗</a:t>
+            </a:r>
+          </a:p>
+          <a:p>
+            <a:pPr algn="l">
+              <a:lnSpc>
+                <a:spcPct val="115000"/>
+              </a:lnSpc>
+              <a:spcAft>
+                <a:spcPts val="600"/>
+              </a:spcAft>
+            </a:pPr>
+            <a:r>
+              <a:rPr sz="500" b="0">
+                <a:solidFill>
+                  <a:srgbClr val="D13A3A"/>
+                </a:solidFill>
+                <a:latin typeface="Meiryo"/>
+              </a:rPr>
+              <a:t/>
+            </a:r>
+          </a:p>
+          <a:p>
+            <a:pPr algn="l">
+              <a:lnSpc>
+                <a:spcPct val="115000"/>
+              </a:lnSpc>
+              <a:spcAft>
+                <a:spcPts val="600"/>
+              </a:spcAft>
+            </a:pPr>
+            <a:r>
+              <a:rPr sz="1400" b="0">
+                <a:solidFill>
+                  <a:srgbClr val="1F2430"/>
+                </a:solidFill>
+                <a:latin typeface="Meiryo"/>
+              </a:rPr>
+              <a:t>日付が 2026/09/11（ルール違反）
+→ 証拠ゲートが弾く</a:t>
+            </a:r>
+          </a:p>
+        </p:txBody>
+      </p:sp>
+      <p:sp>
+        <p:nvSpPr>
+          <p:cNvPr id="10" name="Rectangle 9"/>
+          <p:cNvSpPr/>
+          <p:nvPr/>
+        </p:nvSpPr>
+        <p:spPr>
+          <a:xfrm>
+            <a:off x="4416552" y="1463040"/>
+            <a:ext cx="3611880" cy="1783080"/>
+          </a:xfrm>
+          <a:prstGeom prst="rect">
+            <a:avLst/>
+          </a:prstGeom>
+          <a:solidFill>
+            <a:srgbClr val="F3F4FB"/>
+          </a:solidFill>
+          <a:ln>
+            <a:noFill/>
+          </a:ln>
+          <a:effectLst/>
+        </p:spPr>
+        <p:style>
+          <a:lnRef idx="1">
+            <a:schemeClr val="accent1"/>
+          </a:lnRef>
+          <a:fillRef idx="3">
+            <a:schemeClr val="accent1"/>
+          </a:fillRef>
+          <a:effectRef idx="2">
+            <a:schemeClr val="accent1"/>
+          </a:effectRef>
+          <a:fontRef idx="minor">
+            <a:schemeClr val="lt1"/>
+          </a:fontRef>
+        </p:style>
+        <p:txBody>
+          <a:bodyPr rtlCol="0" anchor="ctr"/>
+          <a:lstStyle/>
+          <a:p>
+            <a:pPr algn="ctr"/>
+          </a:p>
+        </p:txBody>
+      </p:sp>
+      <p:sp>
+        <p:nvSpPr>
+          <p:cNvPr id="11" name="Rectangle 10"/>
+          <p:cNvSpPr/>
+          <p:nvPr/>
+        </p:nvSpPr>
+        <p:spPr>
+          <a:xfrm>
+            <a:off x="4416552" y="1463040"/>
+            <a:ext cx="128016" cy="1783080"/>
+          </a:xfrm>
+          <a:prstGeom prst="rect">
+            <a:avLst/>
+          </a:prstGeom>
+          <a:solidFill>
+            <a:srgbClr val="1EA05A"/>
+          </a:solidFill>
+          <a:ln>
+            <a:noFill/>
+          </a:ln>
+          <a:effectLst/>
+        </p:spPr>
+        <p:style>
+          <a:lnRef idx="1">
+            <a:schemeClr val="accent1"/>
+          </a:lnRef>
+          <a:fillRef idx="3">
+            <a:schemeClr val="accent1"/>
+          </a:fillRef>
+          <a:effectRef idx="2">
+            <a:schemeClr val="accent1"/>
+          </a:effectRef>
+          <a:fontRef idx="minor">
+            <a:schemeClr val="lt1"/>
+          </a:fontRef>
+        </p:style>
+        <p:txBody>
+          <a:bodyPr rtlCol="0" anchor="ctr"/>
+          <a:lstStyle/>
+          <a:p>
+            <a:pPr algn="ctr"/>
+          </a:p>
+        </p:txBody>
+      </p:sp>
+      <p:sp>
+        <p:nvSpPr>
           <p:cNvPr id="12" name="TextBox 11"/>
           <p:cNvSpPr txBox="1"/>
           <p:nvPr/>
         </p:nvSpPr>
         <p:spPr>
           <a:xfrm>
-            <a:off x="914400" y="3246120"/>
-            <a:ext cx="10424160" cy="914400"/>
+            <a:off x="4736592" y="1645920"/>
+            <a:ext cx="3063240" cy="1463040"/>
           </a:xfrm>
           <a:prstGeom prst="rect">
             <a:avLst/>
@@ -8887,7 +10155,281 @@
           <a:noFill/>
         </p:spPr>
         <p:txBody>
-          <a:bodyPr wrap="square" anchor="ctr">
+          <a:bodyPr wrap="square" anchor="t">
+            <a:spAutoFit/>
+          </a:bodyPr>
+          <a:lstStyle/>
+          <a:p>
+            <a:pPr algn="l">
+              <a:lnSpc>
+                <a:spcPct val="115000"/>
+              </a:lnSpc>
+              <a:spcAft>
+                <a:spcPts val="600"/>
+              </a:spcAft>
+            </a:pPr>
+            <a:r>
+              <a:rPr sz="1800" b="1">
+                <a:solidFill>
+                  <a:srgbClr val="1EA05A"/>
+                </a:solidFill>
+                <a:latin typeface="Meiryo"/>
+              </a:rPr>
+              <a:t>2  証拠で自動修復</a:t>
+            </a:r>
+          </a:p>
+          <a:p>
+            <a:pPr algn="l">
+              <a:lnSpc>
+                <a:spcPct val="115000"/>
+              </a:lnSpc>
+              <a:spcAft>
+                <a:spcPts val="600"/>
+              </a:spcAft>
+            </a:pPr>
+            <a:r>
+              <a:rPr sz="500" b="0">
+                <a:solidFill>
+                  <a:srgbClr val="1EA05A"/>
+                </a:solidFill>
+                <a:latin typeface="Meiryo"/>
+              </a:rPr>
+              <a:t/>
+            </a:r>
+          </a:p>
+          <a:p>
+            <a:pPr algn="l">
+              <a:lnSpc>
+                <a:spcPct val="115000"/>
+              </a:lnSpc>
+              <a:spcAft>
+                <a:spcPts val="600"/>
+              </a:spcAft>
+            </a:pPr>
+            <a:r>
+              <a:rPr sz="1400" b="0">
+                <a:solidFill>
+                  <a:srgbClr val="1F2430"/>
+                </a:solidFill>
+                <a:latin typeface="Meiryo"/>
+              </a:rPr>
+              <a:t>2026-09-11 に直す
+→ 全チェック通過</a:t>
+            </a:r>
+          </a:p>
+        </p:txBody>
+      </p:sp>
+      <p:sp>
+        <p:nvSpPr>
+          <p:cNvPr id="13" name="Rectangle 12"/>
+          <p:cNvSpPr/>
+          <p:nvPr/>
+        </p:nvSpPr>
+        <p:spPr>
+          <a:xfrm>
+            <a:off x="8284464" y="1463040"/>
+            <a:ext cx="3611880" cy="1783080"/>
+          </a:xfrm>
+          <a:prstGeom prst="rect">
+            <a:avLst/>
+          </a:prstGeom>
+          <a:solidFill>
+            <a:srgbClr val="F3F4FB"/>
+          </a:solidFill>
+          <a:ln>
+            <a:noFill/>
+          </a:ln>
+          <a:effectLst/>
+        </p:spPr>
+        <p:style>
+          <a:lnRef idx="1">
+            <a:schemeClr val="accent1"/>
+          </a:lnRef>
+          <a:fillRef idx="3">
+            <a:schemeClr val="accent1"/>
+          </a:fillRef>
+          <a:effectRef idx="2">
+            <a:schemeClr val="accent1"/>
+          </a:effectRef>
+          <a:fontRef idx="minor">
+            <a:schemeClr val="lt1"/>
+          </a:fontRef>
+        </p:style>
+        <p:txBody>
+          <a:bodyPr rtlCol="0" anchor="ctr"/>
+          <a:lstStyle/>
+          <a:p>
+            <a:pPr algn="ctr"/>
+          </a:p>
+        </p:txBody>
+      </p:sp>
+      <p:sp>
+        <p:nvSpPr>
+          <p:cNvPr id="14" name="Rectangle 13"/>
+          <p:cNvSpPr/>
+          <p:nvPr/>
+        </p:nvSpPr>
+        <p:spPr>
+          <a:xfrm>
+            <a:off x="8284464" y="1463040"/>
+            <a:ext cx="128016" cy="1783080"/>
+          </a:xfrm>
+          <a:prstGeom prst="rect">
+            <a:avLst/>
+          </a:prstGeom>
+          <a:solidFill>
+            <a:srgbClr val="0E7C9E"/>
+          </a:solidFill>
+          <a:ln>
+            <a:noFill/>
+          </a:ln>
+          <a:effectLst/>
+        </p:spPr>
+        <p:style>
+          <a:lnRef idx="1">
+            <a:schemeClr val="accent1"/>
+          </a:lnRef>
+          <a:fillRef idx="3">
+            <a:schemeClr val="accent1"/>
+          </a:fillRef>
+          <a:effectRef idx="2">
+            <a:schemeClr val="accent1"/>
+          </a:effectRef>
+          <a:fontRef idx="minor">
+            <a:schemeClr val="lt1"/>
+          </a:fontRef>
+        </p:style>
+        <p:txBody>
+          <a:bodyPr rtlCol="0" anchor="ctr"/>
+          <a:lstStyle/>
+          <a:p>
+            <a:pPr algn="ctr"/>
+          </a:p>
+        </p:txBody>
+      </p:sp>
+      <p:sp>
+        <p:nvSpPr>
+          <p:cNvPr id="15" name="TextBox 14"/>
+          <p:cNvSpPr txBox="1"/>
+          <p:nvPr/>
+        </p:nvSpPr>
+        <p:spPr>
+          <a:xfrm>
+            <a:off x="8604504" y="1645920"/>
+            <a:ext cx="3063240" cy="1463040"/>
+          </a:xfrm>
+          <a:prstGeom prst="rect">
+            <a:avLst/>
+          </a:prstGeom>
+          <a:noFill/>
+        </p:spPr>
+        <p:txBody>
+          <a:bodyPr wrap="square" anchor="t">
+            <a:spAutoFit/>
+          </a:bodyPr>
+          <a:lstStyle/>
+          <a:p>
+            <a:pPr algn="l">
+              <a:lnSpc>
+                <a:spcPct val="115000"/>
+              </a:lnSpc>
+              <a:spcAft>
+                <a:spcPts val="600"/>
+              </a:spcAft>
+            </a:pPr>
+            <a:r>
+              <a:rPr sz="1800" b="1">
+                <a:solidFill>
+                  <a:srgbClr val="0E7C9E"/>
+                </a:solidFill>
+                <a:latin typeface="Meiryo"/>
+              </a:rPr>
+              <a:t>3  承認待ちで停止</a:t>
+            </a:r>
+          </a:p>
+          <a:p>
+            <a:pPr algn="l">
+              <a:lnSpc>
+                <a:spcPct val="115000"/>
+              </a:lnSpc>
+              <a:spcAft>
+                <a:spcPts val="600"/>
+              </a:spcAft>
+            </a:pPr>
+            <a:r>
+              <a:rPr sz="500" b="0">
+                <a:solidFill>
+                  <a:srgbClr val="0E7C9E"/>
+                </a:solidFill>
+                <a:latin typeface="Meiryo"/>
+              </a:rPr>
+              <a:t/>
+            </a:r>
+          </a:p>
+          <a:p>
+            <a:pPr algn="l">
+              <a:lnSpc>
+                <a:spcPct val="115000"/>
+              </a:lnSpc>
+              <a:spcAft>
+                <a:spcPts val="600"/>
+              </a:spcAft>
+            </a:pPr>
+            <a:r>
+              <a:rPr sz="1400" b="0">
+                <a:solidFill>
+                  <a:srgbClr val="1F2430"/>
+                </a:solidFill>
+                <a:latin typeface="Meiryo"/>
+              </a:rPr>
+              <a:t>送信は人間の承認が必要
+→ ここで安全に止まる</a:t>
+            </a:r>
+          </a:p>
+        </p:txBody>
+      </p:sp>
+      <p:pic>
+        <p:nvPicPr>
+          <p:cNvPr id="16" name="Picture 15" descr="harness-demo.gif"/>
+          <p:cNvPicPr>
+            <a:picLocks noChangeAspect="1"/>
+          </p:cNvPicPr>
+          <p:nvPr/>
+        </p:nvPicPr>
+        <p:blipFill>
+          <a:blip r:embed="rId2"/>
+          <a:stretch>
+            <a:fillRect/>
+          </a:stretch>
+        </p:blipFill>
+        <p:spPr>
+          <a:xfrm>
+            <a:off x="1234440" y="3520440"/>
+            <a:ext cx="9692640" cy="3939879"/>
+          </a:xfrm>
+          <a:prstGeom prst="rect">
+            <a:avLst/>
+          </a:prstGeom>
+        </p:spPr>
+      </p:pic>
+      <p:sp>
+        <p:nvSpPr>
+          <p:cNvPr id="17" name="TextBox 16"/>
+          <p:cNvSpPr txBox="1"/>
+          <p:nvPr/>
+        </p:nvSpPr>
+        <p:spPr>
+          <a:xfrm>
+            <a:off x="548640" y="6419088"/>
+            <a:ext cx="10972800" cy="365760"/>
+          </a:xfrm>
+          <a:prstGeom prst="rect">
+            <a:avLst/>
+          </a:prstGeom>
+          <a:noFill/>
+        </p:spPr>
+        <p:txBody>
+          <a:bodyPr wrap="square" anchor="t">
             <a:spAutoFit/>
           </a:bodyPr>
           <a:lstStyle/>
@@ -8901,203 +10443,13 @@
               </a:spcAft>
             </a:pPr>
             <a:r>
-              <a:rPr sz="1900" b="1">
-                <a:solidFill>
-                  <a:srgbClr val="4C3AE3"/>
-                </a:solidFill>
-                <a:latin typeface="Meiryo"/>
-              </a:rPr>
-              <a:t>設計の叩き台</a:t>
-            </a:r>
-            <a:r>
-              <a:rPr sz="1600" b="0">
-                <a:solidFill>
-                  <a:srgbClr val="1F2430"/>
-                </a:solidFill>
-                <a:latin typeface="Meiryo"/>
-              </a:rPr>
-              <a:t>    6層を自分のプロジェクトに当てはめる出発点</a:t>
-            </a:r>
-          </a:p>
-        </p:txBody>
-      </p:sp>
-      <p:sp>
-        <p:nvSpPr>
-          <p:cNvPr id="13" name="Rectangle 12"/>
-          <p:cNvSpPr/>
-          <p:nvPr/>
-        </p:nvSpPr>
-        <p:spPr>
-          <a:xfrm>
-            <a:off x="548640" y="4572000"/>
-            <a:ext cx="11064240" cy="1234440"/>
-          </a:xfrm>
-          <a:prstGeom prst="rect">
-            <a:avLst/>
-          </a:prstGeom>
-          <a:solidFill>
-            <a:srgbClr val="F3F4FB"/>
-          </a:solidFill>
-          <a:ln>
-            <a:noFill/>
-          </a:ln>
-          <a:effectLst/>
-        </p:spPr>
-        <p:style>
-          <a:lnRef idx="1">
-            <a:schemeClr val="accent1"/>
-          </a:lnRef>
-          <a:fillRef idx="3">
-            <a:schemeClr val="accent1"/>
-          </a:fillRef>
-          <a:effectRef idx="2">
-            <a:schemeClr val="accent1"/>
-          </a:effectRef>
-          <a:fontRef idx="minor">
-            <a:schemeClr val="lt1"/>
-          </a:fontRef>
-        </p:style>
-        <p:txBody>
-          <a:bodyPr rtlCol="0" anchor="ctr"/>
-          <a:lstStyle/>
-          <a:p>
-            <a:pPr algn="ctr"/>
-          </a:p>
-        </p:txBody>
-      </p:sp>
-      <p:sp>
-        <p:nvSpPr>
-          <p:cNvPr id="14" name="Rectangle 13"/>
-          <p:cNvSpPr/>
-          <p:nvPr/>
-        </p:nvSpPr>
-        <p:spPr>
-          <a:xfrm>
-            <a:off x="548640" y="4572000"/>
-            <a:ext cx="146304" cy="1234440"/>
-          </a:xfrm>
-          <a:prstGeom prst="rect">
-            <a:avLst/>
-          </a:prstGeom>
-          <a:solidFill>
-            <a:srgbClr val="4C3AE3"/>
-          </a:solidFill>
-          <a:ln>
-            <a:noFill/>
-          </a:ln>
-          <a:effectLst/>
-        </p:spPr>
-        <p:style>
-          <a:lnRef idx="1">
-            <a:schemeClr val="accent1"/>
-          </a:lnRef>
-          <a:fillRef idx="3">
-            <a:schemeClr val="accent1"/>
-          </a:fillRef>
-          <a:effectRef idx="2">
-            <a:schemeClr val="accent1"/>
-          </a:effectRef>
-          <a:fontRef idx="minor">
-            <a:schemeClr val="lt1"/>
-          </a:fontRef>
-        </p:style>
-        <p:txBody>
-          <a:bodyPr rtlCol="0" anchor="ctr"/>
-          <a:lstStyle/>
-          <a:p>
-            <a:pPr algn="ctr"/>
-          </a:p>
-        </p:txBody>
-      </p:sp>
-      <p:sp>
-        <p:nvSpPr>
-          <p:cNvPr id="15" name="TextBox 14"/>
-          <p:cNvSpPr txBox="1"/>
-          <p:nvPr/>
-        </p:nvSpPr>
-        <p:spPr>
-          <a:xfrm>
-            <a:off x="914400" y="4754880"/>
-            <a:ext cx="10424160" cy="914400"/>
-          </a:xfrm>
-          <a:prstGeom prst="rect">
-            <a:avLst/>
-          </a:prstGeom>
-          <a:noFill/>
-        </p:spPr>
-        <p:txBody>
-          <a:bodyPr wrap="square" anchor="ctr">
-            <a:spAutoFit/>
-          </a:bodyPr>
-          <a:lstStyle/>
-          <a:p>
-            <a:pPr algn="l">
-              <a:lnSpc>
-                <a:spcPct val="108000"/>
-              </a:lnSpc>
-              <a:spcAft>
-                <a:spcPts val="600"/>
-              </a:spcAft>
-            </a:pPr>
-            <a:r>
-              <a:rPr sz="1900" b="1">
-                <a:solidFill>
-                  <a:srgbClr val="4C3AE3"/>
-                </a:solidFill>
-                <a:latin typeface="Meiryo"/>
-              </a:rPr>
-              <a:t>安全弁の実演</a:t>
-            </a:r>
-            <a:r>
-              <a:rPr sz="1600" b="0">
-                <a:solidFill>
-                  <a:srgbClr val="1F2430"/>
-                </a:solidFill>
-                <a:latin typeface="Meiryo"/>
-              </a:rPr>
-              <a:t>    本番デプロイ/送信は必ず人間承認で止まる、を具体的に示す</a:t>
-            </a:r>
-          </a:p>
-        </p:txBody>
-      </p:sp>
-      <p:sp>
-        <p:nvSpPr>
-          <p:cNvPr id="16" name="TextBox 15"/>
-          <p:cNvSpPr txBox="1"/>
-          <p:nvPr/>
-        </p:nvSpPr>
-        <p:spPr>
-          <a:xfrm>
-            <a:off x="548640" y="6126480"/>
-            <a:ext cx="10972800" cy="548640"/>
-          </a:xfrm>
-          <a:prstGeom prst="rect">
-            <a:avLst/>
-          </a:prstGeom>
-          <a:noFill/>
-        </p:spPr>
-        <p:txBody>
-          <a:bodyPr wrap="square" anchor="t">
-            <a:spAutoFit/>
-          </a:bodyPr>
-          <a:lstStyle/>
-          <a:p>
-            <a:pPr algn="l">
-              <a:lnSpc>
-                <a:spcPct val="108000"/>
-              </a:lnSpc>
-              <a:spcAft>
-                <a:spcPts val="600"/>
-              </a:spcAft>
-            </a:pPr>
-            <a:r>
-              <a:rPr sz="1500" b="1">
+              <a:rPr sz="1100" b="0">
                 <a:solidFill>
                   <a:srgbClr val="5B6372"/>
                 </a:solidFill>
                 <a:latin typeface="Meiryo"/>
               </a:rPr>
-              <a:t>要は「プロンプトを強くする」のではなく「環境（手綱と鞍）を設計する」を、動くコードで理解する教材。</a:t>
+              <a:t>↑ スライドショーで再生すると実際の端末出力がアニメーションします</a:t>
             </a:r>
           </a:p>
         </p:txBody>
@@ -9290,6 +10642,1879 @@
                 <a:latin typeface="Meiryo"/>
               </a:rPr>
               <a:t>06</a:t>
+            </a:r>
+          </a:p>
+        </p:txBody>
+      </p:sp>
+      <p:sp>
+        <p:nvSpPr>
+          <p:cNvPr id="6" name="TextBox 5"/>
+          <p:cNvSpPr txBox="1"/>
+          <p:nvPr/>
+        </p:nvSpPr>
+        <p:spPr>
+          <a:xfrm>
+            <a:off x="1371600" y="91440"/>
+            <a:ext cx="10332720" cy="868680"/>
+          </a:xfrm>
+          <a:prstGeom prst="rect">
+            <a:avLst/>
+          </a:prstGeom>
+          <a:noFill/>
+        </p:spPr>
+        <p:txBody>
+          <a:bodyPr wrap="square" anchor="ctr">
+            <a:spAutoFit/>
+          </a:bodyPr>
+          <a:lstStyle/>
+          <a:p>
+            <a:pPr algn="l">
+              <a:lnSpc>
+                <a:spcPct val="108000"/>
+              </a:lnSpc>
+              <a:spcAft>
+                <a:spcPts val="600"/>
+              </a:spcAft>
+            </a:pPr>
+            <a:r>
+              <a:rPr sz="2700" b="1">
+                <a:solidFill>
+                  <a:srgbClr val="FFFFFF"/>
+                </a:solidFill>
+                <a:latin typeface="Meiryo"/>
+              </a:rPr>
+              <a:t>1行変えるだけで学べる4つのこと</a:t>
+            </a:r>
+          </a:p>
+          <a:p>
+            <a:pPr algn="l">
+              <a:lnSpc>
+                <a:spcPct val="108000"/>
+              </a:lnSpc>
+              <a:spcAft>
+                <a:spcPts val="600"/>
+              </a:spcAft>
+            </a:pPr>
+            <a:r>
+              <a:rPr sz="1300" b="0">
+                <a:solidFill>
+                  <a:srgbClr val="D9D4FF"/>
+                </a:solidFill>
+                <a:latin typeface="Meiryo"/>
+              </a:rPr>
+              <a:t>README「★自分で壊して学ぶ」</a:t>
+            </a:r>
+          </a:p>
+        </p:txBody>
+      </p:sp>
+      <p:sp>
+        <p:nvSpPr>
+          <p:cNvPr id="7" name="Rectangle 6"/>
+          <p:cNvSpPr/>
+          <p:nvPr/>
+        </p:nvSpPr>
+        <p:spPr>
+          <a:xfrm>
+            <a:off x="548640" y="1508760"/>
+            <a:ext cx="3931920" cy="868680"/>
+          </a:xfrm>
+          <a:prstGeom prst="rect">
+            <a:avLst/>
+          </a:prstGeom>
+          <a:solidFill>
+            <a:srgbClr val="4C3AE3"/>
+          </a:solidFill>
+          <a:ln>
+            <a:noFill/>
+          </a:ln>
+          <a:effectLst/>
+        </p:spPr>
+        <p:style>
+          <a:lnRef idx="1">
+            <a:schemeClr val="accent1"/>
+          </a:lnRef>
+          <a:fillRef idx="3">
+            <a:schemeClr val="accent1"/>
+          </a:fillRef>
+          <a:effectRef idx="2">
+            <a:schemeClr val="accent1"/>
+          </a:effectRef>
+          <a:fontRef idx="minor">
+            <a:schemeClr val="lt1"/>
+          </a:fontRef>
+        </p:style>
+        <p:txBody>
+          <a:bodyPr rtlCol="0" anchor="ctr"/>
+          <a:lstStyle/>
+          <a:p>
+            <a:pPr algn="ctr"/>
+          </a:p>
+        </p:txBody>
+      </p:sp>
+      <p:sp>
+        <p:nvSpPr>
+          <p:cNvPr id="8" name="TextBox 7"/>
+          <p:cNvSpPr txBox="1"/>
+          <p:nvPr/>
+        </p:nvSpPr>
+        <p:spPr>
+          <a:xfrm>
+            <a:off x="658368" y="1508760"/>
+            <a:ext cx="3712464" cy="868680"/>
+          </a:xfrm>
+          <a:prstGeom prst="rect">
+            <a:avLst/>
+          </a:prstGeom>
+          <a:noFill/>
+        </p:spPr>
+        <p:txBody>
+          <a:bodyPr wrap="square" anchor="ctr">
+            <a:spAutoFit/>
+          </a:bodyPr>
+          <a:lstStyle/>
+          <a:p>
+            <a:pPr algn="l">
+              <a:lnSpc>
+                <a:spcPct val="108000"/>
+              </a:lnSpc>
+              <a:spcAft>
+                <a:spcPts val="600"/>
+              </a:spcAft>
+            </a:pPr>
+            <a:r>
+              <a:rPr sz="1600" b="1">
+                <a:solidFill>
+                  <a:srgbClr val="FFFFFF"/>
+                </a:solidFill>
+                <a:latin typeface="Meiryo"/>
+              </a:rPr>
+              <a:t>変えるもの</a:t>
+            </a:r>
+          </a:p>
+        </p:txBody>
+      </p:sp>
+      <p:sp>
+        <p:nvSpPr>
+          <p:cNvPr id="9" name="Rectangle 8"/>
+          <p:cNvSpPr/>
+          <p:nvPr/>
+        </p:nvSpPr>
+        <p:spPr>
+          <a:xfrm>
+            <a:off x="4480560" y="1508760"/>
+            <a:ext cx="7132320" cy="868680"/>
+          </a:xfrm>
+          <a:prstGeom prst="rect">
+            <a:avLst/>
+          </a:prstGeom>
+          <a:solidFill>
+            <a:srgbClr val="4C3AE3"/>
+          </a:solidFill>
+          <a:ln>
+            <a:noFill/>
+          </a:ln>
+          <a:effectLst/>
+        </p:spPr>
+        <p:style>
+          <a:lnRef idx="1">
+            <a:schemeClr val="accent1"/>
+          </a:lnRef>
+          <a:fillRef idx="3">
+            <a:schemeClr val="accent1"/>
+          </a:fillRef>
+          <a:effectRef idx="2">
+            <a:schemeClr val="accent1"/>
+          </a:effectRef>
+          <a:fontRef idx="minor">
+            <a:schemeClr val="lt1"/>
+          </a:fontRef>
+        </p:style>
+        <p:txBody>
+          <a:bodyPr rtlCol="0" anchor="ctr"/>
+          <a:lstStyle/>
+          <a:p>
+            <a:pPr algn="ctr"/>
+          </a:p>
+        </p:txBody>
+      </p:sp>
+      <p:sp>
+        <p:nvSpPr>
+          <p:cNvPr id="10" name="TextBox 9"/>
+          <p:cNvSpPr txBox="1"/>
+          <p:nvPr/>
+        </p:nvSpPr>
+        <p:spPr>
+          <a:xfrm>
+            <a:off x="4590288" y="1508760"/>
+            <a:ext cx="6912864" cy="868680"/>
+          </a:xfrm>
+          <a:prstGeom prst="rect">
+            <a:avLst/>
+          </a:prstGeom>
+          <a:noFill/>
+        </p:spPr>
+        <p:txBody>
+          <a:bodyPr wrap="square" anchor="ctr">
+            <a:spAutoFit/>
+          </a:bodyPr>
+          <a:lstStyle/>
+          <a:p>
+            <a:pPr algn="l">
+              <a:lnSpc>
+                <a:spcPct val="108000"/>
+              </a:lnSpc>
+              <a:spcAft>
+                <a:spcPts val="600"/>
+              </a:spcAft>
+            </a:pPr>
+            <a:r>
+              <a:rPr sz="1600" b="1">
+                <a:solidFill>
+                  <a:srgbClr val="FFFFFF"/>
+                </a:solidFill>
+                <a:latin typeface="Meiryo"/>
+              </a:rPr>
+              <a:t>分かること</a:t>
+            </a:r>
+          </a:p>
+        </p:txBody>
+      </p:sp>
+      <p:sp>
+        <p:nvSpPr>
+          <p:cNvPr id="11" name="Rectangle 10"/>
+          <p:cNvSpPr/>
+          <p:nvPr/>
+        </p:nvSpPr>
+        <p:spPr>
+          <a:xfrm>
+            <a:off x="548640" y="2377440"/>
+            <a:ext cx="3931920" cy="868680"/>
+          </a:xfrm>
+          <a:prstGeom prst="rect">
+            <a:avLst/>
+          </a:prstGeom>
+          <a:solidFill>
+            <a:srgbClr val="F3F4FB"/>
+          </a:solidFill>
+          <a:ln w="12700">
+            <a:solidFill>
+              <a:srgbClr val="E3E5F0"/>
+            </a:solidFill>
+          </a:ln>
+          <a:effectLst/>
+        </p:spPr>
+        <p:style>
+          <a:lnRef idx="1">
+            <a:schemeClr val="accent1"/>
+          </a:lnRef>
+          <a:fillRef idx="3">
+            <a:schemeClr val="accent1"/>
+          </a:fillRef>
+          <a:effectRef idx="2">
+            <a:schemeClr val="accent1"/>
+          </a:effectRef>
+          <a:fontRef idx="minor">
+            <a:schemeClr val="lt1"/>
+          </a:fontRef>
+        </p:style>
+        <p:txBody>
+          <a:bodyPr rtlCol="0" anchor="ctr"/>
+          <a:lstStyle/>
+          <a:p>
+            <a:pPr algn="ctr"/>
+          </a:p>
+        </p:txBody>
+      </p:sp>
+      <p:sp>
+        <p:nvSpPr>
+          <p:cNvPr id="12" name="TextBox 11"/>
+          <p:cNvSpPr txBox="1"/>
+          <p:nvPr/>
+        </p:nvSpPr>
+        <p:spPr>
+          <a:xfrm>
+            <a:off x="658368" y="2377440"/>
+            <a:ext cx="3712464" cy="868680"/>
+          </a:xfrm>
+          <a:prstGeom prst="rect">
+            <a:avLst/>
+          </a:prstGeom>
+          <a:noFill/>
+        </p:spPr>
+        <p:txBody>
+          <a:bodyPr wrap="square" anchor="ctr">
+            <a:spAutoFit/>
+          </a:bodyPr>
+          <a:lstStyle/>
+          <a:p>
+            <a:pPr algn="l">
+              <a:lnSpc>
+                <a:spcPct val="108000"/>
+              </a:lnSpc>
+              <a:spcAft>
+                <a:spcPts val="0"/>
+              </a:spcAft>
+            </a:pPr>
+            <a:r>
+              <a:rPr sz="1500" b="1">
+                <a:solidFill>
+                  <a:srgbClr val="1F2430"/>
+                </a:solidFill>
+                <a:latin typeface="Meiryo"/>
+              </a:rPr>
+              <a:t>検証チェックを消す</a:t>
+            </a:r>
+          </a:p>
+        </p:txBody>
+      </p:sp>
+      <p:sp>
+        <p:nvSpPr>
+          <p:cNvPr id="13" name="Rectangle 12"/>
+          <p:cNvSpPr/>
+          <p:nvPr/>
+        </p:nvSpPr>
+        <p:spPr>
+          <a:xfrm>
+            <a:off x="4480560" y="2377440"/>
+            <a:ext cx="7132320" cy="868680"/>
+          </a:xfrm>
+          <a:prstGeom prst="rect">
+            <a:avLst/>
+          </a:prstGeom>
+          <a:solidFill>
+            <a:srgbClr val="F3F4FB"/>
+          </a:solidFill>
+          <a:ln w="12700">
+            <a:solidFill>
+              <a:srgbClr val="E3E5F0"/>
+            </a:solidFill>
+          </a:ln>
+          <a:effectLst/>
+        </p:spPr>
+        <p:style>
+          <a:lnRef idx="1">
+            <a:schemeClr val="accent1"/>
+          </a:lnRef>
+          <a:fillRef idx="3">
+            <a:schemeClr val="accent1"/>
+          </a:fillRef>
+          <a:effectRef idx="2">
+            <a:schemeClr val="accent1"/>
+          </a:effectRef>
+          <a:fontRef idx="minor">
+            <a:schemeClr val="lt1"/>
+          </a:fontRef>
+        </p:style>
+        <p:txBody>
+          <a:bodyPr rtlCol="0" anchor="ctr"/>
+          <a:lstStyle/>
+          <a:p>
+            <a:pPr algn="ctr"/>
+          </a:p>
+        </p:txBody>
+      </p:sp>
+      <p:sp>
+        <p:nvSpPr>
+          <p:cNvPr id="14" name="TextBox 13"/>
+          <p:cNvSpPr txBox="1"/>
+          <p:nvPr/>
+        </p:nvSpPr>
+        <p:spPr>
+          <a:xfrm>
+            <a:off x="4590288" y="2377440"/>
+            <a:ext cx="6912864" cy="868680"/>
+          </a:xfrm>
+          <a:prstGeom prst="rect">
+            <a:avLst/>
+          </a:prstGeom>
+          <a:noFill/>
+        </p:spPr>
+        <p:txBody>
+          <a:bodyPr wrap="square" anchor="ctr">
+            <a:spAutoFit/>
+          </a:bodyPr>
+          <a:lstStyle/>
+          <a:p>
+            <a:pPr algn="l">
+              <a:lnSpc>
+                <a:spcPct val="108000"/>
+              </a:lnSpc>
+              <a:spcAft>
+                <a:spcPts val="0"/>
+              </a:spcAft>
+            </a:pPr>
+            <a:r>
+              <a:rPr sz="1500" b="0">
+                <a:solidFill>
+                  <a:srgbClr val="1F2430"/>
+                </a:solidFill>
+                <a:latin typeface="Meiryo"/>
+              </a:rPr>
+              <a:t>証拠が細かいほどAIは自力で直せる。証拠がないと直せない</a:t>
+            </a:r>
+          </a:p>
+        </p:txBody>
+      </p:sp>
+      <p:sp>
+        <p:nvSpPr>
+          <p:cNvPr id="15" name="Rectangle 14"/>
+          <p:cNvSpPr/>
+          <p:nvPr/>
+        </p:nvSpPr>
+        <p:spPr>
+          <a:xfrm>
+            <a:off x="548640" y="3246120"/>
+            <a:ext cx="3931920" cy="868680"/>
+          </a:xfrm>
+          <a:prstGeom prst="rect">
+            <a:avLst/>
+          </a:prstGeom>
+          <a:solidFill>
+            <a:srgbClr val="FFFFFF"/>
+          </a:solidFill>
+          <a:ln w="12700">
+            <a:solidFill>
+              <a:srgbClr val="E3E5F0"/>
+            </a:solidFill>
+          </a:ln>
+          <a:effectLst/>
+        </p:spPr>
+        <p:style>
+          <a:lnRef idx="1">
+            <a:schemeClr val="accent1"/>
+          </a:lnRef>
+          <a:fillRef idx="3">
+            <a:schemeClr val="accent1"/>
+          </a:fillRef>
+          <a:effectRef idx="2">
+            <a:schemeClr val="accent1"/>
+          </a:effectRef>
+          <a:fontRef idx="minor">
+            <a:schemeClr val="lt1"/>
+          </a:fontRef>
+        </p:style>
+        <p:txBody>
+          <a:bodyPr rtlCol="0" anchor="ctr"/>
+          <a:lstStyle/>
+          <a:p>
+            <a:pPr algn="ctr"/>
+          </a:p>
+        </p:txBody>
+      </p:sp>
+      <p:sp>
+        <p:nvSpPr>
+          <p:cNvPr id="16" name="TextBox 15"/>
+          <p:cNvSpPr txBox="1"/>
+          <p:nvPr/>
+        </p:nvSpPr>
+        <p:spPr>
+          <a:xfrm>
+            <a:off x="658368" y="3246120"/>
+            <a:ext cx="3712464" cy="868680"/>
+          </a:xfrm>
+          <a:prstGeom prst="rect">
+            <a:avLst/>
+          </a:prstGeom>
+          <a:noFill/>
+        </p:spPr>
+        <p:txBody>
+          <a:bodyPr wrap="square" anchor="ctr">
+            <a:spAutoFit/>
+          </a:bodyPr>
+          <a:lstStyle/>
+          <a:p>
+            <a:pPr algn="l">
+              <a:lnSpc>
+                <a:spcPct val="108000"/>
+              </a:lnSpc>
+              <a:spcAft>
+                <a:spcPts val="0"/>
+              </a:spcAft>
+            </a:pPr>
+            <a:r>
+              <a:rPr sz="1500" b="1">
+                <a:solidFill>
+                  <a:srgbClr val="1F2430"/>
+                </a:solidFill>
+                <a:latin typeface="Meiryo"/>
+              </a:rPr>
+              <a:t>契約の max_repairs を変える</a:t>
+            </a:r>
+          </a:p>
+        </p:txBody>
+      </p:sp>
+      <p:sp>
+        <p:nvSpPr>
+          <p:cNvPr id="17" name="Rectangle 16"/>
+          <p:cNvSpPr/>
+          <p:nvPr/>
+        </p:nvSpPr>
+        <p:spPr>
+          <a:xfrm>
+            <a:off x="4480560" y="3246120"/>
+            <a:ext cx="7132320" cy="868680"/>
+          </a:xfrm>
+          <a:prstGeom prst="rect">
+            <a:avLst/>
+          </a:prstGeom>
+          <a:solidFill>
+            <a:srgbClr val="FFFFFF"/>
+          </a:solidFill>
+          <a:ln w="12700">
+            <a:solidFill>
+              <a:srgbClr val="E3E5F0"/>
+            </a:solidFill>
+          </a:ln>
+          <a:effectLst/>
+        </p:spPr>
+        <p:style>
+          <a:lnRef idx="1">
+            <a:schemeClr val="accent1"/>
+          </a:lnRef>
+          <a:fillRef idx="3">
+            <a:schemeClr val="accent1"/>
+          </a:fillRef>
+          <a:effectRef idx="2">
+            <a:schemeClr val="accent1"/>
+          </a:effectRef>
+          <a:fontRef idx="minor">
+            <a:schemeClr val="lt1"/>
+          </a:fontRef>
+        </p:style>
+        <p:txBody>
+          <a:bodyPr rtlCol="0" anchor="ctr"/>
+          <a:lstStyle/>
+          <a:p>
+            <a:pPr algn="ctr"/>
+          </a:p>
+        </p:txBody>
+      </p:sp>
+      <p:sp>
+        <p:nvSpPr>
+          <p:cNvPr id="18" name="TextBox 17"/>
+          <p:cNvSpPr txBox="1"/>
+          <p:nvPr/>
+        </p:nvSpPr>
+        <p:spPr>
+          <a:xfrm>
+            <a:off x="4590288" y="3246120"/>
+            <a:ext cx="6912864" cy="868680"/>
+          </a:xfrm>
+          <a:prstGeom prst="rect">
+            <a:avLst/>
+          </a:prstGeom>
+          <a:noFill/>
+        </p:spPr>
+        <p:txBody>
+          <a:bodyPr wrap="square" anchor="ctr">
+            <a:spAutoFit/>
+          </a:bodyPr>
+          <a:lstStyle/>
+          <a:p>
+            <a:pPr algn="l">
+              <a:lnSpc>
+                <a:spcPct val="108000"/>
+              </a:lnSpc>
+              <a:spcAft>
+                <a:spcPts val="0"/>
+              </a:spcAft>
+            </a:pPr>
+            <a:r>
+              <a:rPr sz="1500" b="0">
+                <a:solidFill>
+                  <a:srgbClr val="1F2430"/>
+                </a:solidFill>
+                <a:latin typeface="Meiryo"/>
+              </a:rPr>
+              <a:t>何回リトライするかはAIでなくルール（契約）が決める</a:t>
+            </a:r>
+          </a:p>
+        </p:txBody>
+      </p:sp>
+      <p:sp>
+        <p:nvSpPr>
+          <p:cNvPr id="19" name="Rectangle 18"/>
+          <p:cNvSpPr/>
+          <p:nvPr/>
+        </p:nvSpPr>
+        <p:spPr>
+          <a:xfrm>
+            <a:off x="548640" y="4114800"/>
+            <a:ext cx="3931920" cy="868680"/>
+          </a:xfrm>
+          <a:prstGeom prst="rect">
+            <a:avLst/>
+          </a:prstGeom>
+          <a:solidFill>
+            <a:srgbClr val="F3F4FB"/>
+          </a:solidFill>
+          <a:ln w="12700">
+            <a:solidFill>
+              <a:srgbClr val="E3E5F0"/>
+            </a:solidFill>
+          </a:ln>
+          <a:effectLst/>
+        </p:spPr>
+        <p:style>
+          <a:lnRef idx="1">
+            <a:schemeClr val="accent1"/>
+          </a:lnRef>
+          <a:fillRef idx="3">
+            <a:schemeClr val="accent1"/>
+          </a:fillRef>
+          <a:effectRef idx="2">
+            <a:schemeClr val="accent1"/>
+          </a:effectRef>
+          <a:fontRef idx="minor">
+            <a:schemeClr val="lt1"/>
+          </a:fontRef>
+        </p:style>
+        <p:txBody>
+          <a:bodyPr rtlCol="0" anchor="ctr"/>
+          <a:lstStyle/>
+          <a:p>
+            <a:pPr algn="ctr"/>
+          </a:p>
+        </p:txBody>
+      </p:sp>
+      <p:sp>
+        <p:nvSpPr>
+          <p:cNvPr id="20" name="TextBox 19"/>
+          <p:cNvSpPr txBox="1"/>
+          <p:nvPr/>
+        </p:nvSpPr>
+        <p:spPr>
+          <a:xfrm>
+            <a:off x="658368" y="4114800"/>
+            <a:ext cx="3712464" cy="868680"/>
+          </a:xfrm>
+          <a:prstGeom prst="rect">
+            <a:avLst/>
+          </a:prstGeom>
+          <a:noFill/>
+        </p:spPr>
+        <p:txBody>
+          <a:bodyPr wrap="square" anchor="ctr">
+            <a:spAutoFit/>
+          </a:bodyPr>
+          <a:lstStyle/>
+          <a:p>
+            <a:pPr algn="l">
+              <a:lnSpc>
+                <a:spcPct val="108000"/>
+              </a:lnSpc>
+              <a:spcAft>
+                <a:spcPts val="0"/>
+              </a:spcAft>
+            </a:pPr>
+            <a:r>
+              <a:rPr sz="1500" b="1">
+                <a:solidFill>
+                  <a:srgbClr val="1F2430"/>
+                </a:solidFill>
+                <a:latin typeface="Meiryo"/>
+              </a:rPr>
+              <a:t>権限を automatic に変える</a:t>
+            </a:r>
+          </a:p>
+        </p:txBody>
+      </p:sp>
+      <p:sp>
+        <p:nvSpPr>
+          <p:cNvPr id="21" name="Rectangle 20"/>
+          <p:cNvSpPr/>
+          <p:nvPr/>
+        </p:nvSpPr>
+        <p:spPr>
+          <a:xfrm>
+            <a:off x="4480560" y="4114800"/>
+            <a:ext cx="7132320" cy="868680"/>
+          </a:xfrm>
+          <a:prstGeom prst="rect">
+            <a:avLst/>
+          </a:prstGeom>
+          <a:solidFill>
+            <a:srgbClr val="F3F4FB"/>
+          </a:solidFill>
+          <a:ln w="12700">
+            <a:solidFill>
+              <a:srgbClr val="E3E5F0"/>
+            </a:solidFill>
+          </a:ln>
+          <a:effectLst/>
+        </p:spPr>
+        <p:style>
+          <a:lnRef idx="1">
+            <a:schemeClr val="accent1"/>
+          </a:lnRef>
+          <a:fillRef idx="3">
+            <a:schemeClr val="accent1"/>
+          </a:fillRef>
+          <a:effectRef idx="2">
+            <a:schemeClr val="accent1"/>
+          </a:effectRef>
+          <a:fontRef idx="minor">
+            <a:schemeClr val="lt1"/>
+          </a:fontRef>
+        </p:style>
+        <p:txBody>
+          <a:bodyPr rtlCol="0" anchor="ctr"/>
+          <a:lstStyle/>
+          <a:p>
+            <a:pPr algn="ctr"/>
+          </a:p>
+        </p:txBody>
+      </p:sp>
+      <p:sp>
+        <p:nvSpPr>
+          <p:cNvPr id="22" name="TextBox 21"/>
+          <p:cNvSpPr txBox="1"/>
+          <p:nvPr/>
+        </p:nvSpPr>
+        <p:spPr>
+          <a:xfrm>
+            <a:off x="4590288" y="4114800"/>
+            <a:ext cx="6912864" cy="868680"/>
+          </a:xfrm>
+          <a:prstGeom prst="rect">
+            <a:avLst/>
+          </a:prstGeom>
+          <a:noFill/>
+        </p:spPr>
+        <p:txBody>
+          <a:bodyPr wrap="square" anchor="ctr">
+            <a:spAutoFit/>
+          </a:bodyPr>
+          <a:lstStyle/>
+          <a:p>
+            <a:pPr algn="l">
+              <a:lnSpc>
+                <a:spcPct val="108000"/>
+              </a:lnSpc>
+              <a:spcAft>
+                <a:spcPts val="0"/>
+              </a:spcAft>
+            </a:pPr>
+            <a:r>
+              <a:rPr sz="1500" b="0">
+                <a:solidFill>
+                  <a:srgbClr val="1F2430"/>
+                </a:solidFill>
+                <a:latin typeface="Meiryo"/>
+              </a:rPr>
+              <a:t>AIのコードを1行も触らず承認要否だけ変えられる（提案・許可・実行の分離）</a:t>
+            </a:r>
+          </a:p>
+        </p:txBody>
+      </p:sp>
+      <p:sp>
+        <p:nvSpPr>
+          <p:cNvPr id="23" name="Rectangle 22"/>
+          <p:cNvSpPr/>
+          <p:nvPr/>
+        </p:nvSpPr>
+        <p:spPr>
+          <a:xfrm>
+            <a:off x="548640" y="4983480"/>
+            <a:ext cx="3931920" cy="868680"/>
+          </a:xfrm>
+          <a:prstGeom prst="rect">
+            <a:avLst/>
+          </a:prstGeom>
+          <a:solidFill>
+            <a:srgbClr val="FFFFFF"/>
+          </a:solidFill>
+          <a:ln w="12700">
+            <a:solidFill>
+              <a:srgbClr val="E3E5F0"/>
+            </a:solidFill>
+          </a:ln>
+          <a:effectLst/>
+        </p:spPr>
+        <p:style>
+          <a:lnRef idx="1">
+            <a:schemeClr val="accent1"/>
+          </a:lnRef>
+          <a:fillRef idx="3">
+            <a:schemeClr val="accent1"/>
+          </a:fillRef>
+          <a:effectRef idx="2">
+            <a:schemeClr val="accent1"/>
+          </a:effectRef>
+          <a:fontRef idx="minor">
+            <a:schemeClr val="lt1"/>
+          </a:fontRef>
+        </p:style>
+        <p:txBody>
+          <a:bodyPr rtlCol="0" anchor="ctr"/>
+          <a:lstStyle/>
+          <a:p>
+            <a:pPr algn="ctr"/>
+          </a:p>
+        </p:txBody>
+      </p:sp>
+      <p:sp>
+        <p:nvSpPr>
+          <p:cNvPr id="24" name="TextBox 23"/>
+          <p:cNvSpPr txBox="1"/>
+          <p:nvPr/>
+        </p:nvSpPr>
+        <p:spPr>
+          <a:xfrm>
+            <a:off x="658368" y="4983480"/>
+            <a:ext cx="3712464" cy="868680"/>
+          </a:xfrm>
+          <a:prstGeom prst="rect">
+            <a:avLst/>
+          </a:prstGeom>
+          <a:noFill/>
+        </p:spPr>
+        <p:txBody>
+          <a:bodyPr wrap="square" anchor="ctr">
+            <a:spAutoFit/>
+          </a:bodyPr>
+          <a:lstStyle/>
+          <a:p>
+            <a:pPr algn="l">
+              <a:lnSpc>
+                <a:spcPct val="108000"/>
+              </a:lnSpc>
+              <a:spcAft>
+                <a:spcPts val="0"/>
+              </a:spcAft>
+            </a:pPr>
+            <a:r>
+              <a:rPr sz="1500" b="1">
+                <a:solidFill>
+                  <a:srgbClr val="1F2430"/>
+                </a:solidFill>
+                <a:latin typeface="Meiryo"/>
+              </a:rPr>
+              <a:t>コンテキストから証拠を消す</a:t>
+            </a:r>
+          </a:p>
+        </p:txBody>
+      </p:sp>
+      <p:sp>
+        <p:nvSpPr>
+          <p:cNvPr id="25" name="Rectangle 24"/>
+          <p:cNvSpPr/>
+          <p:nvPr/>
+        </p:nvSpPr>
+        <p:spPr>
+          <a:xfrm>
+            <a:off x="4480560" y="4983480"/>
+            <a:ext cx="7132320" cy="868680"/>
+          </a:xfrm>
+          <a:prstGeom prst="rect">
+            <a:avLst/>
+          </a:prstGeom>
+          <a:solidFill>
+            <a:srgbClr val="FFFFFF"/>
+          </a:solidFill>
+          <a:ln w="12700">
+            <a:solidFill>
+              <a:srgbClr val="E3E5F0"/>
+            </a:solidFill>
+          </a:ln>
+          <a:effectLst/>
+        </p:spPr>
+        <p:style>
+          <a:lnRef idx="1">
+            <a:schemeClr val="accent1"/>
+          </a:lnRef>
+          <a:fillRef idx="3">
+            <a:schemeClr val="accent1"/>
+          </a:fillRef>
+          <a:effectRef idx="2">
+            <a:schemeClr val="accent1"/>
+          </a:effectRef>
+          <a:fontRef idx="minor">
+            <a:schemeClr val="lt1"/>
+          </a:fontRef>
+        </p:style>
+        <p:txBody>
+          <a:bodyPr rtlCol="0" anchor="ctr"/>
+          <a:lstStyle/>
+          <a:p>
+            <a:pPr algn="ctr"/>
+          </a:p>
+        </p:txBody>
+      </p:sp>
+      <p:sp>
+        <p:nvSpPr>
+          <p:cNvPr id="26" name="TextBox 25"/>
+          <p:cNvSpPr txBox="1"/>
+          <p:nvPr/>
+        </p:nvSpPr>
+        <p:spPr>
+          <a:xfrm>
+            <a:off x="4590288" y="4983480"/>
+            <a:ext cx="6912864" cy="868680"/>
+          </a:xfrm>
+          <a:prstGeom prst="rect">
+            <a:avLst/>
+          </a:prstGeom>
+          <a:noFill/>
+        </p:spPr>
+        <p:txBody>
+          <a:bodyPr wrap="square" anchor="ctr">
+            <a:spAutoFit/>
+          </a:bodyPr>
+          <a:lstStyle/>
+          <a:p>
+            <a:pPr algn="l">
+              <a:lnSpc>
+                <a:spcPct val="108000"/>
+              </a:lnSpc>
+              <a:spcAft>
+                <a:spcPts val="0"/>
+              </a:spcAft>
+            </a:pPr>
+            <a:r>
+              <a:rPr sz="1500" b="0">
+                <a:solidFill>
+                  <a:srgbClr val="1F2430"/>
+                </a:solidFill>
+                <a:latin typeface="Meiryo"/>
+              </a:rPr>
+              <a:t>環境が証拠を返さないとAIは同じ失敗を繰り返す</a:t>
+            </a:r>
+          </a:p>
+        </p:txBody>
+      </p:sp>
+      <p:sp>
+        <p:nvSpPr>
+          <p:cNvPr id="27" name="TextBox 26"/>
+          <p:cNvSpPr txBox="1"/>
+          <p:nvPr/>
+        </p:nvSpPr>
+        <p:spPr>
+          <a:xfrm>
+            <a:off x="548640" y="5394960"/>
+            <a:ext cx="10972800" cy="1097280"/>
+          </a:xfrm>
+          <a:prstGeom prst="rect">
+            <a:avLst/>
+          </a:prstGeom>
+          <a:noFill/>
+        </p:spPr>
+        <p:txBody>
+          <a:bodyPr wrap="square" anchor="t">
+            <a:spAutoFit/>
+          </a:bodyPr>
+          <a:lstStyle/>
+          <a:p>
+            <a:pPr algn="l">
+              <a:lnSpc>
+                <a:spcPct val="120000"/>
+              </a:lnSpc>
+              <a:spcAft>
+                <a:spcPts val="600"/>
+              </a:spcAft>
+            </a:pPr>
+            <a:r>
+              <a:rPr sz="1500" b="1">
+                <a:solidFill>
+                  <a:srgbClr val="1EA05A"/>
+                </a:solidFill>
+                <a:latin typeface="Meiryo"/>
+              </a:rPr>
+              <a:t>実証済み</a:t>
+            </a:r>
+            <a:r>
+              <a:rPr sz="1500" b="0">
+                <a:solidFill>
+                  <a:srgbClr val="1F2430"/>
+                </a:solidFill>
+                <a:latin typeface="Meiryo"/>
+              </a:rPr>
+              <a:t>：コンテキストから証拠を外すと、AIは修復を空振りして escalate する — を実走で確認。</a:t>
+            </a:r>
+          </a:p>
+        </p:txBody>
+      </p:sp>
+    </p:spTree>
+  </p:cSld>
+  <p:clrMapOvr>
+    <a:masterClrMapping/>
+  </p:clrMapOvr>
+</p:sld>
+</file>
+
+<file path=ppt/slides/slide8.xml><?xml version="1.0" encoding="utf-8"?>
+<p:sld xmlns:a="http://schemas.openxmlformats.org/drawingml/2006/main" xmlns:p="http://schemas.openxmlformats.org/presentationml/2006/main" xmlns:r="http://schemas.openxmlformats.org/officeDocument/2006/relationships">
+  <p:cSld>
+    <p:spTree>
+      <p:nvGrpSpPr>
+        <p:cNvPr id="1" name=""/>
+        <p:cNvGrpSpPr/>
+        <p:nvPr/>
+      </p:nvGrpSpPr>
+      <p:grpSpPr/>
+      <p:sp>
+        <p:nvSpPr>
+          <p:cNvPr id="2" name="Rectangle 1"/>
+          <p:cNvSpPr/>
+          <p:nvPr/>
+        </p:nvSpPr>
+        <p:spPr>
+          <a:xfrm>
+            <a:off x="0" y="0"/>
+            <a:ext cx="12191695" cy="6858000"/>
+          </a:xfrm>
+          <a:prstGeom prst="rect">
+            <a:avLst/>
+          </a:prstGeom>
+          <a:solidFill>
+            <a:srgbClr val="FFFFFF"/>
+          </a:solidFill>
+          <a:ln>
+            <a:noFill/>
+          </a:ln>
+          <a:effectLst/>
+        </p:spPr>
+        <p:style>
+          <a:lnRef idx="1">
+            <a:schemeClr val="accent1"/>
+          </a:lnRef>
+          <a:fillRef idx="3">
+            <a:schemeClr val="accent1"/>
+          </a:fillRef>
+          <a:effectRef idx="2">
+            <a:schemeClr val="accent1"/>
+          </a:effectRef>
+          <a:fontRef idx="minor">
+            <a:schemeClr val="lt1"/>
+          </a:fontRef>
+        </p:style>
+        <p:txBody>
+          <a:bodyPr rtlCol="0" anchor="ctr"/>
+          <a:lstStyle/>
+          <a:p>
+            <a:pPr algn="ctr"/>
+          </a:p>
+        </p:txBody>
+      </p:sp>
+      <p:sp>
+        <p:nvSpPr>
+          <p:cNvPr id="3" name="Rectangle 2"/>
+          <p:cNvSpPr/>
+          <p:nvPr/>
+        </p:nvSpPr>
+        <p:spPr>
+          <a:xfrm>
+            <a:off x="0" y="0"/>
+            <a:ext cx="12191695" cy="1051560"/>
+          </a:xfrm>
+          <a:prstGeom prst="rect">
+            <a:avLst/>
+          </a:prstGeom>
+          <a:solidFill>
+            <a:srgbClr val="4C3AE3"/>
+          </a:solidFill>
+          <a:ln>
+            <a:noFill/>
+          </a:ln>
+          <a:effectLst/>
+        </p:spPr>
+        <p:style>
+          <a:lnRef idx="1">
+            <a:schemeClr val="accent1"/>
+          </a:lnRef>
+          <a:fillRef idx="3">
+            <a:schemeClr val="accent1"/>
+          </a:fillRef>
+          <a:effectRef idx="2">
+            <a:schemeClr val="accent1"/>
+          </a:effectRef>
+          <a:fontRef idx="minor">
+            <a:schemeClr val="lt1"/>
+          </a:fontRef>
+        </p:style>
+        <p:txBody>
+          <a:bodyPr rtlCol="0" anchor="ctr"/>
+          <a:lstStyle/>
+          <a:p>
+            <a:pPr algn="ctr"/>
+          </a:p>
+        </p:txBody>
+      </p:sp>
+      <p:sp>
+        <p:nvSpPr>
+          <p:cNvPr id="4" name="Rectangle 3"/>
+          <p:cNvSpPr/>
+          <p:nvPr/>
+        </p:nvSpPr>
+        <p:spPr>
+          <a:xfrm>
+            <a:off x="0" y="1051560"/>
+            <a:ext cx="12191695" cy="48000"/>
+          </a:xfrm>
+          <a:prstGeom prst="rect">
+            <a:avLst/>
+          </a:prstGeom>
+          <a:solidFill>
+            <a:srgbClr val="9B8CFF"/>
+          </a:solidFill>
+          <a:ln>
+            <a:noFill/>
+          </a:ln>
+          <a:effectLst/>
+        </p:spPr>
+        <p:style>
+          <a:lnRef idx="1">
+            <a:schemeClr val="accent1"/>
+          </a:lnRef>
+          <a:fillRef idx="3">
+            <a:schemeClr val="accent1"/>
+          </a:fillRef>
+          <a:effectRef idx="2">
+            <a:schemeClr val="accent1"/>
+          </a:effectRef>
+          <a:fontRef idx="minor">
+            <a:schemeClr val="lt1"/>
+          </a:fontRef>
+        </p:style>
+        <p:txBody>
+          <a:bodyPr rtlCol="0" anchor="ctr"/>
+          <a:lstStyle/>
+          <a:p>
+            <a:pPr algn="ctr"/>
+          </a:p>
+        </p:txBody>
+      </p:sp>
+      <p:sp>
+        <p:nvSpPr>
+          <p:cNvPr id="5" name="TextBox 4"/>
+          <p:cNvSpPr txBox="1"/>
+          <p:nvPr/>
+        </p:nvSpPr>
+        <p:spPr>
+          <a:xfrm>
+            <a:off x="502920" y="109728"/>
+            <a:ext cx="1005840" cy="822960"/>
+          </a:xfrm>
+          <a:prstGeom prst="rect">
+            <a:avLst/>
+          </a:prstGeom>
+          <a:noFill/>
+        </p:spPr>
+        <p:txBody>
+          <a:bodyPr wrap="square" anchor="ctr">
+            <a:spAutoFit/>
+          </a:bodyPr>
+          <a:lstStyle/>
+          <a:p>
+            <a:pPr algn="l">
+              <a:lnSpc>
+                <a:spcPct val="108000"/>
+              </a:lnSpc>
+              <a:spcAft>
+                <a:spcPts val="600"/>
+              </a:spcAft>
+            </a:pPr>
+            <a:r>
+              <a:rPr sz="3400" b="1">
+                <a:solidFill>
+                  <a:srgbClr val="FFFFFF"/>
+                </a:solidFill>
+                <a:latin typeface="Meiryo"/>
+              </a:rPr>
+              <a:t>07</a:t>
+            </a:r>
+          </a:p>
+        </p:txBody>
+      </p:sp>
+      <p:sp>
+        <p:nvSpPr>
+          <p:cNvPr id="6" name="TextBox 5"/>
+          <p:cNvSpPr txBox="1"/>
+          <p:nvPr/>
+        </p:nvSpPr>
+        <p:spPr>
+          <a:xfrm>
+            <a:off x="1371600" y="91440"/>
+            <a:ext cx="10332720" cy="868680"/>
+          </a:xfrm>
+          <a:prstGeom prst="rect">
+            <a:avLst/>
+          </a:prstGeom>
+          <a:noFill/>
+        </p:spPr>
+        <p:txBody>
+          <a:bodyPr wrap="square" anchor="ctr">
+            <a:spAutoFit/>
+          </a:bodyPr>
+          <a:lstStyle/>
+          <a:p>
+            <a:pPr algn="l">
+              <a:lnSpc>
+                <a:spcPct val="108000"/>
+              </a:lnSpc>
+              <a:spcAft>
+                <a:spcPts val="600"/>
+              </a:spcAft>
+            </a:pPr>
+            <a:r>
+              <a:rPr sz="2700" b="1">
+                <a:solidFill>
+                  <a:srgbClr val="FFFFFF"/>
+                </a:solidFill>
+                <a:latin typeface="Meiryo"/>
+              </a:rPr>
+              <a:t>実務での使いどころ</a:t>
+            </a:r>
+          </a:p>
+        </p:txBody>
+      </p:sp>
+      <p:sp>
+        <p:nvSpPr>
+          <p:cNvPr id="7" name="Rectangle 6"/>
+          <p:cNvSpPr/>
+          <p:nvPr/>
+        </p:nvSpPr>
+        <p:spPr>
+          <a:xfrm>
+            <a:off x="548640" y="1554480"/>
+            <a:ext cx="11064240" cy="1234440"/>
+          </a:xfrm>
+          <a:prstGeom prst="rect">
+            <a:avLst/>
+          </a:prstGeom>
+          <a:solidFill>
+            <a:srgbClr val="F3F4FB"/>
+          </a:solidFill>
+          <a:ln>
+            <a:noFill/>
+          </a:ln>
+          <a:effectLst/>
+        </p:spPr>
+        <p:style>
+          <a:lnRef idx="1">
+            <a:schemeClr val="accent1"/>
+          </a:lnRef>
+          <a:fillRef idx="3">
+            <a:schemeClr val="accent1"/>
+          </a:fillRef>
+          <a:effectRef idx="2">
+            <a:schemeClr val="accent1"/>
+          </a:effectRef>
+          <a:fontRef idx="minor">
+            <a:schemeClr val="lt1"/>
+          </a:fontRef>
+        </p:style>
+        <p:txBody>
+          <a:bodyPr rtlCol="0" anchor="ctr"/>
+          <a:lstStyle/>
+          <a:p>
+            <a:pPr algn="ctr"/>
+          </a:p>
+        </p:txBody>
+      </p:sp>
+      <p:sp>
+        <p:nvSpPr>
+          <p:cNvPr id="8" name="Rectangle 7"/>
+          <p:cNvSpPr/>
+          <p:nvPr/>
+        </p:nvSpPr>
+        <p:spPr>
+          <a:xfrm>
+            <a:off x="548640" y="1554480"/>
+            <a:ext cx="146304" cy="1234440"/>
+          </a:xfrm>
+          <a:prstGeom prst="rect">
+            <a:avLst/>
+          </a:prstGeom>
+          <a:solidFill>
+            <a:srgbClr val="4C3AE3"/>
+          </a:solidFill>
+          <a:ln>
+            <a:noFill/>
+          </a:ln>
+          <a:effectLst/>
+        </p:spPr>
+        <p:style>
+          <a:lnRef idx="1">
+            <a:schemeClr val="accent1"/>
+          </a:lnRef>
+          <a:fillRef idx="3">
+            <a:schemeClr val="accent1"/>
+          </a:fillRef>
+          <a:effectRef idx="2">
+            <a:schemeClr val="accent1"/>
+          </a:effectRef>
+          <a:fontRef idx="minor">
+            <a:schemeClr val="lt1"/>
+          </a:fontRef>
+        </p:style>
+        <p:txBody>
+          <a:bodyPr rtlCol="0" anchor="ctr"/>
+          <a:lstStyle/>
+          <a:p>
+            <a:pPr algn="ctr"/>
+          </a:p>
+        </p:txBody>
+      </p:sp>
+      <p:sp>
+        <p:nvSpPr>
+          <p:cNvPr id="9" name="TextBox 8"/>
+          <p:cNvSpPr txBox="1"/>
+          <p:nvPr/>
+        </p:nvSpPr>
+        <p:spPr>
+          <a:xfrm>
+            <a:off x="914400" y="1737360"/>
+            <a:ext cx="10424160" cy="914400"/>
+          </a:xfrm>
+          <a:prstGeom prst="rect">
+            <a:avLst/>
+          </a:prstGeom>
+          <a:noFill/>
+        </p:spPr>
+        <p:txBody>
+          <a:bodyPr wrap="square" anchor="ctr">
+            <a:spAutoFit/>
+          </a:bodyPr>
+          <a:lstStyle/>
+          <a:p>
+            <a:pPr algn="l">
+              <a:lnSpc>
+                <a:spcPct val="108000"/>
+              </a:lnSpc>
+              <a:spcAft>
+                <a:spcPts val="600"/>
+              </a:spcAft>
+            </a:pPr>
+            <a:r>
+              <a:rPr sz="1900" b="1">
+                <a:solidFill>
+                  <a:srgbClr val="4C3AE3"/>
+                </a:solidFill>
+                <a:latin typeface="Meiryo"/>
+              </a:rPr>
+              <a:t>教材として</a:t>
+            </a:r>
+            <a:r>
+              <a:rPr sz="1600" b="0">
+                <a:solidFill>
+                  <a:srgbClr val="1F2430"/>
+                </a:solidFill>
+                <a:latin typeface="Meiryo"/>
+              </a:rPr>
+              <a:t>    チームに『ハーネスとは何か』を5分で説明する</a:t>
+            </a:r>
+          </a:p>
+        </p:txBody>
+      </p:sp>
+      <p:sp>
+        <p:nvSpPr>
+          <p:cNvPr id="10" name="Rectangle 9"/>
+          <p:cNvSpPr/>
+          <p:nvPr/>
+        </p:nvSpPr>
+        <p:spPr>
+          <a:xfrm>
+            <a:off x="548640" y="3063240"/>
+            <a:ext cx="11064240" cy="1234440"/>
+          </a:xfrm>
+          <a:prstGeom prst="rect">
+            <a:avLst/>
+          </a:prstGeom>
+          <a:solidFill>
+            <a:srgbClr val="F3F4FB"/>
+          </a:solidFill>
+          <a:ln>
+            <a:noFill/>
+          </a:ln>
+          <a:effectLst/>
+        </p:spPr>
+        <p:style>
+          <a:lnRef idx="1">
+            <a:schemeClr val="accent1"/>
+          </a:lnRef>
+          <a:fillRef idx="3">
+            <a:schemeClr val="accent1"/>
+          </a:fillRef>
+          <a:effectRef idx="2">
+            <a:schemeClr val="accent1"/>
+          </a:effectRef>
+          <a:fontRef idx="minor">
+            <a:schemeClr val="lt1"/>
+          </a:fontRef>
+        </p:style>
+        <p:txBody>
+          <a:bodyPr rtlCol="0" anchor="ctr"/>
+          <a:lstStyle/>
+          <a:p>
+            <a:pPr algn="ctr"/>
+          </a:p>
+        </p:txBody>
+      </p:sp>
+      <p:sp>
+        <p:nvSpPr>
+          <p:cNvPr id="11" name="Rectangle 10"/>
+          <p:cNvSpPr/>
+          <p:nvPr/>
+        </p:nvSpPr>
+        <p:spPr>
+          <a:xfrm>
+            <a:off x="548640" y="3063240"/>
+            <a:ext cx="146304" cy="1234440"/>
+          </a:xfrm>
+          <a:prstGeom prst="rect">
+            <a:avLst/>
+          </a:prstGeom>
+          <a:solidFill>
+            <a:srgbClr val="4C3AE3"/>
+          </a:solidFill>
+          <a:ln>
+            <a:noFill/>
+          </a:ln>
+          <a:effectLst/>
+        </p:spPr>
+        <p:style>
+          <a:lnRef idx="1">
+            <a:schemeClr val="accent1"/>
+          </a:lnRef>
+          <a:fillRef idx="3">
+            <a:schemeClr val="accent1"/>
+          </a:fillRef>
+          <a:effectRef idx="2">
+            <a:schemeClr val="accent1"/>
+          </a:effectRef>
+          <a:fontRef idx="minor">
+            <a:schemeClr val="lt1"/>
+          </a:fontRef>
+        </p:style>
+        <p:txBody>
+          <a:bodyPr rtlCol="0" anchor="ctr"/>
+          <a:lstStyle/>
+          <a:p>
+            <a:pPr algn="ctr"/>
+          </a:p>
+        </p:txBody>
+      </p:sp>
+      <p:sp>
+        <p:nvSpPr>
+          <p:cNvPr id="12" name="TextBox 11"/>
+          <p:cNvSpPr txBox="1"/>
+          <p:nvPr/>
+        </p:nvSpPr>
+        <p:spPr>
+          <a:xfrm>
+            <a:off x="914400" y="3246120"/>
+            <a:ext cx="10424160" cy="914400"/>
+          </a:xfrm>
+          <a:prstGeom prst="rect">
+            <a:avLst/>
+          </a:prstGeom>
+          <a:noFill/>
+        </p:spPr>
+        <p:txBody>
+          <a:bodyPr wrap="square" anchor="ctr">
+            <a:spAutoFit/>
+          </a:bodyPr>
+          <a:lstStyle/>
+          <a:p>
+            <a:pPr algn="l">
+              <a:lnSpc>
+                <a:spcPct val="108000"/>
+              </a:lnSpc>
+              <a:spcAft>
+                <a:spcPts val="600"/>
+              </a:spcAft>
+            </a:pPr>
+            <a:r>
+              <a:rPr sz="1900" b="1">
+                <a:solidFill>
+                  <a:srgbClr val="4C3AE3"/>
+                </a:solidFill>
+                <a:latin typeface="Meiryo"/>
+              </a:rPr>
+              <a:t>設計の叩き台</a:t>
+            </a:r>
+            <a:r>
+              <a:rPr sz="1600" b="0">
+                <a:solidFill>
+                  <a:srgbClr val="1F2430"/>
+                </a:solidFill>
+                <a:latin typeface="Meiryo"/>
+              </a:rPr>
+              <a:t>    6層を自分のプロジェクトに当てはめる出発点</a:t>
+            </a:r>
+          </a:p>
+        </p:txBody>
+      </p:sp>
+      <p:sp>
+        <p:nvSpPr>
+          <p:cNvPr id="13" name="Rectangle 12"/>
+          <p:cNvSpPr/>
+          <p:nvPr/>
+        </p:nvSpPr>
+        <p:spPr>
+          <a:xfrm>
+            <a:off x="548640" y="4572000"/>
+            <a:ext cx="11064240" cy="1234440"/>
+          </a:xfrm>
+          <a:prstGeom prst="rect">
+            <a:avLst/>
+          </a:prstGeom>
+          <a:solidFill>
+            <a:srgbClr val="F3F4FB"/>
+          </a:solidFill>
+          <a:ln>
+            <a:noFill/>
+          </a:ln>
+          <a:effectLst/>
+        </p:spPr>
+        <p:style>
+          <a:lnRef idx="1">
+            <a:schemeClr val="accent1"/>
+          </a:lnRef>
+          <a:fillRef idx="3">
+            <a:schemeClr val="accent1"/>
+          </a:fillRef>
+          <a:effectRef idx="2">
+            <a:schemeClr val="accent1"/>
+          </a:effectRef>
+          <a:fontRef idx="minor">
+            <a:schemeClr val="lt1"/>
+          </a:fontRef>
+        </p:style>
+        <p:txBody>
+          <a:bodyPr rtlCol="0" anchor="ctr"/>
+          <a:lstStyle/>
+          <a:p>
+            <a:pPr algn="ctr"/>
+          </a:p>
+        </p:txBody>
+      </p:sp>
+      <p:sp>
+        <p:nvSpPr>
+          <p:cNvPr id="14" name="Rectangle 13"/>
+          <p:cNvSpPr/>
+          <p:nvPr/>
+        </p:nvSpPr>
+        <p:spPr>
+          <a:xfrm>
+            <a:off x="548640" y="4572000"/>
+            <a:ext cx="146304" cy="1234440"/>
+          </a:xfrm>
+          <a:prstGeom prst="rect">
+            <a:avLst/>
+          </a:prstGeom>
+          <a:solidFill>
+            <a:srgbClr val="4C3AE3"/>
+          </a:solidFill>
+          <a:ln>
+            <a:noFill/>
+          </a:ln>
+          <a:effectLst/>
+        </p:spPr>
+        <p:style>
+          <a:lnRef idx="1">
+            <a:schemeClr val="accent1"/>
+          </a:lnRef>
+          <a:fillRef idx="3">
+            <a:schemeClr val="accent1"/>
+          </a:fillRef>
+          <a:effectRef idx="2">
+            <a:schemeClr val="accent1"/>
+          </a:effectRef>
+          <a:fontRef idx="minor">
+            <a:schemeClr val="lt1"/>
+          </a:fontRef>
+        </p:style>
+        <p:txBody>
+          <a:bodyPr rtlCol="0" anchor="ctr"/>
+          <a:lstStyle/>
+          <a:p>
+            <a:pPr algn="ctr"/>
+          </a:p>
+        </p:txBody>
+      </p:sp>
+      <p:sp>
+        <p:nvSpPr>
+          <p:cNvPr id="15" name="TextBox 14"/>
+          <p:cNvSpPr txBox="1"/>
+          <p:nvPr/>
+        </p:nvSpPr>
+        <p:spPr>
+          <a:xfrm>
+            <a:off x="914400" y="4754880"/>
+            <a:ext cx="10424160" cy="914400"/>
+          </a:xfrm>
+          <a:prstGeom prst="rect">
+            <a:avLst/>
+          </a:prstGeom>
+          <a:noFill/>
+        </p:spPr>
+        <p:txBody>
+          <a:bodyPr wrap="square" anchor="ctr">
+            <a:spAutoFit/>
+          </a:bodyPr>
+          <a:lstStyle/>
+          <a:p>
+            <a:pPr algn="l">
+              <a:lnSpc>
+                <a:spcPct val="108000"/>
+              </a:lnSpc>
+              <a:spcAft>
+                <a:spcPts val="600"/>
+              </a:spcAft>
+            </a:pPr>
+            <a:r>
+              <a:rPr sz="1900" b="1">
+                <a:solidFill>
+                  <a:srgbClr val="4C3AE3"/>
+                </a:solidFill>
+                <a:latin typeface="Meiryo"/>
+              </a:rPr>
+              <a:t>安全弁の実演</a:t>
+            </a:r>
+            <a:r>
+              <a:rPr sz="1600" b="0">
+                <a:solidFill>
+                  <a:srgbClr val="1F2430"/>
+                </a:solidFill>
+                <a:latin typeface="Meiryo"/>
+              </a:rPr>
+              <a:t>    本番デプロイ/送信は必ず人間承認で止まる、を具体的に示す</a:t>
+            </a:r>
+          </a:p>
+        </p:txBody>
+      </p:sp>
+      <p:sp>
+        <p:nvSpPr>
+          <p:cNvPr id="16" name="TextBox 15"/>
+          <p:cNvSpPr txBox="1"/>
+          <p:nvPr/>
+        </p:nvSpPr>
+        <p:spPr>
+          <a:xfrm>
+            <a:off x="548640" y="6126480"/>
+            <a:ext cx="10972800" cy="548640"/>
+          </a:xfrm>
+          <a:prstGeom prst="rect">
+            <a:avLst/>
+          </a:prstGeom>
+          <a:noFill/>
+        </p:spPr>
+        <p:txBody>
+          <a:bodyPr wrap="square" anchor="t">
+            <a:spAutoFit/>
+          </a:bodyPr>
+          <a:lstStyle/>
+          <a:p>
+            <a:pPr algn="l">
+              <a:lnSpc>
+                <a:spcPct val="108000"/>
+              </a:lnSpc>
+              <a:spcAft>
+                <a:spcPts val="600"/>
+              </a:spcAft>
+            </a:pPr>
+            <a:r>
+              <a:rPr sz="1500" b="1">
+                <a:solidFill>
+                  <a:srgbClr val="5B6372"/>
+                </a:solidFill>
+                <a:latin typeface="Meiryo"/>
+              </a:rPr>
+              <a:t>要は「プロンプトを強くする」のではなく「環境（手綱と鞍）を設計する」を、動くコードで理解する教材。</a:t>
+            </a:r>
+          </a:p>
+        </p:txBody>
+      </p:sp>
+    </p:spTree>
+  </p:cSld>
+  <p:clrMapOvr>
+    <a:masterClrMapping/>
+  </p:clrMapOvr>
+</p:sld>
+</file>
+
+<file path=ppt/slides/slide9.xml><?xml version="1.0" encoding="utf-8"?>
+<p:sld xmlns:a="http://schemas.openxmlformats.org/drawingml/2006/main" xmlns:p="http://schemas.openxmlformats.org/presentationml/2006/main" xmlns:r="http://schemas.openxmlformats.org/officeDocument/2006/relationships">
+  <p:cSld>
+    <p:spTree>
+      <p:nvGrpSpPr>
+        <p:cNvPr id="1" name=""/>
+        <p:cNvGrpSpPr/>
+        <p:nvPr/>
+      </p:nvGrpSpPr>
+      <p:grpSpPr/>
+      <p:sp>
+        <p:nvSpPr>
+          <p:cNvPr id="2" name="Rectangle 1"/>
+          <p:cNvSpPr/>
+          <p:nvPr/>
+        </p:nvSpPr>
+        <p:spPr>
+          <a:xfrm>
+            <a:off x="0" y="0"/>
+            <a:ext cx="12191695" cy="6858000"/>
+          </a:xfrm>
+          <a:prstGeom prst="rect">
+            <a:avLst/>
+          </a:prstGeom>
+          <a:solidFill>
+            <a:srgbClr val="FFFFFF"/>
+          </a:solidFill>
+          <a:ln>
+            <a:noFill/>
+          </a:ln>
+          <a:effectLst/>
+        </p:spPr>
+        <p:style>
+          <a:lnRef idx="1">
+            <a:schemeClr val="accent1"/>
+          </a:lnRef>
+          <a:fillRef idx="3">
+            <a:schemeClr val="accent1"/>
+          </a:fillRef>
+          <a:effectRef idx="2">
+            <a:schemeClr val="accent1"/>
+          </a:effectRef>
+          <a:fontRef idx="minor">
+            <a:schemeClr val="lt1"/>
+          </a:fontRef>
+        </p:style>
+        <p:txBody>
+          <a:bodyPr rtlCol="0" anchor="ctr"/>
+          <a:lstStyle/>
+          <a:p>
+            <a:pPr algn="ctr"/>
+          </a:p>
+        </p:txBody>
+      </p:sp>
+      <p:sp>
+        <p:nvSpPr>
+          <p:cNvPr id="3" name="Rectangle 2"/>
+          <p:cNvSpPr/>
+          <p:nvPr/>
+        </p:nvSpPr>
+        <p:spPr>
+          <a:xfrm>
+            <a:off x="0" y="0"/>
+            <a:ext cx="12191695" cy="1051560"/>
+          </a:xfrm>
+          <a:prstGeom prst="rect">
+            <a:avLst/>
+          </a:prstGeom>
+          <a:solidFill>
+            <a:srgbClr val="4C3AE3"/>
+          </a:solidFill>
+          <a:ln>
+            <a:noFill/>
+          </a:ln>
+          <a:effectLst/>
+        </p:spPr>
+        <p:style>
+          <a:lnRef idx="1">
+            <a:schemeClr val="accent1"/>
+          </a:lnRef>
+          <a:fillRef idx="3">
+            <a:schemeClr val="accent1"/>
+          </a:fillRef>
+          <a:effectRef idx="2">
+            <a:schemeClr val="accent1"/>
+          </a:effectRef>
+          <a:fontRef idx="minor">
+            <a:schemeClr val="lt1"/>
+          </a:fontRef>
+        </p:style>
+        <p:txBody>
+          <a:bodyPr rtlCol="0" anchor="ctr"/>
+          <a:lstStyle/>
+          <a:p>
+            <a:pPr algn="ctr"/>
+          </a:p>
+        </p:txBody>
+      </p:sp>
+      <p:sp>
+        <p:nvSpPr>
+          <p:cNvPr id="4" name="Rectangle 3"/>
+          <p:cNvSpPr/>
+          <p:nvPr/>
+        </p:nvSpPr>
+        <p:spPr>
+          <a:xfrm>
+            <a:off x="0" y="1051560"/>
+            <a:ext cx="12191695" cy="48000"/>
+          </a:xfrm>
+          <a:prstGeom prst="rect">
+            <a:avLst/>
+          </a:prstGeom>
+          <a:solidFill>
+            <a:srgbClr val="9B8CFF"/>
+          </a:solidFill>
+          <a:ln>
+            <a:noFill/>
+          </a:ln>
+          <a:effectLst/>
+        </p:spPr>
+        <p:style>
+          <a:lnRef idx="1">
+            <a:schemeClr val="accent1"/>
+          </a:lnRef>
+          <a:fillRef idx="3">
+            <a:schemeClr val="accent1"/>
+          </a:fillRef>
+          <a:effectRef idx="2">
+            <a:schemeClr val="accent1"/>
+          </a:effectRef>
+          <a:fontRef idx="minor">
+            <a:schemeClr val="lt1"/>
+          </a:fontRef>
+        </p:style>
+        <p:txBody>
+          <a:bodyPr rtlCol="0" anchor="ctr"/>
+          <a:lstStyle/>
+          <a:p>
+            <a:pPr algn="ctr"/>
+          </a:p>
+        </p:txBody>
+      </p:sp>
+      <p:sp>
+        <p:nvSpPr>
+          <p:cNvPr id="5" name="TextBox 4"/>
+          <p:cNvSpPr txBox="1"/>
+          <p:nvPr/>
+        </p:nvSpPr>
+        <p:spPr>
+          <a:xfrm>
+            <a:off x="502920" y="109728"/>
+            <a:ext cx="1005840" cy="822960"/>
+          </a:xfrm>
+          <a:prstGeom prst="rect">
+            <a:avLst/>
+          </a:prstGeom>
+          <a:noFill/>
+        </p:spPr>
+        <p:txBody>
+          <a:bodyPr wrap="square" anchor="ctr">
+            <a:spAutoFit/>
+          </a:bodyPr>
+          <a:lstStyle/>
+          <a:p>
+            <a:pPr algn="l">
+              <a:lnSpc>
+                <a:spcPct val="108000"/>
+              </a:lnSpc>
+              <a:spcAft>
+                <a:spcPts val="600"/>
+              </a:spcAft>
+            </a:pPr>
+            <a:r>
+              <a:rPr sz="3400" b="1">
+                <a:solidFill>
+                  <a:srgbClr val="FFFFFF"/>
+                </a:solidFill>
+                <a:latin typeface="Meiryo"/>
+              </a:rPr>
+              <a:t>08</a:t>
             </a:r>
           </a:p>
         </p:txBody>
